--- a/CoworkPlaybook/Cowork_教育訓練簡報_製造業版.pptx
+++ b/CoworkPlaybook/Cowork_教育訓練簡報_製造業版.pptx
@@ -11834,7 +11834,7 @@
                 <a:ea typeface="Microsoft JhengHei" pitchFamily="34" charset="-122"/>
                 <a:cs typeface="Microsoft JhengHei" pitchFamily="34" charset="-120"/>
               </a:rPr>
-              <a:t>不能存取本機檔案、刪除 OneDrive/SharePoint 檔案或讀取加密檔；附件 &lt;200MB，自訂技能未驗證需審閱。</a:t>
+              <a:t>不能存取本機檔案、刪除 OneDrive/SharePoint 檔案或讀取加密檔；附件 &lt;200MB；自訂技能與第三方 plugin 未經 Microsoft 驗證，需自行審閱。官方明列不適用於「免人工審查即需保證正確」的用途。</a:t>
             </a:r>
             <a:endParaRPr lang="en-US" sz="1300" dirty="0"/>
           </a:p>
@@ -12705,7 +12705,7 @@
                 <a:ea typeface="Microsoft JhengHei" pitchFamily="34" charset="-122"/>
                 <a:cs typeface="Microsoft JhengHei" pitchFamily="34" charset="-120"/>
               </a:rPr>
-              <a:t>開始前請確認：M365 Copilot 授權、已啟用用量計費（Cowork 現已正式開放）、租戶已啟用 Anthropic 子處理者；可在 Web/桌面/行動/Outlook/Teams 使用（本機瀏覽器工作僅限網頁版＋最新版 Edge）。</a:t>
+              <a:t>開始前請確認：每位使用者一張 M365 Copilot 授權、管理員已啟用用量計費（Copilot Credits，未啟用則無法存取）、租戶位於 Anthropic 支援地區；可在 Web/桌面/行動/Outlook/Teams 使用（本機瀏覽器工作僅限網頁版＋Edge 150 以上，且預設停用需管理員開啟）。</a:t>
             </a:r>
             <a:endParaRPr lang="en-US" sz="1500" dirty="0"/>
           </a:p>
@@ -13036,7 +13036,7 @@
                 <a:ea typeface="Microsoft JhengHei" pitchFamily="34" charset="-122"/>
                 <a:cs typeface="Microsoft JhengHei" pitchFamily="34" charset="-120"/>
               </a:rPr>
-              <a:t>模型選擇器支援 Auto、Claude Opus/Sonnet、Sonnet+Opus 顧問配對、Fable 5 preview、GPT 5.5</a:t>
+              <a:t>模型選擇器：Auto（預設）、GPT 5.5 Frontier、GPT 5.6 Sol／Terra、Opus 5、Sonnet 5、Fable 5（預覽・預設關閉）</a:t>
             </a:r>
             <a:endParaRPr lang="en-US" sz="1400" dirty="0"/>
           </a:p>
@@ -13099,7 +13099,7 @@
                 <a:ea typeface="Microsoft JhengHei" pitchFamily="34" charset="-122"/>
                 <a:cs typeface="Microsoft JhengHei" pitchFamily="34" charset="-120"/>
               </a:rPr>
-              <a:t>想要自動觸發？到「排程」頁設定事件驅動任務（收到指定信件／被 @提及時自動執行）</a:t>
+              <a:t>想要自動觸發？到「Automations」頁設定排程提示（上限 5 個）或事件觸發任務（收信／被 @提及）</a:t>
             </a:r>
             <a:endParaRPr lang="en-US" sz="1400" dirty="0"/>
           </a:p>
@@ -14212,8 +14212,8 @@
         </p:nvSpPr>
         <p:spPr>
           <a:xfrm>
-            <a:off x="640080" y="1828800"/>
-            <a:ext cx="2743200" cy="786384"/>
+            <a:off x="640080" y="1737360"/>
+            <a:ext cx="2743200" cy="457200"/>
           </a:xfrm>
           <a:prstGeom prst="rect">
             <a:avLst/>
@@ -14232,8 +14232,8 @@
         </p:nvSpPr>
         <p:spPr>
           <a:xfrm>
-            <a:off x="3383280" y="1828800"/>
-            <a:ext cx="4023360" cy="786384"/>
+            <a:off x="3383280" y="1737360"/>
+            <a:ext cx="4023360" cy="457200"/>
           </a:xfrm>
           <a:prstGeom prst="rect">
             <a:avLst/>
@@ -14252,8 +14252,8 @@
         </p:nvSpPr>
         <p:spPr>
           <a:xfrm>
-            <a:off x="7406640" y="1828800"/>
-            <a:ext cx="4142232" cy="786384"/>
+            <a:off x="7406640" y="1737360"/>
+            <a:ext cx="4142232" cy="457200"/>
           </a:xfrm>
           <a:prstGeom prst="rect">
             <a:avLst/>
@@ -14272,8 +14272,8 @@
         </p:nvSpPr>
         <p:spPr>
           <a:xfrm>
-            <a:off x="640080" y="1828800"/>
-            <a:ext cx="2743200" cy="786384"/>
+            <a:off x="640080" y="1737360"/>
+            <a:ext cx="2743200" cy="457200"/>
           </a:xfrm>
           <a:prstGeom prst="rect">
             <a:avLst/>
@@ -14300,8 +14300,8 @@
         </p:nvSpPr>
         <p:spPr>
           <a:xfrm>
-            <a:off x="3383280" y="1828800"/>
-            <a:ext cx="4023360" cy="786384"/>
+            <a:off x="3383280" y="1737360"/>
+            <a:ext cx="4023360" cy="457200"/>
           </a:xfrm>
           <a:prstGeom prst="rect">
             <a:avLst/>
@@ -14317,7 +14317,7 @@
               <a:buNone/>
             </a:pPr>
             <a:r>
-              <a:rPr lang="en-US" sz="1500" b="1" dirty="0">
+              <a:rPr lang="en-US" sz="1400" b="1" dirty="0">
                 <a:solidFill>
                   <a:srgbClr val="FFFFFF"/>
                 </a:solidFill>
@@ -14327,7 +14327,7 @@
               </a:rPr>
               <a:t>一般 Copilot Chat</a:t>
             </a:r>
-            <a:endParaRPr lang="en-US" sz="1500" dirty="0"/>
+            <a:endParaRPr lang="en-US" sz="1400" dirty="0"/>
           </a:p>
         </p:txBody>
       </p:sp>
@@ -14339,8 +14339,8 @@
         </p:nvSpPr>
         <p:spPr>
           <a:xfrm>
-            <a:off x="7406640" y="1828800"/>
-            <a:ext cx="4142232" cy="786384"/>
+            <a:off x="7406640" y="1737360"/>
+            <a:ext cx="4142232" cy="457200"/>
           </a:xfrm>
           <a:prstGeom prst="rect">
             <a:avLst/>
@@ -14356,7 +14356,7 @@
               <a:buNone/>
             </a:pPr>
             <a:r>
-              <a:rPr lang="en-US" sz="1500" b="1" dirty="0">
+              <a:rPr lang="en-US" sz="1400" b="1" dirty="0">
                 <a:solidFill>
                   <a:srgbClr val="FFFFFF"/>
                 </a:solidFill>
@@ -14366,7 +14366,7 @@
               </a:rPr>
               <a:t>Copilot Cowork</a:t>
             </a:r>
-            <a:endParaRPr lang="en-US" sz="1500" dirty="0"/>
+            <a:endParaRPr lang="en-US" sz="1400" dirty="0"/>
           </a:p>
         </p:txBody>
       </p:sp>
@@ -14378,8 +14378,8 @@
         </p:nvSpPr>
         <p:spPr>
           <a:xfrm>
-            <a:off x="640080" y="2615184"/>
-            <a:ext cx="10908792" cy="786384"/>
+            <a:off x="640080" y="2194560"/>
+            <a:ext cx="10908792" cy="457200"/>
           </a:xfrm>
           <a:prstGeom prst="rect">
             <a:avLst/>
@@ -14398,8 +14398,8 @@
         </p:nvSpPr>
         <p:spPr>
           <a:xfrm>
-            <a:off x="822960" y="2615184"/>
-            <a:ext cx="2468880" cy="786384"/>
+            <a:off x="822960" y="2194560"/>
+            <a:ext cx="2468880" cy="457200"/>
           </a:xfrm>
           <a:prstGeom prst="rect">
             <a:avLst/>
@@ -14415,7 +14415,7 @@
               <a:buNone/>
             </a:pPr>
             <a:r>
-              <a:rPr lang="en-US" sz="1400" b="1" dirty="0">
+              <a:rPr lang="en-US" sz="1250" b="1" dirty="0">
                 <a:solidFill>
                   <a:srgbClr val="1E2235"/>
                 </a:solidFill>
@@ -14425,7 +14425,7 @@
               </a:rPr>
               <a:t>互動方式</a:t>
             </a:r>
-            <a:endParaRPr lang="en-US" sz="1400" dirty="0"/>
+            <a:endParaRPr lang="en-US" sz="1250" dirty="0"/>
           </a:p>
         </p:txBody>
       </p:sp>
@@ -14437,8 +14437,8 @@
         </p:nvSpPr>
         <p:spPr>
           <a:xfrm>
-            <a:off x="3566160" y="2615184"/>
-            <a:ext cx="3657600" cy="786384"/>
+            <a:off x="3566160" y="2194560"/>
+            <a:ext cx="3657600" cy="457200"/>
           </a:xfrm>
           <a:prstGeom prst="rect">
             <a:avLst/>
@@ -14454,7 +14454,7 @@
               <a:buNone/>
             </a:pPr>
             <a:r>
-              <a:rPr lang="en-US" sz="1400" dirty="0">
+              <a:rPr lang="en-US" sz="1250" dirty="0">
                 <a:solidFill>
                   <a:srgbClr val="5B6079"/>
                 </a:solidFill>
@@ -14464,7 +14464,7 @@
               </a:rPr>
               <a:t>快速單輪問答</a:t>
             </a:r>
-            <a:endParaRPr lang="en-US" sz="1400" dirty="0"/>
+            <a:endParaRPr lang="en-US" sz="1250" dirty="0"/>
           </a:p>
         </p:txBody>
       </p:sp>
@@ -14476,8 +14476,8 @@
         </p:nvSpPr>
         <p:spPr>
           <a:xfrm>
-            <a:off x="7589520" y="2615184"/>
-            <a:ext cx="3776472" cy="786384"/>
+            <a:off x="7589520" y="2194560"/>
+            <a:ext cx="3776472" cy="457200"/>
           </a:xfrm>
           <a:prstGeom prst="rect">
             <a:avLst/>
@@ -14493,7 +14493,7 @@
               <a:buNone/>
             </a:pPr>
             <a:r>
-              <a:rPr lang="en-US" sz="1400" dirty="0">
+              <a:rPr lang="en-US" sz="1250" dirty="0">
                 <a:solidFill>
                   <a:srgbClr val="1E2235"/>
                 </a:solidFill>
@@ -14503,7 +14503,7 @@
               </a:rPr>
               <a:t>交付目標，跨 App 自主多步執行</a:t>
             </a:r>
-            <a:endParaRPr lang="en-US" sz="1400" dirty="0"/>
+            <a:endParaRPr lang="en-US" sz="1250" dirty="0"/>
           </a:p>
         </p:txBody>
       </p:sp>
@@ -14515,8 +14515,8 @@
         </p:nvSpPr>
         <p:spPr>
           <a:xfrm>
-            <a:off x="640080" y="3401568"/>
-            <a:ext cx="10908792" cy="786384"/>
+            <a:off x="640080" y="2651760"/>
+            <a:ext cx="10908792" cy="457200"/>
           </a:xfrm>
           <a:prstGeom prst="rect">
             <a:avLst/>
@@ -14535,8 +14535,8 @@
         </p:nvSpPr>
         <p:spPr>
           <a:xfrm>
-            <a:off x="822960" y="3401568"/>
-            <a:ext cx="2468880" cy="786384"/>
+            <a:off x="822960" y="2651760"/>
+            <a:ext cx="2468880" cy="457200"/>
           </a:xfrm>
           <a:prstGeom prst="rect">
             <a:avLst/>
@@ -14552,7 +14552,7 @@
               <a:buNone/>
             </a:pPr>
             <a:r>
-              <a:rPr lang="en-US" sz="1400" b="1" dirty="0">
+              <a:rPr lang="en-US" sz="1250" b="1" dirty="0">
                 <a:solidFill>
                   <a:srgbClr val="1E2235"/>
                 </a:solidFill>
@@ -14560,9 +14560,9 @@
                 <a:ea typeface="Microsoft JhengHei" pitchFamily="34" charset="-122"/>
                 <a:cs typeface="Microsoft JhengHei" pitchFamily="34" charset="-120"/>
               </a:rPr>
-              <a:t>檔案處理</a:t>
-            </a:r>
-            <a:endParaRPr lang="en-US" sz="1400" dirty="0"/>
+              <a:t>速度</a:t>
+            </a:r>
+            <a:endParaRPr lang="en-US" sz="1250" dirty="0"/>
           </a:p>
         </p:txBody>
       </p:sp>
@@ -14574,8 +14574,8 @@
         </p:nvSpPr>
         <p:spPr>
           <a:xfrm>
-            <a:off x="3566160" y="3401568"/>
-            <a:ext cx="3657600" cy="786384"/>
+            <a:off x="3566160" y="2651760"/>
+            <a:ext cx="3657600" cy="457200"/>
           </a:xfrm>
           <a:prstGeom prst="rect">
             <a:avLst/>
@@ -14591,7 +14591,7 @@
               <a:buNone/>
             </a:pPr>
             <a:r>
-              <a:rPr lang="en-US" sz="1400" dirty="0">
+              <a:rPr lang="en-US" sz="1250" dirty="0">
                 <a:solidFill>
                   <a:srgbClr val="5B6079"/>
                 </a:solidFill>
@@ -14599,9 +14599,9 @@
                 <a:ea typeface="Microsoft JhengHei" pitchFamily="34" charset="-122"/>
                 <a:cs typeface="Microsoft JhengHei" pitchFamily="34" charset="-120"/>
               </a:rPr>
-              <a:t>貼上片段內容</a:t>
-            </a:r>
-            <a:endParaRPr lang="en-US" sz="1400" dirty="0"/>
+              <a:t>秒～分鐘</a:t>
+            </a:r>
+            <a:endParaRPr lang="en-US" sz="1250" dirty="0"/>
           </a:p>
         </p:txBody>
       </p:sp>
@@ -14613,8 +14613,8 @@
         </p:nvSpPr>
         <p:spPr>
           <a:xfrm>
-            <a:off x="7589520" y="3401568"/>
-            <a:ext cx="3776472" cy="786384"/>
+            <a:off x="7589520" y="2651760"/>
+            <a:ext cx="3776472" cy="457200"/>
           </a:xfrm>
           <a:prstGeom prst="rect">
             <a:avLst/>
@@ -14630,7 +14630,7 @@
               <a:buNone/>
             </a:pPr>
             <a:r>
-              <a:rPr lang="en-US" sz="1400" dirty="0">
+              <a:rPr lang="en-US" sz="1250" dirty="0">
                 <a:solidFill>
                   <a:srgbClr val="1E2235"/>
                 </a:solidFill>
@@ -14638,9 +14638,9 @@
                 <a:ea typeface="Microsoft JhengHei" pitchFamily="34" charset="-122"/>
                 <a:cs typeface="Microsoft JhengHei" pitchFamily="34" charset="-120"/>
               </a:rPr>
-              <a:t>讀取雲端附件、產出新檔案；不存取本機檔案</a:t>
-            </a:r>
-            <a:endParaRPr lang="en-US" sz="1400" dirty="0"/>
+              <a:t>分鐘～數小時（自主執行）</a:t>
+            </a:r>
+            <a:endParaRPr lang="en-US" sz="1250" dirty="0"/>
           </a:p>
         </p:txBody>
       </p:sp>
@@ -14652,8 +14652,8 @@
         </p:nvSpPr>
         <p:spPr>
           <a:xfrm>
-            <a:off x="640080" y="4187952"/>
-            <a:ext cx="10908792" cy="786384"/>
+            <a:off x="640080" y="3108960"/>
+            <a:ext cx="10908792" cy="457200"/>
           </a:xfrm>
           <a:prstGeom prst="rect">
             <a:avLst/>
@@ -14672,8 +14672,8 @@
         </p:nvSpPr>
         <p:spPr>
           <a:xfrm>
-            <a:off x="822960" y="4187952"/>
-            <a:ext cx="2468880" cy="786384"/>
+            <a:off x="822960" y="3108960"/>
+            <a:ext cx="2468880" cy="457200"/>
           </a:xfrm>
           <a:prstGeom prst="rect">
             <a:avLst/>
@@ -14689,7 +14689,7 @@
               <a:buNone/>
             </a:pPr>
             <a:r>
-              <a:rPr lang="en-US" sz="1400" b="1" dirty="0">
+              <a:rPr lang="en-US" sz="1250" b="1" dirty="0">
                 <a:solidFill>
                   <a:srgbClr val="1E2235"/>
                 </a:solidFill>
@@ -14697,9 +14697,9 @@
                 <a:ea typeface="Microsoft JhengHei" pitchFamily="34" charset="-122"/>
                 <a:cs typeface="Microsoft JhengHei" pitchFamily="34" charset="-120"/>
               </a:rPr>
-              <a:t>技能運用</a:t>
-            </a:r>
-            <a:endParaRPr lang="en-US" sz="1400" dirty="0"/>
+              <a:t>任務複雜度</a:t>
+            </a:r>
+            <a:endParaRPr lang="en-US" sz="1250" dirty="0"/>
           </a:p>
         </p:txBody>
       </p:sp>
@@ -14711,8 +14711,8 @@
         </p:nvSpPr>
         <p:spPr>
           <a:xfrm>
-            <a:off x="3566160" y="4187952"/>
-            <a:ext cx="3657600" cy="786384"/>
+            <a:off x="3566160" y="3108960"/>
+            <a:ext cx="3657600" cy="457200"/>
           </a:xfrm>
           <a:prstGeom prst="rect">
             <a:avLst/>
@@ -14728,7 +14728,7 @@
               <a:buNone/>
             </a:pPr>
             <a:r>
-              <a:rPr lang="en-US" sz="1400" dirty="0">
+              <a:rPr lang="en-US" sz="1250" dirty="0">
                 <a:solidFill>
                   <a:srgbClr val="5B6079"/>
                 </a:solidFill>
@@ -14736,9 +14736,9 @@
                 <a:ea typeface="Microsoft JhengHei" pitchFamily="34" charset="-122"/>
                 <a:cs typeface="Microsoft JhengHei" pitchFamily="34" charset="-120"/>
               </a:rPr>
-              <a:t>單一對話能力</a:t>
-            </a:r>
-            <a:endParaRPr lang="en-US" sz="1400" dirty="0"/>
+              <a:t>單步驟、單一工作階段</a:t>
+            </a:r>
+            <a:endParaRPr lang="en-US" sz="1250" dirty="0"/>
           </a:p>
         </p:txBody>
       </p:sp>
@@ -14750,8 +14750,8 @@
         </p:nvSpPr>
         <p:spPr>
           <a:xfrm>
-            <a:off x="7589520" y="4187952"/>
-            <a:ext cx="3776472" cy="786384"/>
+            <a:off x="7589520" y="3108960"/>
+            <a:ext cx="3776472" cy="457200"/>
           </a:xfrm>
           <a:prstGeom prst="rect">
             <a:avLst/>
@@ -14767,7 +14767,7 @@
               <a:buNone/>
             </a:pPr>
             <a:r>
-              <a:rPr lang="en-US" sz="1400" dirty="0">
+              <a:rPr lang="en-US" sz="1250" dirty="0">
                 <a:solidFill>
                   <a:srgbClr val="1E2235"/>
                 </a:solidFill>
@@ -14775,9 +14775,9 @@
                 <a:ea typeface="Microsoft JhengHei" pitchFamily="34" charset="-122"/>
                 <a:cs typeface="Microsoft JhengHei" pitchFamily="34" charset="-120"/>
               </a:rPr>
-              <a:t>自動載入 13 個內建技能與自訂技能</a:t>
-            </a:r>
-            <a:endParaRPr lang="en-US" sz="1400" dirty="0"/>
+              <a:t>跨任務與來源的多步驟工作流</a:t>
+            </a:r>
+            <a:endParaRPr lang="en-US" sz="1250" dirty="0"/>
           </a:p>
         </p:txBody>
       </p:sp>
@@ -14789,8 +14789,8 @@
         </p:nvSpPr>
         <p:spPr>
           <a:xfrm>
-            <a:off x="640080" y="4974336"/>
-            <a:ext cx="10908792" cy="786384"/>
+            <a:off x="640080" y="3566160"/>
+            <a:ext cx="10908792" cy="457200"/>
           </a:xfrm>
           <a:prstGeom prst="rect">
             <a:avLst/>
@@ -14809,8 +14809,8 @@
         </p:nvSpPr>
         <p:spPr>
           <a:xfrm>
-            <a:off x="822960" y="4974336"/>
-            <a:ext cx="2468880" cy="786384"/>
+            <a:off x="822960" y="3566160"/>
+            <a:ext cx="2468880" cy="457200"/>
           </a:xfrm>
           <a:prstGeom prst="rect">
             <a:avLst/>
@@ -14826,7 +14826,7 @@
               <a:buNone/>
             </a:pPr>
             <a:r>
-              <a:rPr lang="en-US" sz="1400" b="1" dirty="0">
+              <a:rPr lang="en-US" sz="1250" b="1" dirty="0">
                 <a:solidFill>
                   <a:srgbClr val="1E2235"/>
                 </a:solidFill>
@@ -14834,9 +14834,9 @@
                 <a:ea typeface="Microsoft JhengHei" pitchFamily="34" charset="-122"/>
                 <a:cs typeface="Microsoft JhengHei" pitchFamily="34" charset="-120"/>
               </a:rPr>
-              <a:t>產出</a:t>
-            </a:r>
-            <a:endParaRPr lang="en-US" sz="1400" dirty="0"/>
+              <a:t>檔案處理</a:t>
+            </a:r>
+            <a:endParaRPr lang="en-US" sz="1250" dirty="0"/>
           </a:p>
         </p:txBody>
       </p:sp>
@@ -14848,8 +14848,8 @@
         </p:nvSpPr>
         <p:spPr>
           <a:xfrm>
-            <a:off x="3566160" y="4974336"/>
-            <a:ext cx="3657600" cy="786384"/>
+            <a:off x="3566160" y="3566160"/>
+            <a:ext cx="3657600" cy="457200"/>
           </a:xfrm>
           <a:prstGeom prst="rect">
             <a:avLst/>
@@ -14865,7 +14865,7 @@
               <a:buNone/>
             </a:pPr>
             <a:r>
-              <a:rPr lang="en-US" sz="1400" dirty="0">
+              <a:rPr lang="en-US" sz="1250" dirty="0">
                 <a:solidFill>
                   <a:srgbClr val="5B6079"/>
                 </a:solidFill>
@@ -14873,9 +14873,9 @@
                 <a:ea typeface="Microsoft JhengHei" pitchFamily="34" charset="-122"/>
                 <a:cs typeface="Microsoft JhengHei" pitchFamily="34" charset="-120"/>
               </a:rPr>
-              <a:t>聊天視窗的文字</a:t>
-            </a:r>
-            <a:endParaRPr lang="en-US" sz="1400" dirty="0"/>
+              <a:t>貼上片段內容</a:t>
+            </a:r>
+            <a:endParaRPr lang="en-US" sz="1250" dirty="0"/>
           </a:p>
         </p:txBody>
       </p:sp>
@@ -14887,8 +14887,8 @@
         </p:nvSpPr>
         <p:spPr>
           <a:xfrm>
-            <a:off x="7589520" y="4974336"/>
-            <a:ext cx="3776472" cy="786384"/>
+            <a:off x="7589520" y="3566160"/>
+            <a:ext cx="3776472" cy="457200"/>
           </a:xfrm>
           <a:prstGeom prst="rect">
             <a:avLst/>
@@ -14904,7 +14904,7 @@
               <a:buNone/>
             </a:pPr>
             <a:r>
-              <a:rPr lang="en-US" sz="1400" dirty="0">
+              <a:rPr lang="en-US" sz="1250" dirty="0">
                 <a:solidFill>
                   <a:srgbClr val="1E2235"/>
                 </a:solidFill>
@@ -14912,9 +14912,9 @@
                 <a:ea typeface="Microsoft JhengHei" pitchFamily="34" charset="-122"/>
                 <a:cs typeface="Microsoft JhengHei" pitchFamily="34" charset="-120"/>
               </a:rPr>
-              <a:t>OneDrive 中真實的文件、試算表、簡報</a:t>
-            </a:r>
-            <a:endParaRPr lang="en-US" sz="1400" dirty="0"/>
+              <a:t>讀取雲端附件、產出新檔案；不存取本機檔案</a:t>
+            </a:r>
+            <a:endParaRPr lang="en-US" sz="1250" dirty="0"/>
           </a:p>
         </p:txBody>
       </p:sp>
@@ -14926,8 +14926,8 @@
         </p:nvSpPr>
         <p:spPr>
           <a:xfrm>
-            <a:off x="640080" y="5760720"/>
-            <a:ext cx="10908792" cy="786384"/>
+            <a:off x="640080" y="4023360"/>
+            <a:ext cx="10908792" cy="457200"/>
           </a:xfrm>
           <a:prstGeom prst="rect">
             <a:avLst/>
@@ -14946,8 +14946,8 @@
         </p:nvSpPr>
         <p:spPr>
           <a:xfrm>
-            <a:off x="822960" y="5760720"/>
-            <a:ext cx="2468880" cy="786384"/>
+            <a:off x="822960" y="4023360"/>
+            <a:ext cx="2468880" cy="457200"/>
           </a:xfrm>
           <a:prstGeom prst="rect">
             <a:avLst/>
@@ -14963,7 +14963,7 @@
               <a:buNone/>
             </a:pPr>
             <a:r>
-              <a:rPr lang="en-US" sz="1400" b="1" dirty="0">
+              <a:rPr lang="en-US" sz="1250" b="1" dirty="0">
                 <a:solidFill>
                   <a:srgbClr val="1E2235"/>
                 </a:solidFill>
@@ -14971,22 +14971,570 @@
                 <a:ea typeface="Microsoft JhengHei" pitchFamily="34" charset="-122"/>
                 <a:cs typeface="Microsoft JhengHei" pitchFamily="34" charset="-120"/>
               </a:rPr>
+              <a:t>技能運用</a:t>
+            </a:r>
+            <a:endParaRPr lang="en-US" sz="1250" dirty="0"/>
+          </a:p>
+        </p:txBody>
+      </p:sp>
+      <p:sp>
+        <p:nvSpPr>
+          <p:cNvPr id="29" name="Text 27"/>
+          <p:cNvSpPr/>
+          <p:nvPr/>
+        </p:nvSpPr>
+        <p:spPr>
+          <a:xfrm>
+            <a:off x="3566160" y="4023360"/>
+            <a:ext cx="3657600" cy="457200"/>
+          </a:xfrm>
+          <a:prstGeom prst="rect">
+            <a:avLst/>
+          </a:prstGeom>
+          <a:noFill/>
+          <a:ln/>
+        </p:spPr>
+        <p:txBody>
+          <a:bodyPr wrap="square" rtlCol="0" anchor="ctr"/>
+          <a:lstStyle/>
+          <a:p>
+            <a:pPr indent="0" marL="0">
+              <a:buNone/>
+            </a:pPr>
+            <a:r>
+              <a:rPr lang="en-US" sz="1250" dirty="0">
+                <a:solidFill>
+                  <a:srgbClr val="5B6079"/>
+                </a:solidFill>
+                <a:latin typeface="Microsoft JhengHei" pitchFamily="34" charset="0"/>
+                <a:ea typeface="Microsoft JhengHei" pitchFamily="34" charset="-122"/>
+                <a:cs typeface="Microsoft JhengHei" pitchFamily="34" charset="-120"/>
+              </a:rPr>
+              <a:t>單一對話能力</a:t>
+            </a:r>
+            <a:endParaRPr lang="en-US" sz="1250" dirty="0"/>
+          </a:p>
+        </p:txBody>
+      </p:sp>
+      <p:sp>
+        <p:nvSpPr>
+          <p:cNvPr id="30" name="Text 28"/>
+          <p:cNvSpPr/>
+          <p:nvPr/>
+        </p:nvSpPr>
+        <p:spPr>
+          <a:xfrm>
+            <a:off x="7589520" y="4023360"/>
+            <a:ext cx="3776472" cy="457200"/>
+          </a:xfrm>
+          <a:prstGeom prst="rect">
+            <a:avLst/>
+          </a:prstGeom>
+          <a:noFill/>
+          <a:ln/>
+        </p:spPr>
+        <p:txBody>
+          <a:bodyPr wrap="square" rtlCol="0" anchor="ctr"/>
+          <a:lstStyle/>
+          <a:p>
+            <a:pPr indent="0" marL="0">
+              <a:buNone/>
+            </a:pPr>
+            <a:r>
+              <a:rPr lang="en-US" sz="1250" dirty="0">
+                <a:solidFill>
+                  <a:srgbClr val="1E2235"/>
+                </a:solidFill>
+                <a:latin typeface="Microsoft JhengHei" pitchFamily="34" charset="0"/>
+                <a:ea typeface="Microsoft JhengHei" pitchFamily="34" charset="-122"/>
+                <a:cs typeface="Microsoft JhengHei" pitchFamily="34" charset="-120"/>
+              </a:rPr>
+              <a:t>自動載入 13 個內建技能與自訂技能</a:t>
+            </a:r>
+            <a:endParaRPr lang="en-US" sz="1250" dirty="0"/>
+          </a:p>
+        </p:txBody>
+      </p:sp>
+      <p:sp>
+        <p:nvSpPr>
+          <p:cNvPr id="31" name="Shape 29"/>
+          <p:cNvSpPr/>
+          <p:nvPr/>
+        </p:nvSpPr>
+        <p:spPr>
+          <a:xfrm>
+            <a:off x="640080" y="4480560"/>
+            <a:ext cx="10908792" cy="457200"/>
+          </a:xfrm>
+          <a:prstGeom prst="rect">
+            <a:avLst/>
+          </a:prstGeom>
+          <a:solidFill>
+            <a:srgbClr val="FFFFFF"/>
+          </a:solidFill>
+          <a:ln/>
+        </p:spPr>
+      </p:sp>
+      <p:sp>
+        <p:nvSpPr>
+          <p:cNvPr id="32" name="Text 30"/>
+          <p:cNvSpPr/>
+          <p:nvPr/>
+        </p:nvSpPr>
+        <p:spPr>
+          <a:xfrm>
+            <a:off x="822960" y="4480560"/>
+            <a:ext cx="2468880" cy="457200"/>
+          </a:xfrm>
+          <a:prstGeom prst="rect">
+            <a:avLst/>
+          </a:prstGeom>
+          <a:noFill/>
+          <a:ln/>
+        </p:spPr>
+        <p:txBody>
+          <a:bodyPr wrap="square" rtlCol="0" anchor="ctr"/>
+          <a:lstStyle/>
+          <a:p>
+            <a:pPr indent="0" marL="0">
+              <a:buNone/>
+            </a:pPr>
+            <a:r>
+              <a:rPr lang="en-US" sz="1250" b="1" dirty="0">
+                <a:solidFill>
+                  <a:srgbClr val="1E2235"/>
+                </a:solidFill>
+                <a:latin typeface="Microsoft JhengHei" pitchFamily="34" charset="0"/>
+                <a:ea typeface="Microsoft JhengHei" pitchFamily="34" charset="-122"/>
+                <a:cs typeface="Microsoft JhengHei" pitchFamily="34" charset="-120"/>
+              </a:rPr>
+              <a:t>產出</a:t>
+            </a:r>
+            <a:endParaRPr lang="en-US" sz="1250" dirty="0"/>
+          </a:p>
+        </p:txBody>
+      </p:sp>
+      <p:sp>
+        <p:nvSpPr>
+          <p:cNvPr id="33" name="Text 31"/>
+          <p:cNvSpPr/>
+          <p:nvPr/>
+        </p:nvSpPr>
+        <p:spPr>
+          <a:xfrm>
+            <a:off x="3566160" y="4480560"/>
+            <a:ext cx="3657600" cy="457200"/>
+          </a:xfrm>
+          <a:prstGeom prst="rect">
+            <a:avLst/>
+          </a:prstGeom>
+          <a:noFill/>
+          <a:ln/>
+        </p:spPr>
+        <p:txBody>
+          <a:bodyPr wrap="square" rtlCol="0" anchor="ctr"/>
+          <a:lstStyle/>
+          <a:p>
+            <a:pPr indent="0" marL="0">
+              <a:buNone/>
+            </a:pPr>
+            <a:r>
+              <a:rPr lang="en-US" sz="1250" dirty="0">
+                <a:solidFill>
+                  <a:srgbClr val="5B6079"/>
+                </a:solidFill>
+                <a:latin typeface="Microsoft JhengHei" pitchFamily="34" charset="0"/>
+                <a:ea typeface="Microsoft JhengHei" pitchFamily="34" charset="-122"/>
+                <a:cs typeface="Microsoft JhengHei" pitchFamily="34" charset="-120"/>
+              </a:rPr>
+              <a:t>聊天視窗的文字</a:t>
+            </a:r>
+            <a:endParaRPr lang="en-US" sz="1250" dirty="0"/>
+          </a:p>
+        </p:txBody>
+      </p:sp>
+      <p:sp>
+        <p:nvSpPr>
+          <p:cNvPr id="34" name="Text 32"/>
+          <p:cNvSpPr/>
+          <p:nvPr/>
+        </p:nvSpPr>
+        <p:spPr>
+          <a:xfrm>
+            <a:off x="7589520" y="4480560"/>
+            <a:ext cx="3776472" cy="457200"/>
+          </a:xfrm>
+          <a:prstGeom prst="rect">
+            <a:avLst/>
+          </a:prstGeom>
+          <a:noFill/>
+          <a:ln/>
+        </p:spPr>
+        <p:txBody>
+          <a:bodyPr wrap="square" rtlCol="0" anchor="ctr"/>
+          <a:lstStyle/>
+          <a:p>
+            <a:pPr indent="0" marL="0">
+              <a:buNone/>
+            </a:pPr>
+            <a:r>
+              <a:rPr lang="en-US" sz="1250" dirty="0">
+                <a:solidFill>
+                  <a:srgbClr val="1E2235"/>
+                </a:solidFill>
+                <a:latin typeface="Microsoft JhengHei" pitchFamily="34" charset="0"/>
+                <a:ea typeface="Microsoft JhengHei" pitchFamily="34" charset="-122"/>
+                <a:cs typeface="Microsoft JhengHei" pitchFamily="34" charset="-120"/>
+              </a:rPr>
+              <a:t>OneDrive 中真實的文件、試算表、簡報</a:t>
+            </a:r>
+            <a:endParaRPr lang="en-US" sz="1250" dirty="0"/>
+          </a:p>
+        </p:txBody>
+      </p:sp>
+      <p:sp>
+        <p:nvSpPr>
+          <p:cNvPr id="35" name="Shape 33"/>
+          <p:cNvSpPr/>
+          <p:nvPr/>
+        </p:nvSpPr>
+        <p:spPr>
+          <a:xfrm>
+            <a:off x="640080" y="4937760"/>
+            <a:ext cx="10908792" cy="457200"/>
+          </a:xfrm>
+          <a:prstGeom prst="rect">
+            <a:avLst/>
+          </a:prstGeom>
+          <a:solidFill>
+            <a:srgbClr val="F2F4FB"/>
+          </a:solidFill>
+          <a:ln/>
+        </p:spPr>
+      </p:sp>
+      <p:sp>
+        <p:nvSpPr>
+          <p:cNvPr id="36" name="Text 34"/>
+          <p:cNvSpPr/>
+          <p:nvPr/>
+        </p:nvSpPr>
+        <p:spPr>
+          <a:xfrm>
+            <a:off x="822960" y="4937760"/>
+            <a:ext cx="2468880" cy="457200"/>
+          </a:xfrm>
+          <a:prstGeom prst="rect">
+            <a:avLst/>
+          </a:prstGeom>
+          <a:noFill/>
+          <a:ln/>
+        </p:spPr>
+        <p:txBody>
+          <a:bodyPr wrap="square" rtlCol="0" anchor="ctr"/>
+          <a:lstStyle/>
+          <a:p>
+            <a:pPr indent="0" marL="0">
+              <a:buNone/>
+            </a:pPr>
+            <a:r>
+              <a:rPr lang="en-US" sz="1250" b="1" dirty="0">
+                <a:solidFill>
+                  <a:srgbClr val="1E2235"/>
+                </a:solidFill>
+                <a:latin typeface="Microsoft JhengHei" pitchFamily="34" charset="0"/>
+                <a:ea typeface="Microsoft JhengHei" pitchFamily="34" charset="-122"/>
+                <a:cs typeface="Microsoft JhengHei" pitchFamily="34" charset="-120"/>
+              </a:rPr>
+              <a:t>自動啟動</a:t>
+            </a:r>
+            <a:endParaRPr lang="en-US" sz="1250" dirty="0"/>
+          </a:p>
+        </p:txBody>
+      </p:sp>
+      <p:sp>
+        <p:nvSpPr>
+          <p:cNvPr id="37" name="Text 35"/>
+          <p:cNvSpPr/>
+          <p:nvPr/>
+        </p:nvSpPr>
+        <p:spPr>
+          <a:xfrm>
+            <a:off x="3566160" y="4937760"/>
+            <a:ext cx="3657600" cy="457200"/>
+          </a:xfrm>
+          <a:prstGeom prst="rect">
+            <a:avLst/>
+          </a:prstGeom>
+          <a:noFill/>
+          <a:ln/>
+        </p:spPr>
+        <p:txBody>
+          <a:bodyPr wrap="square" rtlCol="0" anchor="ctr"/>
+          <a:lstStyle/>
+          <a:p>
+            <a:pPr indent="0" marL="0">
+              <a:buNone/>
+            </a:pPr>
+            <a:r>
+              <a:rPr lang="en-US" sz="1250" dirty="0">
+                <a:solidFill>
+                  <a:srgbClr val="5B6079"/>
+                </a:solidFill>
+                <a:latin typeface="Microsoft JhengHei" pitchFamily="34" charset="0"/>
+                <a:ea typeface="Microsoft JhengHei" pitchFamily="34" charset="-122"/>
+                <a:cs typeface="Microsoft JhengHei" pitchFamily="34" charset="-120"/>
+              </a:rPr>
+              <a:t>每次都要你開啟並下指令</a:t>
+            </a:r>
+            <a:endParaRPr lang="en-US" sz="1250" dirty="0"/>
+          </a:p>
+        </p:txBody>
+      </p:sp>
+      <p:sp>
+        <p:nvSpPr>
+          <p:cNvPr id="38" name="Text 36"/>
+          <p:cNvSpPr/>
+          <p:nvPr/>
+        </p:nvSpPr>
+        <p:spPr>
+          <a:xfrm>
+            <a:off x="7589520" y="4937760"/>
+            <a:ext cx="3776472" cy="457200"/>
+          </a:xfrm>
+          <a:prstGeom prst="rect">
+            <a:avLst/>
+          </a:prstGeom>
+          <a:noFill/>
+          <a:ln/>
+        </p:spPr>
+        <p:txBody>
+          <a:bodyPr wrap="square" rtlCol="0" anchor="ctr"/>
+          <a:lstStyle/>
+          <a:p>
+            <a:pPr indent="0" marL="0">
+              <a:buNone/>
+            </a:pPr>
+            <a:r>
+              <a:rPr lang="en-US" sz="1250" dirty="0">
+                <a:solidFill>
+                  <a:srgbClr val="1E2235"/>
+                </a:solidFill>
+                <a:latin typeface="Microsoft JhengHei" pitchFamily="34" charset="0"/>
+                <a:ea typeface="Microsoft JhengHei" pitchFamily="34" charset="-122"/>
+                <a:cs typeface="Microsoft JhengHei" pitchFamily="34" charset="-120"/>
+              </a:rPr>
+              <a:t>排程提示／事件觸發：收信或被 @提及時自動執行</a:t>
+            </a:r>
+            <a:endParaRPr lang="en-US" sz="1250" dirty="0"/>
+          </a:p>
+        </p:txBody>
+      </p:sp>
+      <p:sp>
+        <p:nvSpPr>
+          <p:cNvPr id="39" name="Shape 37"/>
+          <p:cNvSpPr/>
+          <p:nvPr/>
+        </p:nvSpPr>
+        <p:spPr>
+          <a:xfrm>
+            <a:off x="640080" y="5394960"/>
+            <a:ext cx="10908792" cy="457200"/>
+          </a:xfrm>
+          <a:prstGeom prst="rect">
+            <a:avLst/>
+          </a:prstGeom>
+          <a:solidFill>
+            <a:srgbClr val="FFFFFF"/>
+          </a:solidFill>
+          <a:ln/>
+        </p:spPr>
+      </p:sp>
+      <p:sp>
+        <p:nvSpPr>
+          <p:cNvPr id="40" name="Text 38"/>
+          <p:cNvSpPr/>
+          <p:nvPr/>
+        </p:nvSpPr>
+        <p:spPr>
+          <a:xfrm>
+            <a:off x="822960" y="5394960"/>
+            <a:ext cx="2468880" cy="457200"/>
+          </a:xfrm>
+          <a:prstGeom prst="rect">
+            <a:avLst/>
+          </a:prstGeom>
+          <a:noFill/>
+          <a:ln/>
+        </p:spPr>
+        <p:txBody>
+          <a:bodyPr wrap="square" rtlCol="0" anchor="ctr"/>
+          <a:lstStyle/>
+          <a:p>
+            <a:pPr indent="0" marL="0">
+              <a:buNone/>
+            </a:pPr>
+            <a:r>
+              <a:rPr lang="en-US" sz="1250" b="1" dirty="0">
+                <a:solidFill>
+                  <a:srgbClr val="1E2235"/>
+                </a:solidFill>
+                <a:latin typeface="Microsoft JhengHei" pitchFamily="34" charset="0"/>
+                <a:ea typeface="Microsoft JhengHei" pitchFamily="34" charset="-122"/>
+                <a:cs typeface="Microsoft JhengHei" pitchFamily="34" charset="-120"/>
+              </a:rPr>
+              <a:t>外部系統</a:t>
+            </a:r>
+            <a:endParaRPr lang="en-US" sz="1250" dirty="0"/>
+          </a:p>
+        </p:txBody>
+      </p:sp>
+      <p:sp>
+        <p:nvSpPr>
+          <p:cNvPr id="41" name="Text 39"/>
+          <p:cNvSpPr/>
+          <p:nvPr/>
+        </p:nvSpPr>
+        <p:spPr>
+          <a:xfrm>
+            <a:off x="3566160" y="5394960"/>
+            <a:ext cx="3657600" cy="457200"/>
+          </a:xfrm>
+          <a:prstGeom prst="rect">
+            <a:avLst/>
+          </a:prstGeom>
+          <a:noFill/>
+          <a:ln/>
+        </p:spPr>
+        <p:txBody>
+          <a:bodyPr wrap="square" rtlCol="0" anchor="ctr"/>
+          <a:lstStyle/>
+          <a:p>
+            <a:pPr indent="0" marL="0">
+              <a:buNone/>
+            </a:pPr>
+            <a:r>
+              <a:rPr lang="en-US" sz="1250" dirty="0">
+                <a:solidFill>
+                  <a:srgbClr val="5B6079"/>
+                </a:solidFill>
+                <a:latin typeface="Microsoft JhengHei" pitchFamily="34" charset="0"/>
+                <a:ea typeface="Microsoft JhengHei" pitchFamily="34" charset="-122"/>
+                <a:cs typeface="Microsoft JhengHei" pitchFamily="34" charset="-120"/>
+              </a:rPr>
+              <a:t>接地於 M365 資料</a:t>
+            </a:r>
+            <a:endParaRPr lang="en-US" sz="1250" dirty="0"/>
+          </a:p>
+        </p:txBody>
+      </p:sp>
+      <p:sp>
+        <p:nvSpPr>
+          <p:cNvPr id="42" name="Text 40"/>
+          <p:cNvSpPr/>
+          <p:nvPr/>
+        </p:nvSpPr>
+        <p:spPr>
+          <a:xfrm>
+            <a:off x="7589520" y="5394960"/>
+            <a:ext cx="3776472" cy="457200"/>
+          </a:xfrm>
+          <a:prstGeom prst="rect">
+            <a:avLst/>
+          </a:prstGeom>
+          <a:noFill/>
+          <a:ln/>
+        </p:spPr>
+        <p:txBody>
+          <a:bodyPr wrap="square" rtlCol="0" anchor="ctr"/>
+          <a:lstStyle/>
+          <a:p>
+            <a:pPr indent="0" marL="0">
+              <a:buNone/>
+            </a:pPr>
+            <a:r>
+              <a:rPr lang="en-US" sz="1250" dirty="0">
+                <a:solidFill>
+                  <a:srgbClr val="1E2235"/>
+                </a:solidFill>
+                <a:latin typeface="Microsoft JhengHei" pitchFamily="34" charset="0"/>
+                <a:ea typeface="Microsoft JhengHei" pitchFamily="34" charset="-122"/>
+                <a:cs typeface="Microsoft JhengHei" pitchFamily="34" charset="-120"/>
+              </a:rPr>
+              <a:t>可透過 Plugins／MCP 連 D365、SAP、Fabric 等</a:t>
+            </a:r>
+            <a:endParaRPr lang="en-US" sz="1250" dirty="0"/>
+          </a:p>
+        </p:txBody>
+      </p:sp>
+      <p:sp>
+        <p:nvSpPr>
+          <p:cNvPr id="43" name="Shape 41"/>
+          <p:cNvSpPr/>
+          <p:nvPr/>
+        </p:nvSpPr>
+        <p:spPr>
+          <a:xfrm>
+            <a:off x="640080" y="5852160"/>
+            <a:ext cx="10908792" cy="457200"/>
+          </a:xfrm>
+          <a:prstGeom prst="rect">
+            <a:avLst/>
+          </a:prstGeom>
+          <a:solidFill>
+            <a:srgbClr val="F2F4FB"/>
+          </a:solidFill>
+          <a:ln/>
+        </p:spPr>
+      </p:sp>
+      <p:sp>
+        <p:nvSpPr>
+          <p:cNvPr id="44" name="Text 42"/>
+          <p:cNvSpPr/>
+          <p:nvPr/>
+        </p:nvSpPr>
+        <p:spPr>
+          <a:xfrm>
+            <a:off x="822960" y="5852160"/>
+            <a:ext cx="2468880" cy="457200"/>
+          </a:xfrm>
+          <a:prstGeom prst="rect">
+            <a:avLst/>
+          </a:prstGeom>
+          <a:noFill/>
+          <a:ln/>
+        </p:spPr>
+        <p:txBody>
+          <a:bodyPr wrap="square" rtlCol="0" anchor="ctr"/>
+          <a:lstStyle/>
+          <a:p>
+            <a:pPr indent="0" marL="0">
+              <a:buNone/>
+            </a:pPr>
+            <a:r>
+              <a:rPr lang="en-US" sz="1250" b="1" dirty="0">
+                <a:solidFill>
+                  <a:srgbClr val="1E2235"/>
+                </a:solidFill>
+                <a:latin typeface="Microsoft JhengHei" pitchFamily="34" charset="0"/>
+                <a:ea typeface="Microsoft JhengHei" pitchFamily="34" charset="-122"/>
+                <a:cs typeface="Microsoft JhengHei" pitchFamily="34" charset="-120"/>
+              </a:rPr>
               <a:t>把關</a:t>
             </a:r>
-            <a:endParaRPr lang="en-US" sz="1400" dirty="0"/>
-          </a:p>
-        </p:txBody>
-      </p:sp>
-      <p:sp>
-        <p:nvSpPr>
-          <p:cNvPr id="29" name="Text 27"/>
-          <p:cNvSpPr/>
-          <p:nvPr/>
-        </p:nvSpPr>
-        <p:spPr>
-          <a:xfrm>
-            <a:off x="3566160" y="5760720"/>
-            <a:ext cx="3657600" cy="786384"/>
+            <a:endParaRPr lang="en-US" sz="1250" dirty="0"/>
+          </a:p>
+        </p:txBody>
+      </p:sp>
+      <p:sp>
+        <p:nvSpPr>
+          <p:cNvPr id="45" name="Text 43"/>
+          <p:cNvSpPr/>
+          <p:nvPr/>
+        </p:nvSpPr>
+        <p:spPr>
+          <a:xfrm>
+            <a:off x="3566160" y="5852160"/>
+            <a:ext cx="3657600" cy="457200"/>
           </a:xfrm>
           <a:prstGeom prst="rect">
             <a:avLst/>
@@ -15002,7 +15550,7 @@
               <a:buNone/>
             </a:pPr>
             <a:r>
-              <a:rPr lang="en-US" sz="1400" dirty="0">
+              <a:rPr lang="en-US" sz="1250" dirty="0">
                 <a:solidFill>
                   <a:srgbClr val="5B6079"/>
                 </a:solidFill>
@@ -15012,20 +15560,20 @@
               </a:rPr>
               <a:t>你自行判斷</a:t>
             </a:r>
-            <a:endParaRPr lang="en-US" sz="1400" dirty="0"/>
-          </a:p>
-        </p:txBody>
-      </p:sp>
-      <p:sp>
-        <p:nvSpPr>
-          <p:cNvPr id="30" name="Text 28"/>
-          <p:cNvSpPr/>
-          <p:nvPr/>
-        </p:nvSpPr>
-        <p:spPr>
-          <a:xfrm>
-            <a:off x="7589520" y="5760720"/>
-            <a:ext cx="3776472" cy="786384"/>
+            <a:endParaRPr lang="en-US" sz="1250" dirty="0"/>
+          </a:p>
+        </p:txBody>
+      </p:sp>
+      <p:sp>
+        <p:nvSpPr>
+          <p:cNvPr id="46" name="Text 44"/>
+          <p:cNvSpPr/>
+          <p:nvPr/>
+        </p:nvSpPr>
+        <p:spPr>
+          <a:xfrm>
+            <a:off x="7589520" y="5852160"/>
+            <a:ext cx="3776472" cy="457200"/>
           </a:xfrm>
           <a:prstGeom prst="rect">
             <a:avLst/>
@@ -15041,7 +15589,7 @@
               <a:buNone/>
             </a:pPr>
             <a:r>
-              <a:rPr lang="en-US" sz="1400" dirty="0">
+              <a:rPr lang="en-US" sz="1250" dirty="0">
                 <a:solidFill>
                   <a:srgbClr val="1E2235"/>
                 </a:solidFill>
@@ -15051,13 +15599,13 @@
               </a:rPr>
               <a:t>中高風險動作顯示風險等級，核准後才執行</a:t>
             </a:r>
-            <a:endParaRPr lang="en-US" sz="1400" dirty="0"/>
-          </a:p>
-        </p:txBody>
-      </p:sp>
-      <p:sp>
-        <p:nvSpPr>
-          <p:cNvPr id="31" name="Text 29"/>
+            <a:endParaRPr lang="en-US" sz="1250" dirty="0"/>
+          </a:p>
+        </p:txBody>
+      </p:sp>
+      <p:sp>
+        <p:nvSpPr>
+          <p:cNvPr id="47" name="Text 45"/>
           <p:cNvSpPr/>
           <p:nvPr/>
         </p:nvSpPr>
@@ -15096,7 +15644,7 @@
       </p:sp>
       <p:sp>
         <p:nvSpPr>
-          <p:cNvPr id="32" name="Text 30"/>
+          <p:cNvPr id="48" name="Text 46"/>
           <p:cNvSpPr/>
           <p:nvPr/>
         </p:nvSpPr>
@@ -15575,7 +16123,7 @@
                 <a:ea typeface="Microsoft JhengHei" pitchFamily="34" charset="-122"/>
                 <a:cs typeface="Microsoft JhengHei" pitchFamily="34" charset="-120"/>
               </a:rPr>
-              <a:t>右側面板同時呈現「參考」輸入檔、「輸出」產出檔與「技能」，過程透明可追。</a:t>
+              <a:t>右側面板同時呈現進度、輸入檔、輸出檔、已載入技能、排程與已核准權限，過程透明可追。</a:t>
             </a:r>
             <a:endParaRPr lang="en-US" sz="1300" dirty="0"/>
           </a:p>
@@ -15734,7 +16282,7 @@
                 <a:ea typeface="Microsoft JhengHei" pitchFamily="34" charset="-122"/>
                 <a:cs typeface="Microsoft JhengHei" pitchFamily="34" charset="-120"/>
               </a:rPr>
-              <a:t>中高風險動作顯示 RISK-LEVEL；可核准、取消，或設定 per-recipient／per-domain／always 的 don’t ask again。</a:t>
+              <a:t>中高風險動作顯示 RISK-LEVEL；可核准、取消，或設定 per-recipient／per-domain／always 的 don’t ask again；多筆待審可「Approve All」。</a:t>
             </a:r>
             <a:endParaRPr lang="en-US" sz="1300" dirty="0"/>
           </a:p>
@@ -15893,7 +16441,7 @@
                 <a:ea typeface="Microsoft JhengHei" pitchFamily="34" charset="-122"/>
                 <a:cs typeface="Microsoft JhengHei" pitchFamily="34" charset="-120"/>
               </a:rPr>
-              <a:t>本機 Edge 瀏覽器（預覽・僅限網頁版）、Imagen 2 影像生成、模型選擇器新增 Sonnet+Opus 顧問配對、排程提示／事件驅動任務（信件或 @提及自動觸發）、Download-All zip（50 檔／500MB）。</a:t>
+              <a:t>本機 Edge 瀏覽器（預設停用，需管理員開啟＋Edge 150 以上）、ChatGPT Images 2.0 影像生成、品牌範本自動套用簡報、Plugins／MCP 連外部系統、排程與事件觸發任務。</a:t>
             </a:r>
             <a:endParaRPr lang="en-US" sz="1300" dirty="0"/>
           </a:p>

--- a/CoworkPlaybook/Cowork_教育訓練簡報_製造業版.pptx
+++ b/CoworkPlaybook/Cowork_教育訓練簡報_製造業版.pptx
@@ -26,9 +26,10 @@
     <p:sldId id="274" r:id="rId20"/>
     <p:sldId id="275" r:id="rId21"/>
     <p:sldId id="276" r:id="rId22"/>
+    <p:sldId id="277" r:id="rId23"/>
   </p:sldIdLst>
   <p:notesMasterIdLst>
-    <p:notesMasterId r:id="rId23"/>
+    <p:notesMasterId r:id="rId24"/>
   </p:notesMasterIdLst>
   <p:sldSz cx="12191695" cy="6858000"/>
   <p:notesSz cx="6858000" cy="12191695"/>
@@ -1690,6 +1691,94 @@
             <a:fld id="{F7021451-1387-4CA6-816F-3879F97B5CBC}" type="slidenum">
               <a:rPr lang="en-US"/>
               <a:t>21</a:t>
+            </a:fld>
+            <a:endParaRPr lang="en-US"/>
+          </a:p>
+        </p:txBody>
+      </p:sp>
+    </p:spTree>
+    <p:extLst>
+      <p:ext uri="{BB962C8B-B14F-4D97-AF65-F5344CB8AC3E}">
+        <p14:creationId xmlns:p14="http://schemas.microsoft.com/office/powerpoint/2010/main" val="1024086991"/>
+      </p:ext>
+    </p:extLst>
+  </p:cSld>
+  <p:clrMapOvr>
+    <a:masterClrMapping/>
+  </p:clrMapOvr>
+</p:notes>
+</file>
+
+<file path=ppt/notesSlides/notesSlide22.xml><?xml version="1.0" encoding="utf-8"?>
+<p:notes xmlns:a="http://schemas.openxmlformats.org/drawingml/2006/main" xmlns:r="http://schemas.openxmlformats.org/officeDocument/2006/relationships" xmlns:p="http://schemas.openxmlformats.org/presentationml/2006/main">
+  <p:cSld>
+    <p:spTree>
+      <p:nvGrpSpPr>
+        <p:cNvPr id="1" name=""/>
+        <p:cNvGrpSpPr/>
+        <p:nvPr/>
+      </p:nvGrpSpPr>
+      <p:grpSpPr>
+        <a:xfrm>
+          <a:off x="0" y="0"/>
+          <a:ext cx="0" cy="0"/>
+          <a:chOff x="0" y="0"/>
+          <a:chExt cx="0" cy="0"/>
+        </a:xfrm>
+      </p:grpSpPr>
+      <p:sp>
+        <p:nvSpPr>
+          <p:cNvPr id="2" name="Slide Image Placeholder 1"/>
+          <p:cNvSpPr>
+            <a:spLocks noGrp="1" noRot="1" noChangeAspect="1"/>
+          </p:cNvSpPr>
+          <p:nvPr>
+            <p:ph type="sldImg"/>
+          </p:nvPr>
+        </p:nvSpPr>
+        <p:spPr/>
+      </p:sp>
+      <p:sp>
+        <p:nvSpPr>
+          <p:cNvPr id="3" name="Notes Placeholder 2"/>
+          <p:cNvSpPr>
+            <a:spLocks noGrp="1"/>
+          </p:cNvSpPr>
+          <p:nvPr>
+            <p:ph type="body" idx="1"/>
+          </p:nvPr>
+        </p:nvSpPr>
+        <p:spPr/>
+        <p:txBody>
+          <a:bodyPr/>
+          <a:lstStyle/>
+          <a:p>
+            <a:r>
+              <a:rPr lang="en-US" dirty="0"/>
+              <a:t/>
+            </a:r>
+            <a:endParaRPr lang="en-US" dirty="0"/>
+          </a:p>
+        </p:txBody>
+      </p:sp>
+      <p:sp>
+        <p:nvSpPr>
+          <p:cNvPr id="4" name="Slide Number Placeholder 3"/>
+          <p:cNvSpPr>
+            <a:spLocks noGrp="1"/>
+          </p:cNvSpPr>
+          <p:nvPr>
+            <p:ph type="sldNum" sz="quarter" idx="10"/>
+          </p:nvPr>
+        </p:nvSpPr>
+        <p:spPr/>
+        <p:txBody>
+          <a:bodyPr/>
+          <a:lstStyle/>
+          <a:p>
+            <a:fld id="{F7021451-1387-4CA6-816F-3879F97B5CBC}" type="slidenum">
+              <a:rPr lang="en-US"/>
+              <a:t>22</a:t>
             </a:fld>
             <a:endParaRPr lang="en-US"/>
           </a:p>
@@ -2951,6 +3040,677 @@
     <p:bg>
       <p:bgPr>
         <a:solidFill>
+          <a:srgbClr val="F7F8FC"/>
+        </a:solidFill>
+      </p:bgPr>
+    </p:bg>
+    <p:spTree>
+      <p:nvGrpSpPr>
+        <p:cNvPr id="1" name=""/>
+        <p:cNvGrpSpPr/>
+        <p:nvPr/>
+      </p:nvGrpSpPr>
+      <p:grpSpPr>
+        <a:xfrm>
+          <a:off x="0" y="0"/>
+          <a:ext cx="0" cy="0"/>
+          <a:chOff x="0" y="0"/>
+          <a:chExt cx="0" cy="0"/>
+        </a:xfrm>
+      </p:grpSpPr>
+      <p:sp>
+        <p:nvSpPr>
+          <p:cNvPr id="2" name="Shape 0"/>
+          <p:cNvSpPr/>
+          <p:nvPr/>
+        </p:nvSpPr>
+        <p:spPr>
+          <a:xfrm>
+            <a:off x="640080" y="566928"/>
+            <a:ext cx="384048" cy="128016"/>
+          </a:xfrm>
+          <a:prstGeom prst="rect">
+            <a:avLst/>
+          </a:prstGeom>
+          <a:solidFill>
+            <a:srgbClr val="A4262C"/>
+          </a:solidFill>
+          <a:ln/>
+        </p:spPr>
+      </p:sp>
+      <p:sp>
+        <p:nvSpPr>
+          <p:cNvPr id="3" name="Text 1"/>
+          <p:cNvSpPr/>
+          <p:nvPr/>
+        </p:nvSpPr>
+        <p:spPr>
+          <a:xfrm>
+            <a:off x="1143000" y="457200"/>
+            <a:ext cx="8229600" cy="310896"/>
+          </a:xfrm>
+          <a:prstGeom prst="rect">
+            <a:avLst/>
+          </a:prstGeom>
+          <a:noFill/>
+          <a:ln/>
+        </p:spPr>
+        <p:txBody>
+          <a:bodyPr wrap="square" rtlCol="0" anchor="ctr"/>
+          <a:lstStyle/>
+          <a:p>
+            <a:pPr indent="0" marL="0">
+              <a:buNone/>
+            </a:pPr>
+            <a:r>
+              <a:rPr lang="en-US" sz="1200" b="1" spc="200" kern="0" dirty="0">
+                <a:solidFill>
+                  <a:srgbClr val="A4262C"/>
+                </a:solidFill>
+                <a:latin typeface="Microsoft JhengHei" pitchFamily="34" charset="0"/>
+                <a:ea typeface="Microsoft JhengHei" pitchFamily="34" charset="-122"/>
+                <a:cs typeface="Microsoft JhengHei" pitchFamily="34" charset="-120"/>
+              </a:rPr>
+              <a:t>情境 01 · 實機示範</a:t>
+            </a:r>
+            <a:endParaRPr lang="en-US" sz="1200" dirty="0"/>
+          </a:p>
+        </p:txBody>
+      </p:sp>
+      <p:sp>
+        <p:nvSpPr>
+          <p:cNvPr id="4" name="Text 2"/>
+          <p:cNvSpPr/>
+          <p:nvPr/>
+        </p:nvSpPr>
+        <p:spPr>
+          <a:xfrm>
+            <a:off x="640080" y="786384"/>
+            <a:ext cx="10972800" cy="640080"/>
+          </a:xfrm>
+          <a:prstGeom prst="rect">
+            <a:avLst/>
+          </a:prstGeom>
+          <a:noFill/>
+          <a:ln/>
+        </p:spPr>
+        <p:txBody>
+          <a:bodyPr wrap="square" rtlCol="0" anchor="ctr"/>
+          <a:lstStyle/>
+          <a:p>
+            <a:pPr indent="0" marL="0">
+              <a:buNone/>
+            </a:pPr>
+            <a:r>
+              <a:rPr lang="en-US" sz="3000" b="1" dirty="0">
+                <a:solidFill>
+                  <a:srgbClr val="1E2235"/>
+                </a:solidFill>
+                <a:latin typeface="Microsoft JhengHei" pitchFamily="34" charset="0"/>
+                <a:ea typeface="Microsoft JhengHei" pitchFamily="34" charset="-122"/>
+                <a:cs typeface="Microsoft JhengHei" pitchFamily="34" charset="-120"/>
+              </a:rPr>
+              <a:t>看 Cowork 怎麼做、產出什麼</a:t>
+            </a:r>
+            <a:endParaRPr lang="en-US" sz="3000" dirty="0"/>
+          </a:p>
+        </p:txBody>
+      </p:sp>
+      <p:sp>
+        <p:nvSpPr>
+          <p:cNvPr id="5" name="Shape 3"/>
+          <p:cNvSpPr/>
+          <p:nvPr/>
+        </p:nvSpPr>
+        <p:spPr>
+          <a:xfrm>
+            <a:off x="585216" y="1773936"/>
+            <a:ext cx="5184648" cy="3433186"/>
+          </a:xfrm>
+          <a:prstGeom prst="rect">
+            <a:avLst/>
+          </a:prstGeom>
+          <a:solidFill>
+            <a:srgbClr val="FFFFFF"/>
+          </a:solidFill>
+          <a:ln w="12700">
+            <a:solidFill>
+              <a:srgbClr val="E4E7F2"/>
+            </a:solidFill>
+            <a:prstDash val="solid"/>
+          </a:ln>
+          <a:effectLst>
+            <a:outerShdw sx="100000" sy="100000" kx="0" ky="0" algn="bl" rotWithShape="0" blurRad="114300" dist="38100" dir="5400000">
+              <a:srgbClr val="8A90B5">
+                <a:alpha val="22000"/>
+              </a:srgbClr>
+            </a:outerShdw>
+          </a:effectLst>
+        </p:spPr>
+      </p:sp>
+      <p:pic>
+        <p:nvPicPr>
+          <p:cNvPr id="6" name="Image 0" descr="C:\temp\CoworkLab\v2\_working\screenshots\mfg1_01_input.png">    </p:cNvPr>
+          <p:cNvPicPr>
+            <a:picLocks noChangeAspect="1"/>
+          </p:cNvPicPr>
+          <p:nvPr/>
+        </p:nvPicPr>
+        <p:blipFill>
+          <a:blip r:embed="rId1"/>
+          <a:stretch>
+            <a:fillRect/>
+          </a:stretch>
+        </p:blipFill>
+        <p:spPr>
+          <a:xfrm>
+            <a:off x="640080" y="1828800"/>
+            <a:ext cx="5074920" cy="3323458"/>
+          </a:xfrm>
+          <a:prstGeom prst="rect">
+            <a:avLst/>
+          </a:prstGeom>
+        </p:spPr>
+      </p:pic>
+      <p:sp>
+        <p:nvSpPr>
+          <p:cNvPr id="7" name="Text 4"/>
+          <p:cNvSpPr/>
+          <p:nvPr/>
+        </p:nvSpPr>
+        <p:spPr>
+          <a:xfrm>
+            <a:off x="640080" y="5261986"/>
+            <a:ext cx="5074920" cy="320040"/>
+          </a:xfrm>
+          <a:prstGeom prst="rect">
+            <a:avLst/>
+          </a:prstGeom>
+          <a:noFill/>
+          <a:ln/>
+        </p:spPr>
+        <p:txBody>
+          <a:bodyPr wrap="square" rtlCol="0" anchor="ctr"/>
+          <a:lstStyle/>
+          <a:p>
+            <a:pPr algn="ctr" indent="0" marL="0">
+              <a:buNone/>
+            </a:pPr>
+            <a:r>
+              <a:rPr lang="en-US" sz="1350" b="1" dirty="0">
+                <a:solidFill>
+                  <a:srgbClr val="A4262C"/>
+                </a:solidFill>
+                <a:latin typeface="Microsoft JhengHei" pitchFamily="34" charset="0"/>
+                <a:ea typeface="Microsoft JhengHei" pitchFamily="34" charset="-122"/>
+                <a:cs typeface="Microsoft JhengHei" pitchFamily="34" charset="-120"/>
+              </a:rPr>
+              <a:t>① 你的輸入與指令</a:t>
+            </a:r>
+            <a:endParaRPr lang="en-US" sz="1350" dirty="0"/>
+          </a:p>
+        </p:txBody>
+      </p:sp>
+      <p:sp>
+        <p:nvSpPr>
+          <p:cNvPr id="8" name="Shape 5"/>
+          <p:cNvSpPr/>
+          <p:nvPr/>
+        </p:nvSpPr>
+        <p:spPr>
+          <a:xfrm>
+            <a:off x="6163056" y="1773936"/>
+            <a:ext cx="5184648" cy="3433186"/>
+          </a:xfrm>
+          <a:prstGeom prst="rect">
+            <a:avLst/>
+          </a:prstGeom>
+          <a:solidFill>
+            <a:srgbClr val="FFFFFF"/>
+          </a:solidFill>
+          <a:ln w="12700">
+            <a:solidFill>
+              <a:srgbClr val="E4E7F2"/>
+            </a:solidFill>
+            <a:prstDash val="solid"/>
+          </a:ln>
+          <a:effectLst>
+            <a:outerShdw sx="100000" sy="100000" kx="0" ky="0" algn="bl" rotWithShape="0" blurRad="114300" dist="38100" dir="5400000">
+              <a:srgbClr val="8A90B5">
+                <a:alpha val="22000"/>
+              </a:srgbClr>
+            </a:outerShdw>
+          </a:effectLst>
+        </p:spPr>
+      </p:sp>
+      <p:pic>
+        <p:nvPicPr>
+          <p:cNvPr id="9" name="Image 1" descr="C:\temp\CoworkLab\v2\_working\screenshots\mfg1_03_approval.png">    </p:cNvPr>
+          <p:cNvPicPr>
+            <a:picLocks noChangeAspect="1"/>
+          </p:cNvPicPr>
+          <p:nvPr/>
+        </p:nvPicPr>
+        <p:blipFill>
+          <a:blip r:embed="rId2"/>
+          <a:stretch>
+            <a:fillRect/>
+          </a:stretch>
+        </p:blipFill>
+        <p:spPr>
+          <a:xfrm>
+            <a:off x="6217920" y="1828800"/>
+            <a:ext cx="5074920" cy="3323458"/>
+          </a:xfrm>
+          <a:prstGeom prst="rect">
+            <a:avLst/>
+          </a:prstGeom>
+        </p:spPr>
+      </p:pic>
+      <p:sp>
+        <p:nvSpPr>
+          <p:cNvPr id="10" name="Text 6"/>
+          <p:cNvSpPr/>
+          <p:nvPr/>
+        </p:nvSpPr>
+        <p:spPr>
+          <a:xfrm>
+            <a:off x="6217920" y="5261986"/>
+            <a:ext cx="5074920" cy="320040"/>
+          </a:xfrm>
+          <a:prstGeom prst="rect">
+            <a:avLst/>
+          </a:prstGeom>
+          <a:noFill/>
+          <a:ln/>
+        </p:spPr>
+        <p:txBody>
+          <a:bodyPr wrap="square" rtlCol="0" anchor="ctr"/>
+          <a:lstStyle/>
+          <a:p>
+            <a:pPr algn="ctr" indent="0" marL="0">
+              <a:buNone/>
+            </a:pPr>
+            <a:r>
+              <a:rPr lang="en-US" sz="1350" b="1" dirty="0">
+                <a:solidFill>
+                  <a:srgbClr val="A4262C"/>
+                </a:solidFill>
+                <a:latin typeface="Microsoft JhengHei" pitchFamily="34" charset="0"/>
+                <a:ea typeface="Microsoft JhengHei" pitchFamily="34" charset="-122"/>
+                <a:cs typeface="Microsoft JhengHei" pitchFamily="34" charset="-120"/>
+              </a:rPr>
+              <a:t>② 產出成果</a:t>
+            </a:r>
+            <a:endParaRPr lang="en-US" sz="1350" dirty="0"/>
+          </a:p>
+        </p:txBody>
+      </p:sp>
+      <p:sp>
+        <p:nvSpPr>
+          <p:cNvPr id="11" name="Shape 7"/>
+          <p:cNvSpPr/>
+          <p:nvPr/>
+        </p:nvSpPr>
+        <p:spPr>
+          <a:xfrm>
+            <a:off x="640080" y="5074920"/>
+            <a:ext cx="10911535" cy="1143000"/>
+          </a:xfrm>
+          <a:prstGeom prst="rect">
+            <a:avLst/>
+          </a:prstGeom>
+          <a:solidFill>
+            <a:srgbClr val="FFFFFF"/>
+          </a:solidFill>
+          <a:ln w="12700">
+            <a:solidFill>
+              <a:srgbClr val="E4E7F2"/>
+            </a:solidFill>
+            <a:prstDash val="solid"/>
+          </a:ln>
+        </p:spPr>
+      </p:sp>
+      <p:sp>
+        <p:nvSpPr>
+          <p:cNvPr id="12" name="Shape 8"/>
+          <p:cNvSpPr/>
+          <p:nvPr/>
+        </p:nvSpPr>
+        <p:spPr>
+          <a:xfrm>
+            <a:off x="640080" y="5074920"/>
+            <a:ext cx="91440" cy="1143000"/>
+          </a:xfrm>
+          <a:prstGeom prst="rect">
+            <a:avLst/>
+          </a:prstGeom>
+          <a:solidFill>
+            <a:srgbClr val="A4262C"/>
+          </a:solidFill>
+          <a:ln/>
+        </p:spPr>
+      </p:sp>
+      <p:sp>
+        <p:nvSpPr>
+          <p:cNvPr id="13" name="Text 9"/>
+          <p:cNvSpPr/>
+          <p:nvPr/>
+        </p:nvSpPr>
+        <p:spPr>
+          <a:xfrm>
+            <a:off x="914400" y="5184648"/>
+            <a:ext cx="1828800" cy="320040"/>
+          </a:xfrm>
+          <a:prstGeom prst="rect">
+            <a:avLst/>
+          </a:prstGeom>
+          <a:noFill/>
+          <a:ln/>
+        </p:spPr>
+        <p:txBody>
+          <a:bodyPr wrap="square" rtlCol="0" anchor="ctr"/>
+          <a:lstStyle/>
+          <a:p>
+            <a:pPr indent="0" marL="0">
+              <a:buNone/>
+            </a:pPr>
+            <a:r>
+              <a:rPr lang="en-US" sz="1400" b="1" dirty="0">
+                <a:solidFill>
+                  <a:srgbClr val="1E2235"/>
+                </a:solidFill>
+                <a:latin typeface="Microsoft JhengHei" pitchFamily="34" charset="0"/>
+                <a:ea typeface="Microsoft JhengHei" pitchFamily="34" charset="-122"/>
+                <a:cs typeface="Microsoft JhengHei" pitchFamily="34" charset="-120"/>
+              </a:rPr>
+              <a:t>產出驗收</a:t>
+            </a:r>
+            <a:endParaRPr lang="en-US" sz="1400" dirty="0"/>
+          </a:p>
+        </p:txBody>
+      </p:sp>
+      <p:pic>
+        <p:nvPicPr>
+          <p:cNvPr id="14" name="Image 2" descr="preencoded.png">    </p:cNvPr>
+          <p:cNvPicPr>
+            <a:picLocks noChangeAspect="1"/>
+          </p:cNvPicPr>
+          <p:nvPr/>
+        </p:nvPicPr>
+        <p:blipFill>
+          <a:blip r:embed="rId3"/>
+          <a:stretch>
+            <a:fillRect/>
+          </a:stretch>
+        </p:blipFill>
+        <p:spPr>
+          <a:xfrm>
+            <a:off x="2834640" y="5221224"/>
+            <a:ext cx="182880" cy="182880"/>
+          </a:xfrm>
+          <a:prstGeom prst="rect">
+            <a:avLst/>
+          </a:prstGeom>
+        </p:spPr>
+      </p:pic>
+      <p:sp>
+        <p:nvSpPr>
+          <p:cNvPr id="15" name="Text 10"/>
+          <p:cNvSpPr/>
+          <p:nvPr/>
+        </p:nvSpPr>
+        <p:spPr>
+          <a:xfrm>
+            <a:off x="3108960" y="5166360"/>
+            <a:ext cx="8168335" cy="310896"/>
+          </a:xfrm>
+          <a:prstGeom prst="rect">
+            <a:avLst/>
+          </a:prstGeom>
+          <a:noFill/>
+          <a:ln/>
+        </p:spPr>
+        <p:txBody>
+          <a:bodyPr wrap="square" rtlCol="0" anchor="ctr"/>
+          <a:lstStyle/>
+          <a:p>
+            <a:pPr indent="0" marL="0">
+              <a:buNone/>
+            </a:pPr>
+            <a:r>
+              <a:rPr lang="en-US" sz="1300" dirty="0">
+                <a:solidFill>
+                  <a:srgbClr val="1E2235"/>
+                </a:solidFill>
+                <a:latin typeface="Microsoft JhengHei" pitchFamily="34" charset="0"/>
+                <a:ea typeface="Microsoft JhengHei" pitchFamily="34" charset="-122"/>
+                <a:cs typeface="Microsoft JhengHei" pitchFamily="34" charset="-120"/>
+              </a:rPr>
+              <a:t>〔產出〕晨報包含四個固定段落（今日概況／緊急 Top 3／追蹤清單／下一班提醒）</a:t>
+            </a:r>
+            <a:endParaRPr lang="en-US" sz="1300" dirty="0"/>
+          </a:p>
+        </p:txBody>
+      </p:sp>
+      <p:pic>
+        <p:nvPicPr>
+          <p:cNvPr id="16" name="Image 3" descr="preencoded.png">    </p:cNvPr>
+          <p:cNvPicPr>
+            <a:picLocks noChangeAspect="1"/>
+          </p:cNvPicPr>
+          <p:nvPr/>
+        </p:nvPicPr>
+        <p:blipFill>
+          <a:blip r:embed="rId4"/>
+          <a:stretch>
+            <a:fillRect/>
+          </a:stretch>
+        </p:blipFill>
+        <p:spPr>
+          <a:xfrm>
+            <a:off x="2834640" y="5559552"/>
+            <a:ext cx="182880" cy="182880"/>
+          </a:xfrm>
+          <a:prstGeom prst="rect">
+            <a:avLst/>
+          </a:prstGeom>
+        </p:spPr>
+      </p:pic>
+      <p:sp>
+        <p:nvSpPr>
+          <p:cNvPr id="17" name="Text 11"/>
+          <p:cNvSpPr/>
+          <p:nvPr/>
+        </p:nvSpPr>
+        <p:spPr>
+          <a:xfrm>
+            <a:off x="3108960" y="5504688"/>
+            <a:ext cx="8168335" cy="310896"/>
+          </a:xfrm>
+          <a:prstGeom prst="rect">
+            <a:avLst/>
+          </a:prstGeom>
+          <a:noFill/>
+          <a:ln/>
+        </p:spPr>
+        <p:txBody>
+          <a:bodyPr wrap="square" rtlCol="0" anchor="ctr"/>
+          <a:lstStyle/>
+          <a:p>
+            <a:pPr indent="0" marL="0">
+              <a:buNone/>
+            </a:pPr>
+            <a:r>
+              <a:rPr lang="en-US" sz="1300" dirty="0">
+                <a:solidFill>
+                  <a:srgbClr val="1E2235"/>
+                </a:solidFill>
+                <a:latin typeface="Microsoft JhengHei" pitchFamily="34" charset="0"/>
+                <a:ea typeface="Microsoft JhengHei" pitchFamily="34" charset="-122"/>
+                <a:cs typeface="Microsoft JhengHei" pitchFamily="34" charset="-120"/>
+              </a:rPr>
+              <a:t>〔判斷〕同一設備 24 小時內多次停機有被正確累計並列為緊急，而非分開輕描淡寫</a:t>
+            </a:r>
+            <a:endParaRPr lang="en-US" sz="1300" dirty="0"/>
+          </a:p>
+        </p:txBody>
+      </p:sp>
+      <p:pic>
+        <p:nvPicPr>
+          <p:cNvPr id="18" name="Image 4" descr="preencoded.png">    </p:cNvPr>
+          <p:cNvPicPr>
+            <a:picLocks noChangeAspect="1"/>
+          </p:cNvPicPr>
+          <p:nvPr/>
+        </p:nvPicPr>
+        <p:blipFill>
+          <a:blip r:embed="rId5"/>
+          <a:stretch>
+            <a:fillRect/>
+          </a:stretch>
+        </p:blipFill>
+        <p:spPr>
+          <a:xfrm>
+            <a:off x="2834640" y="5897880"/>
+            <a:ext cx="182880" cy="182880"/>
+          </a:xfrm>
+          <a:prstGeom prst="rect">
+            <a:avLst/>
+          </a:prstGeom>
+        </p:spPr>
+      </p:pic>
+      <p:sp>
+        <p:nvSpPr>
+          <p:cNvPr id="19" name="Text 12"/>
+          <p:cNvSpPr/>
+          <p:nvPr/>
+        </p:nvSpPr>
+        <p:spPr>
+          <a:xfrm>
+            <a:off x="3108960" y="5843016"/>
+            <a:ext cx="8168335" cy="310896"/>
+          </a:xfrm>
+          <a:prstGeom prst="rect">
+            <a:avLst/>
+          </a:prstGeom>
+          <a:noFill/>
+          <a:ln/>
+        </p:spPr>
+        <p:txBody>
+          <a:bodyPr wrap="square" rtlCol="0" anchor="ctr"/>
+          <a:lstStyle/>
+          <a:p>
+            <a:pPr indent="0" marL="0">
+              <a:buNone/>
+            </a:pPr>
+            <a:r>
+              <a:rPr lang="en-US" sz="1300" dirty="0">
+                <a:solidFill>
+                  <a:srgbClr val="1E2235"/>
+                </a:solidFill>
+                <a:latin typeface="Microsoft JhengHei" pitchFamily="34" charset="0"/>
+                <a:ea typeface="Microsoft JhengHei" pitchFamily="34" charset="-122"/>
+                <a:cs typeface="Microsoft JhengHei" pitchFamily="34" charset="-120"/>
+              </a:rPr>
+              <a:t>〔判斷〕安全近失事件無論當下判斷多輕微，都有被列入緊急事項</a:t>
+            </a:r>
+            <a:endParaRPr lang="en-US" sz="1300" dirty="0"/>
+          </a:p>
+        </p:txBody>
+      </p:sp>
+      <p:sp>
+        <p:nvSpPr>
+          <p:cNvPr id="20" name="Text 13"/>
+          <p:cNvSpPr/>
+          <p:nvPr/>
+        </p:nvSpPr>
+        <p:spPr>
+          <a:xfrm>
+            <a:off x="640080" y="6473952"/>
+            <a:ext cx="5486400" cy="274320"/>
+          </a:xfrm>
+          <a:prstGeom prst="rect">
+            <a:avLst/>
+          </a:prstGeom>
+          <a:noFill/>
+          <a:ln/>
+        </p:spPr>
+        <p:txBody>
+          <a:bodyPr wrap="square" rtlCol="0" anchor="ctr"/>
+          <a:lstStyle/>
+          <a:p>
+            <a:pPr algn="l" indent="0" marL="0">
+              <a:buNone/>
+            </a:pPr>
+            <a:r>
+              <a:rPr lang="en-US" sz="900" dirty="0">
+                <a:solidFill>
+                  <a:srgbClr val="5B6079"/>
+                </a:solidFill>
+                <a:latin typeface="Microsoft JhengHei" pitchFamily="34" charset="0"/>
+                <a:ea typeface="Microsoft JhengHei" pitchFamily="34" charset="-122"/>
+                <a:cs typeface="Microsoft JhengHei" pitchFamily="34" charset="-120"/>
+              </a:rPr>
+              <a:t>Microsoft 365 Copilot Cowork</a:t>
+            </a:r>
+            <a:endParaRPr lang="en-US" sz="900" dirty="0"/>
+          </a:p>
+        </p:txBody>
+      </p:sp>
+      <p:sp>
+        <p:nvSpPr>
+          <p:cNvPr id="21" name="Text 14"/>
+          <p:cNvSpPr/>
+          <p:nvPr/>
+        </p:nvSpPr>
+        <p:spPr>
+          <a:xfrm>
+            <a:off x="11002975" y="6473952"/>
+            <a:ext cx="548640" cy="274320"/>
+          </a:xfrm>
+          <a:prstGeom prst="rect">
+            <a:avLst/>
+          </a:prstGeom>
+          <a:noFill/>
+          <a:ln/>
+        </p:spPr>
+        <p:txBody>
+          <a:bodyPr wrap="square" rtlCol="0" anchor="ctr"/>
+          <a:lstStyle/>
+          <a:p>
+            <a:pPr algn="r" indent="0" marL="0">
+              <a:buNone/>
+            </a:pPr>
+            <a:r>
+              <a:rPr lang="en-US" sz="900" dirty="0">
+                <a:solidFill>
+                  <a:srgbClr val="5B6079"/>
+                </a:solidFill>
+                <a:latin typeface="Microsoft JhengHei" pitchFamily="34" charset="0"/>
+                <a:ea typeface="Microsoft JhengHei" pitchFamily="34" charset="-122"/>
+                <a:cs typeface="Microsoft JhengHei" pitchFamily="34" charset="-120"/>
+              </a:rPr>
+              <a:t>9</a:t>
+            </a:r>
+            <a:endParaRPr lang="en-US" sz="900" dirty="0"/>
+          </a:p>
+        </p:txBody>
+      </p:sp>
+    </p:spTree>
+  </p:cSld>
+  <p:clrMapOvr>
+    <a:masterClrMapping/>
+  </p:clrMapOvr>
+</p:sld>
+</file>
+
+<file path=ppt/slides/slide11.xml><?xml version="1.0" encoding="utf-8"?>
+<p:sld xmlns:a="http://schemas.openxmlformats.org/drawingml/2006/main" xmlns:r="http://schemas.openxmlformats.org/officeDocument/2006/relationships" xmlns:p="http://schemas.openxmlformats.org/presentationml/2006/main">
+  <p:cSld name="Slide 11">
+    <p:bg>
+      <p:bgPr>
+        <a:solidFill>
           <a:srgbClr val="0F1031"/>
         </a:solidFill>
       </p:bgPr>
@@ -3553,7 +4313,7 @@
                 <a:ea typeface="Microsoft JhengHei" pitchFamily="34" charset="-122"/>
                 <a:cs typeface="Microsoft JhengHei" pitchFamily="34" charset="-120"/>
               </a:rPr>
-              <a:t>上傳通報單後，明確要求 Cowork 把設備編號、異常現象、已嘗試措施與保固狀態都寫進信裡，並直接要求「發送」。</a:t>
+              <a:t>MFG2_設備異常通報單.md 上傳到聊天框，送出下面的提示詞，要求信件明確包含設備編號、異常現象…</a:t>
             </a:r>
             <a:endParaRPr lang="en-US" sz="1300" dirty="0"/>
           </a:p>
@@ -3700,7 +4460,7 @@
                 <a:ea typeface="Microsoft JhengHei" pitchFamily="34" charset="-122"/>
                 <a:cs typeface="Microsoft JhengHei" pitchFamily="34" charset="-120"/>
               </a:rPr>
-              <a:t>這一步展現「同一個對話接力兩個系統的真動作」：不用開新對話、不用重講背景…</a:t>
+              <a:t>在同一個對話裡，直接送出下面的提示詞，不需要重新說明設備異常的背景。</a:t>
             </a:r>
             <a:endParaRPr lang="en-US" sz="1300" dirty="0"/>
           </a:p>
@@ -3847,7 +4607,7 @@
                 <a:ea typeface="Microsoft JhengHei" pitchFamily="34" charset="-122"/>
                 <a:cs typeface="Microsoft JhengHei" pitchFamily="34" charset="-120"/>
               </a:rPr>
-              <a:t>兩張核准卡都通過後，工作區的「輸出」會同時看到：一封已送出的維修信、一場已建立的會議邀請。</a:t>
+              <a:t>到 Outlook 確認維修信在寄件匣，到行事曆確認會議邀請已建立；再用下面的提示詞請它確認兩個動作的完成狀態。</a:t>
             </a:r>
             <a:endParaRPr lang="en-US" sz="1300" dirty="0"/>
           </a:p>
@@ -3979,7 +4739,7 @@
                 <a:ea typeface="Microsoft JhengHei" pitchFamily="34" charset="-122"/>
                 <a:cs typeface="Microsoft JhengHei" pitchFamily="34" charset="-120"/>
               </a:rPr>
-              <a:t>這個情境有兩張獨立的核准卡：一次是外寄 Email 給廠商，一次是建立跨部門的會議邀請。</a:t>
+              <a:t>核准卡給你三個選擇：按下動作鍵（傳送／建立）＝只放行這一次；按動作鍵旁邊的下拉箭頭＝這個工作階段內同類動作都不再…</a:t>
             </a:r>
             <a:endParaRPr lang="en-US" sz="1250" dirty="0"/>
           </a:p>
@@ -4057,7 +4817,7 @@
                 <a:ea typeface="Microsoft JhengHei" pitchFamily="34" charset="-122"/>
                 <a:cs typeface="Microsoft JhengHei" pitchFamily="34" charset="-120"/>
               </a:rPr>
-              <a:t>9</a:t>
+              <a:t>10</a:t>
             </a:r>
             <a:endParaRPr lang="en-US" sz="900" dirty="0"/>
           </a:p>
@@ -4071,9 +4831,9 @@
 </p:sld>
 </file>
 
-<file path=ppt/slides/slide11.xml><?xml version="1.0" encoding="utf-8"?>
+<file path=ppt/slides/slide12.xml><?xml version="1.0" encoding="utf-8"?>
 <p:sld xmlns:a="http://schemas.openxmlformats.org/drawingml/2006/main" xmlns:r="http://schemas.openxmlformats.org/officeDocument/2006/relationships" xmlns:p="http://schemas.openxmlformats.org/presentationml/2006/main">
-  <p:cSld name="Slide 11">
+  <p:cSld name="Slide 12">
     <p:bg>
       <p:bgPr>
         <a:solidFill>
@@ -4524,7 +5284,7 @@
                 <a:ea typeface="Microsoft JhengHei" pitchFamily="34" charset="-122"/>
                 <a:cs typeface="Microsoft JhengHei" pitchFamily="34" charset="-120"/>
               </a:rPr>
-              <a:t>給廠商的信件包含設備編號、異常現象、已嘗試措施與保固狀態</a:t>
+              <a:t>〔產出〕給廠商的信件包含設備編號、異常現象、已嘗試措施與保固狀態</a:t>
             </a:r>
             <a:endParaRPr lang="en-US" sz="1300" dirty="0"/>
           </a:p>
@@ -4587,7 +5347,7 @@
                 <a:ea typeface="Microsoft JhengHei" pitchFamily="34" charset="-122"/>
                 <a:cs typeface="Microsoft JhengHei" pitchFamily="34" charset="-120"/>
               </a:rPr>
-              <a:t>會議邀請正確帶入根因會勘的說明，且與會者為品保主管與設備工程組</a:t>
+              <a:t>〔產出〕會議邀請正確帶入根因會勘的說明，且與會者為品保主管與設備工程組</a:t>
             </a:r>
             <a:endParaRPr lang="en-US" sz="1300" dirty="0"/>
           </a:p>
@@ -4650,7 +5410,7 @@
                 <a:ea typeface="Microsoft JhengHei" pitchFamily="34" charset="-122"/>
                 <a:cs typeface="Microsoft JhengHei" pitchFamily="34" charset="-120"/>
               </a:rPr>
-              <a:t>兩個動作都各自出現核准卡，且核准後才真正送出／建立</a:t>
+              <a:t>〔核准〕兩個動作都各自出現核准卡，且核准後才真正送出／建立</a:t>
             </a:r>
             <a:endParaRPr lang="en-US" sz="1300" dirty="0"/>
           </a:p>
@@ -4728,7 +5488,7 @@
                 <a:ea typeface="Microsoft JhengHei" pitchFamily="34" charset="-122"/>
                 <a:cs typeface="Microsoft JhengHei" pitchFamily="34" charset="-120"/>
               </a:rPr>
-              <a:t>10</a:t>
+              <a:t>11</a:t>
             </a:r>
             <a:endParaRPr lang="en-US" sz="900" dirty="0"/>
           </a:p>
@@ -4742,9 +5502,9 @@
 </p:sld>
 </file>
 
-<file path=ppt/slides/slide12.xml><?xml version="1.0" encoding="utf-8"?>
+<file path=ppt/slides/slide13.xml><?xml version="1.0" encoding="utf-8"?>
 <p:sld xmlns:a="http://schemas.openxmlformats.org/drawingml/2006/main" xmlns:r="http://schemas.openxmlformats.org/officeDocument/2006/relationships" xmlns:p="http://schemas.openxmlformats.org/presentationml/2006/main">
-  <p:cSld name="Slide 12">
+  <p:cSld name="Slide 13">
     <p:bg>
       <p:bgPr>
         <a:solidFill>
@@ -5411,7 +6171,7 @@
                 <a:ea typeface="Microsoft JhengHei" pitchFamily="34" charset="-122"/>
                 <a:cs typeface="Microsoft JhengHei" pitchFamily="34" charset="-120"/>
               </a:rPr>
-              <a:t>不要只說「幫我看一下」；直接指定要依供應商與週別做樞紐彙總、算出每週不良率，並要求它找出本月不良率呈上升趨勢…</a:t>
+              <a:t>MFG3_進料檢驗與不良品原始數據.xlsx 上傳到聊天框，送出下面的提示詞…</a:t>
             </a:r>
             <a:endParaRPr lang="en-US" sz="1300" dirty="0"/>
           </a:p>
@@ -5558,7 +6318,7 @@
                 <a:ea typeface="Microsoft JhengHei" pitchFamily="34" charset="-122"/>
                 <a:cs typeface="Microsoft JhengHei" pitchFamily="34" charset="-120"/>
               </a:rPr>
-              <a:t>這一步用到手冊目前唯一一次的 Adaptive Cards 技能：Cowork 會在聊天視窗直接畫出一張結構化卡…</a:t>
+              <a:t>在同一個對話裡，送出下面的提示詞，請它用一張卡片在聊天視窗裡呈現本月重點。</a:t>
             </a:r>
             <a:endParaRPr lang="en-US" sz="1300" dirty="0"/>
           </a:p>
@@ -5705,7 +6465,7 @@
                 <a:ea typeface="Microsoft JhengHei" pitchFamily="34" charset="-122"/>
                 <a:cs typeface="Microsoft JhengHei" pitchFamily="34" charset="-120"/>
               </a:rPr>
-              <a:t>最後換一個技能，把分析結果寫成信件並要求直接發送。</a:t>
+              <a:t>在同一個對話裡，送出下面的提示詞，要求把分析重點整理成信件直接發送給品保主管。</a:t>
             </a:r>
             <a:endParaRPr lang="en-US" sz="1300" dirty="0"/>
           </a:p>
@@ -5837,7 +6597,7 @@
                 <a:ea typeface="Microsoft JhengHei" pitchFamily="34" charset="-122"/>
                 <a:cs typeface="Microsoft JhengHei" pitchFamily="34" charset="-120"/>
               </a:rPr>
-              <a:t>樞紐分析與卡片摘要都是唯讀分析，不會觸發審核卡；但要求「發送」跟進信給品保主管時…</a:t>
+              <a:t>樞紐分析與卡片摘要都是唯讀分析，不會觸發核准卡；要求「發送」跟進信時核准卡才出現。</a:t>
             </a:r>
             <a:endParaRPr lang="en-US" sz="1250" dirty="0"/>
           </a:p>
@@ -5915,7 +6675,7 @@
                 <a:ea typeface="Microsoft JhengHei" pitchFamily="34" charset="-122"/>
                 <a:cs typeface="Microsoft JhengHei" pitchFamily="34" charset="-120"/>
               </a:rPr>
-              <a:t>11</a:t>
+              <a:t>12</a:t>
             </a:r>
             <a:endParaRPr lang="en-US" sz="900" dirty="0"/>
           </a:p>
@@ -5929,9 +6689,9 @@
 </p:sld>
 </file>
 
-<file path=ppt/slides/slide13.xml><?xml version="1.0" encoding="utf-8"?>
+<file path=ppt/slides/slide14.xml><?xml version="1.0" encoding="utf-8"?>
 <p:sld xmlns:a="http://schemas.openxmlformats.org/drawingml/2006/main" xmlns:r="http://schemas.openxmlformats.org/officeDocument/2006/relationships" xmlns:p="http://schemas.openxmlformats.org/presentationml/2006/main">
-  <p:cSld name="Slide 13">
+  <p:cSld name="Slide 14">
     <p:bg>
       <p:bgPr>
         <a:solidFill>
@@ -6382,7 +7142,7 @@
                 <a:ea typeface="Microsoft JhengHei" pitchFamily="34" charset="-122"/>
                 <a:cs typeface="Microsoft JhengHei" pitchFamily="34" charset="-120"/>
               </a:rPr>
-              <a:t>樞紐分析正確依供應商與週別計算不良率，數字與原始數據一致</a:t>
+              <a:t>〔產出〕樞紐分析正確依供應商與週別計算不良率，數字與原始數據一致</a:t>
             </a:r>
             <a:endParaRPr lang="en-US" sz="1300" dirty="0"/>
           </a:p>
@@ -6445,7 +7205,7 @@
                 <a:ea typeface="Microsoft JhengHei" pitchFamily="34" charset="-122"/>
                 <a:cs typeface="Microsoft JhengHei" pitchFamily="34" charset="-120"/>
               </a:rPr>
-              <a:t>有找出本月不良率上升趨勢最明顯的供應商，且有具體依據而非憑印象</a:t>
+              <a:t>〔判斷〕有找出本月不良率上升趨勢最明顯的供應商，且有具體依據而非憑印象</a:t>
             </a:r>
             <a:endParaRPr lang="en-US" sz="1300" dirty="0"/>
           </a:p>
@@ -6508,7 +7268,7 @@
                 <a:ea typeface="Microsoft JhengHei" pitchFamily="34" charset="-122"/>
                 <a:cs typeface="Microsoft JhengHei" pitchFamily="34" charset="-120"/>
               </a:rPr>
-              <a:t>互動卡片能在不開檔案的情況下先掌握本月重點</a:t>
+              <a:t>〔產出〕互動卡片能在不開檔案的情況下先掌握本月重點</a:t>
             </a:r>
             <a:endParaRPr lang="en-US" sz="1300" dirty="0"/>
           </a:p>
@@ -6586,7 +7346,7 @@
                 <a:ea typeface="Microsoft JhengHei" pitchFamily="34" charset="-122"/>
                 <a:cs typeface="Microsoft JhengHei" pitchFamily="34" charset="-120"/>
               </a:rPr>
-              <a:t>12</a:t>
+              <a:t>13</a:t>
             </a:r>
             <a:endParaRPr lang="en-US" sz="900" dirty="0"/>
           </a:p>
@@ -6600,9 +7360,9 @@
 </p:sld>
 </file>
 
-<file path=ppt/slides/slide14.xml><?xml version="1.0" encoding="utf-8"?>
+<file path=ppt/slides/slide15.xml><?xml version="1.0" encoding="utf-8"?>
 <p:sld xmlns:a="http://schemas.openxmlformats.org/drawingml/2006/main" xmlns:r="http://schemas.openxmlformats.org/officeDocument/2006/relationships" xmlns:p="http://schemas.openxmlformats.org/presentationml/2006/main">
-  <p:cSld name="Slide 14">
+  <p:cSld name="Slide 15">
     <p:bg>
       <p:bgPr>
         <a:solidFill>
@@ -7269,7 +8029,7 @@
                 <a:ea typeface="Microsoft JhengHei" pitchFamily="34" charset="-122"/>
                 <a:cs typeface="Microsoft JhengHei" pitchFamily="34" charset="-120"/>
               </a:rPr>
-              <a:t>上傳 PDF 後，明確要求依「狀態」欄位篩出即將到期與已逾期兩類，並依負責採購分組列出…</a:t>
+              <a:t>MFG4_供應商稽核與證書到期總表.pdf 上傳到聊天框，送出下面的提示詞…</a:t>
             </a:r>
             <a:endParaRPr lang="en-US" sz="1300" dirty="0"/>
           </a:p>
@@ -7416,7 +8176,7 @@
                 <a:ea typeface="Microsoft JhengHei" pitchFamily="34" charset="-122"/>
                 <a:cs typeface="Microsoft JhengHei" pitchFamily="34" charset="-120"/>
               </a:rPr>
-              <a:t>這裡刻意用 1 對 1 訊息而不是發到某個「品保群組」頻道——因為你自己的 Teams 不一定有那個頻道…</a:t>
+              <a:t>在同一個對話裡，送出下面的提示詞，請它針對每位負責採購各自草擬一則 Teams 訊息並直接發送。</a:t>
             </a:r>
             <a:endParaRPr lang="en-US" sz="1300" dirty="0"/>
           </a:p>
@@ -7563,7 +8323,7 @@
                 <a:ea typeface="Microsoft JhengHei" pitchFamily="34" charset="-122"/>
                 <a:cs typeface="Microsoft JhengHei" pitchFamily="34" charset="-120"/>
               </a:rPr>
-              <a:t>對已逾期的供應商，光提醒可能不夠，還需要排一次實地稽核拜訪。</a:t>
+              <a:t>在同一個對話裡，送出下面的提示詞，要求針對已逾期供應商建立稽核拜訪的行事曆邀請。</a:t>
             </a:r>
             <a:endParaRPr lang="en-US" sz="1300" dirty="0"/>
           </a:p>
@@ -7695,7 +8455,7 @@
                 <a:ea typeface="Microsoft JhengHei" pitchFamily="34" charset="-122"/>
                 <a:cs typeface="Microsoft JhengHei" pitchFamily="34" charset="-120"/>
               </a:rPr>
-              <a:t>從 PDF 抓取到期資訊是唯讀分析，不會觸發審核卡；但「發送」Teams 提醒與「建立」行事曆邀請都是會影響他人…</a:t>
+              <a:t>從 PDF 抓取是唯讀分析，不觸發核准卡；但「發送」Teams 訊息與「建立」行事曆邀請各自有核准卡。</a:t>
             </a:r>
             <a:endParaRPr lang="en-US" sz="1250" dirty="0"/>
           </a:p>
@@ -7773,7 +8533,7 @@
                 <a:ea typeface="Microsoft JhengHei" pitchFamily="34" charset="-122"/>
                 <a:cs typeface="Microsoft JhengHei" pitchFamily="34" charset="-120"/>
               </a:rPr>
-              <a:t>13</a:t>
+              <a:t>14</a:t>
             </a:r>
             <a:endParaRPr lang="en-US" sz="900" dirty="0"/>
           </a:p>
@@ -7787,9 +8547,9 @@
 </p:sld>
 </file>
 
-<file path=ppt/slides/slide15.xml><?xml version="1.0" encoding="utf-8"?>
+<file path=ppt/slides/slide16.xml><?xml version="1.0" encoding="utf-8"?>
 <p:sld xmlns:a="http://schemas.openxmlformats.org/drawingml/2006/main" xmlns:r="http://schemas.openxmlformats.org/officeDocument/2006/relationships" xmlns:p="http://schemas.openxmlformats.org/presentationml/2006/main">
-  <p:cSld name="Slide 15">
+  <p:cSld name="Slide 16">
     <p:bg>
       <p:bgPr>
         <a:solidFill>
@@ -8240,7 +9000,7 @@
                 <a:ea typeface="Microsoft JhengHei" pitchFamily="34" charset="-122"/>
                 <a:cs typeface="Microsoft JhengHei" pitchFamily="34" charset="-120"/>
               </a:rPr>
-              <a:t>正確從 PDF 抓出「即將到期」與「已逾期」的項目，且日期與 PDF 一致</a:t>
+              <a:t>〔產出〕正確從 PDF 抓出「即將到期」與「已逾期」的項目，且日期與 PDF 一致</a:t>
             </a:r>
             <a:endParaRPr lang="en-US" sz="1300" dirty="0"/>
           </a:p>
@@ -8303,7 +9063,7 @@
                 <a:ea typeface="Microsoft JhengHei" pitchFamily="34" charset="-122"/>
                 <a:cs typeface="Microsoft JhengHei" pitchFamily="34" charset="-120"/>
               </a:rPr>
-              <a:t>依負責採購正確分組，沒有混淆或遺漏</a:t>
+              <a:t>〔產出〕依負責採購正確分組，沒有混淆或遺漏</a:t>
             </a:r>
             <a:endParaRPr lang="en-US" sz="1300" dirty="0"/>
           </a:p>
@@ -8366,7 +9126,7 @@
                 <a:ea typeface="Microsoft JhengHei" pitchFamily="34" charset="-122"/>
                 <a:cs typeface="Microsoft JhengHei" pitchFamily="34" charset="-120"/>
               </a:rPr>
-              <a:t>Teams 提醒訊息以 1 對 1 方式發送，核准後才送出</a:t>
+              <a:t>〔核准〕Teams 提醒訊息以 1 對 1 方式發送，核准後才送出</a:t>
             </a:r>
             <a:endParaRPr lang="en-US" sz="1300" dirty="0"/>
           </a:p>
@@ -8444,7 +9204,7 @@
                 <a:ea typeface="Microsoft JhengHei" pitchFamily="34" charset="-122"/>
                 <a:cs typeface="Microsoft JhengHei" pitchFamily="34" charset="-120"/>
               </a:rPr>
-              <a:t>14</a:t>
+              <a:t>15</a:t>
             </a:r>
             <a:endParaRPr lang="en-US" sz="900" dirty="0"/>
           </a:p>
@@ -8458,9 +9218,9 @@
 </p:sld>
 </file>
 
-<file path=ppt/slides/slide16.xml><?xml version="1.0" encoding="utf-8"?>
+<file path=ppt/slides/slide17.xml><?xml version="1.0" encoding="utf-8"?>
 <p:sld xmlns:a="http://schemas.openxmlformats.org/drawingml/2006/main" xmlns:r="http://schemas.openxmlformats.org/officeDocument/2006/relationships" xmlns:p="http://schemas.openxmlformats.org/presentationml/2006/main">
-  <p:cSld name="Slide 16">
+  <p:cSld name="Slide 17">
     <p:bg>
       <p:bgPr>
         <a:solidFill>
@@ -9005,7 +9765,7 @@
                 <a:ea typeface="Microsoft JhengHei" pitchFamily="34" charset="-122"/>
                 <a:cs typeface="Microsoft JhengHei" pitchFamily="34" charset="-120"/>
               </a:rPr>
-              <a:t>和一般 prompt 不同，自訂技能是會長期留在 OneDrive 的資產，所以先問 Cowork 技能命名…</a:t>
+              <a:t>送出下面的提示詞，先讓 Cowork 說明自訂技能的命名規則、存放位置與生效方式，再動手建立。</a:t>
             </a:r>
             <a:endParaRPr lang="en-US" sz="1300" dirty="0"/>
           </a:p>
@@ -9152,7 +9912,7 @@
                 <a:ea typeface="Microsoft JhengHei" pitchFamily="34" charset="-122"/>
                 <a:cs typeface="Microsoft JhengHei" pitchFamily="34" charset="-120"/>
               </a:rPr>
-              <a:t>接著把技能定義檔一起交給 Cowork，要求它建立 skill。</a:t>
+              <a:t>MFG5_SKILL.md 上傳到聊天框，送出下面的提示詞，要求直接建立技能。</a:t>
             </a:r>
             <a:endParaRPr lang="en-US" sz="1300" dirty="0"/>
           </a:p>
@@ -9299,7 +10059,7 @@
                 <a:ea typeface="Microsoft JhengHei" pitchFamily="34" charset="-122"/>
                 <a:cs typeface="Microsoft JhengHei" pitchFamily="34" charset="-120"/>
               </a:rPr>
-              <a:t>技能建立後，開一個新工作階段，上傳原始產能數據，再用一句觸發語要求它做「產能週報」。</a:t>
+              <a:t>關閉現在的對話，開一個全新的工作階段。</a:t>
             </a:r>
             <a:endParaRPr lang="en-US" sz="1300" dirty="0"/>
           </a:p>
@@ -9446,7 +10206,7 @@
                 <a:ea typeface="Microsoft JhengHei" pitchFamily="34" charset="-122"/>
                 <a:cs typeface="Microsoft JhengHei" pitchFamily="34" charset="-120"/>
               </a:rPr>
-              <a:t>打開產出的週報，逐項核對：稼動率與良率數字是否與原始數據一致、未達標項目有沒有被明確標示…</a:t>
+              <a:t>打開 Cowork 產出的週報，逐項與原始數據對照；再打開技能詳細頁確認可以分享；然後用下面的提示詞請它說明判斷…</a:t>
             </a:r>
             <a:endParaRPr lang="en-US" sz="1300" dirty="0"/>
           </a:p>
@@ -9519,677 +10279,6 @@
               <a:rPr lang="en-US" sz="900" dirty="0">
                 <a:solidFill>
                   <a:srgbClr val="8A8FB5"/>
-                </a:solidFill>
-                <a:latin typeface="Microsoft JhengHei" pitchFamily="34" charset="0"/>
-                <a:ea typeface="Microsoft JhengHei" pitchFamily="34" charset="-122"/>
-                <a:cs typeface="Microsoft JhengHei" pitchFamily="34" charset="-120"/>
-              </a:rPr>
-              <a:t>15</a:t>
-            </a:r>
-            <a:endParaRPr lang="en-US" sz="900" dirty="0"/>
-          </a:p>
-        </p:txBody>
-      </p:sp>
-    </p:spTree>
-  </p:cSld>
-  <p:clrMapOvr>
-    <a:masterClrMapping/>
-  </p:clrMapOvr>
-</p:sld>
-</file>
-
-<file path=ppt/slides/slide17.xml><?xml version="1.0" encoding="utf-8"?>
-<p:sld xmlns:a="http://schemas.openxmlformats.org/drawingml/2006/main" xmlns:r="http://schemas.openxmlformats.org/officeDocument/2006/relationships" xmlns:p="http://schemas.openxmlformats.org/presentationml/2006/main">
-  <p:cSld name="Slide 17">
-    <p:bg>
-      <p:bgPr>
-        <a:solidFill>
-          <a:srgbClr val="F7F8FC"/>
-        </a:solidFill>
-      </p:bgPr>
-    </p:bg>
-    <p:spTree>
-      <p:nvGrpSpPr>
-        <p:cNvPr id="1" name=""/>
-        <p:cNvGrpSpPr/>
-        <p:nvPr/>
-      </p:nvGrpSpPr>
-      <p:grpSpPr>
-        <a:xfrm>
-          <a:off x="0" y="0"/>
-          <a:ext cx="0" cy="0"/>
-          <a:chOff x="0" y="0"/>
-          <a:chExt cx="0" cy="0"/>
-        </a:xfrm>
-      </p:grpSpPr>
-      <p:sp>
-        <p:nvSpPr>
-          <p:cNvPr id="2" name="Shape 0"/>
-          <p:cNvSpPr/>
-          <p:nvPr/>
-        </p:nvSpPr>
-        <p:spPr>
-          <a:xfrm>
-            <a:off x="640080" y="566928"/>
-            <a:ext cx="384048" cy="128016"/>
-          </a:xfrm>
-          <a:prstGeom prst="rect">
-            <a:avLst/>
-          </a:prstGeom>
-          <a:solidFill>
-            <a:srgbClr val="986F0B"/>
-          </a:solidFill>
-          <a:ln/>
-        </p:spPr>
-      </p:sp>
-      <p:sp>
-        <p:nvSpPr>
-          <p:cNvPr id="3" name="Text 1"/>
-          <p:cNvSpPr/>
-          <p:nvPr/>
-        </p:nvSpPr>
-        <p:spPr>
-          <a:xfrm>
-            <a:off x="1143000" y="457200"/>
-            <a:ext cx="8229600" cy="310896"/>
-          </a:xfrm>
-          <a:prstGeom prst="rect">
-            <a:avLst/>
-          </a:prstGeom>
-          <a:noFill/>
-          <a:ln/>
-        </p:spPr>
-        <p:txBody>
-          <a:bodyPr wrap="square" rtlCol="0" anchor="ctr"/>
-          <a:lstStyle/>
-          <a:p>
-            <a:pPr indent="0" marL="0">
-              <a:buNone/>
-            </a:pPr>
-            <a:r>
-              <a:rPr lang="en-US" sz="1200" b="1" spc="200" kern="0" dirty="0">
-                <a:solidFill>
-                  <a:srgbClr val="986F0B"/>
-                </a:solidFill>
-                <a:latin typeface="Microsoft JhengHei" pitchFamily="34" charset="0"/>
-                <a:ea typeface="Microsoft JhengHei" pitchFamily="34" charset="-122"/>
-                <a:cs typeface="Microsoft JhengHei" pitchFamily="34" charset="-120"/>
-              </a:rPr>
-              <a:t>情境 05 · 實機示範</a:t>
-            </a:r>
-            <a:endParaRPr lang="en-US" sz="1200" dirty="0"/>
-          </a:p>
-        </p:txBody>
-      </p:sp>
-      <p:sp>
-        <p:nvSpPr>
-          <p:cNvPr id="4" name="Text 2"/>
-          <p:cNvSpPr/>
-          <p:nvPr/>
-        </p:nvSpPr>
-        <p:spPr>
-          <a:xfrm>
-            <a:off x="640080" y="786384"/>
-            <a:ext cx="10972800" cy="640080"/>
-          </a:xfrm>
-          <a:prstGeom prst="rect">
-            <a:avLst/>
-          </a:prstGeom>
-          <a:noFill/>
-          <a:ln/>
-        </p:spPr>
-        <p:txBody>
-          <a:bodyPr wrap="square" rtlCol="0" anchor="ctr"/>
-          <a:lstStyle/>
-          <a:p>
-            <a:pPr indent="0" marL="0">
-              <a:buNone/>
-            </a:pPr>
-            <a:r>
-              <a:rPr lang="en-US" sz="3000" b="1" dirty="0">
-                <a:solidFill>
-                  <a:srgbClr val="1E2235"/>
-                </a:solidFill>
-                <a:latin typeface="Microsoft JhengHei" pitchFamily="34" charset="0"/>
-                <a:ea typeface="Microsoft JhengHei" pitchFamily="34" charset="-122"/>
-                <a:cs typeface="Microsoft JhengHei" pitchFamily="34" charset="-120"/>
-              </a:rPr>
-              <a:t>看 Cowork 怎麼做、產出什麼</a:t>
-            </a:r>
-            <a:endParaRPr lang="en-US" sz="3000" dirty="0"/>
-          </a:p>
-        </p:txBody>
-      </p:sp>
-      <p:sp>
-        <p:nvSpPr>
-          <p:cNvPr id="5" name="Shape 3"/>
-          <p:cNvSpPr/>
-          <p:nvPr/>
-        </p:nvSpPr>
-        <p:spPr>
-          <a:xfrm>
-            <a:off x="585216" y="1773936"/>
-            <a:ext cx="5184648" cy="3433186"/>
-          </a:xfrm>
-          <a:prstGeom prst="rect">
-            <a:avLst/>
-          </a:prstGeom>
-          <a:solidFill>
-            <a:srgbClr val="FFFFFF"/>
-          </a:solidFill>
-          <a:ln w="12700">
-            <a:solidFill>
-              <a:srgbClr val="E4E7F2"/>
-            </a:solidFill>
-            <a:prstDash val="solid"/>
-          </a:ln>
-          <a:effectLst>
-            <a:outerShdw sx="100000" sy="100000" kx="0" ky="0" algn="bl" rotWithShape="0" blurRad="114300" dist="38100" dir="5400000">
-              <a:srgbClr val="8A90B5">
-                <a:alpha val="22000"/>
-              </a:srgbClr>
-            </a:outerShdw>
-          </a:effectLst>
-        </p:spPr>
-      </p:sp>
-      <p:pic>
-        <p:nvPicPr>
-          <p:cNvPr id="6" name="Image 0" descr="C:\temp\CoworkLab\v2\_working\screenshots\mfg5_01_howto.png">    </p:cNvPr>
-          <p:cNvPicPr>
-            <a:picLocks noChangeAspect="1"/>
-          </p:cNvPicPr>
-          <p:nvPr/>
-        </p:nvPicPr>
-        <p:blipFill>
-          <a:blip r:embed="rId1"/>
-          <a:stretch>
-            <a:fillRect/>
-          </a:stretch>
-        </p:blipFill>
-        <p:spPr>
-          <a:xfrm>
-            <a:off x="640080" y="1828800"/>
-            <a:ext cx="5074920" cy="3323458"/>
-          </a:xfrm>
-          <a:prstGeom prst="rect">
-            <a:avLst/>
-          </a:prstGeom>
-        </p:spPr>
-      </p:pic>
-      <p:sp>
-        <p:nvSpPr>
-          <p:cNvPr id="7" name="Text 4"/>
-          <p:cNvSpPr/>
-          <p:nvPr/>
-        </p:nvSpPr>
-        <p:spPr>
-          <a:xfrm>
-            <a:off x="640080" y="5261986"/>
-            <a:ext cx="5074920" cy="320040"/>
-          </a:xfrm>
-          <a:prstGeom prst="rect">
-            <a:avLst/>
-          </a:prstGeom>
-          <a:noFill/>
-          <a:ln/>
-        </p:spPr>
-        <p:txBody>
-          <a:bodyPr wrap="square" rtlCol="0" anchor="ctr"/>
-          <a:lstStyle/>
-          <a:p>
-            <a:pPr algn="ctr" indent="0" marL="0">
-              <a:buNone/>
-            </a:pPr>
-            <a:r>
-              <a:rPr lang="en-US" sz="1350" b="1" dirty="0">
-                <a:solidFill>
-                  <a:srgbClr val="986F0B"/>
-                </a:solidFill>
-                <a:latin typeface="Microsoft JhengHei" pitchFamily="34" charset="0"/>
-                <a:ea typeface="Microsoft JhengHei" pitchFamily="34" charset="-122"/>
-                <a:cs typeface="Microsoft JhengHei" pitchFamily="34" charset="-120"/>
-              </a:rPr>
-              <a:t>① 你的輸入與指令</a:t>
-            </a:r>
-            <a:endParaRPr lang="en-US" sz="1350" dirty="0"/>
-          </a:p>
-        </p:txBody>
-      </p:sp>
-      <p:sp>
-        <p:nvSpPr>
-          <p:cNvPr id="8" name="Shape 5"/>
-          <p:cNvSpPr/>
-          <p:nvPr/>
-        </p:nvSpPr>
-        <p:spPr>
-          <a:xfrm>
-            <a:off x="6163056" y="1773936"/>
-            <a:ext cx="5184648" cy="3433186"/>
-          </a:xfrm>
-          <a:prstGeom prst="rect">
-            <a:avLst/>
-          </a:prstGeom>
-          <a:solidFill>
-            <a:srgbClr val="FFFFFF"/>
-          </a:solidFill>
-          <a:ln w="12700">
-            <a:solidFill>
-              <a:srgbClr val="E4E7F2"/>
-            </a:solidFill>
-            <a:prstDash val="solid"/>
-          </a:ln>
-          <a:effectLst>
-            <a:outerShdw sx="100000" sy="100000" kx="0" ky="0" algn="bl" rotWithShape="0" blurRad="114300" dist="38100" dir="5400000">
-              <a:srgbClr val="8A90B5">
-                <a:alpha val="22000"/>
-              </a:srgbClr>
-            </a:outerShdw>
-          </a:effectLst>
-        </p:spPr>
-      </p:sp>
-      <p:pic>
-        <p:nvPicPr>
-          <p:cNvPr id="9" name="Image 1" descr="C:\temp\CoworkLab\v2\_working\screenshots\mfg5_04_share.png">    </p:cNvPr>
-          <p:cNvPicPr>
-            <a:picLocks noChangeAspect="1"/>
-          </p:cNvPicPr>
-          <p:nvPr/>
-        </p:nvPicPr>
-        <p:blipFill>
-          <a:blip r:embed="rId2"/>
-          <a:stretch>
-            <a:fillRect/>
-          </a:stretch>
-        </p:blipFill>
-        <p:spPr>
-          <a:xfrm>
-            <a:off x="6217920" y="1828800"/>
-            <a:ext cx="5074920" cy="3323458"/>
-          </a:xfrm>
-          <a:prstGeom prst="rect">
-            <a:avLst/>
-          </a:prstGeom>
-        </p:spPr>
-      </p:pic>
-      <p:sp>
-        <p:nvSpPr>
-          <p:cNvPr id="10" name="Text 6"/>
-          <p:cNvSpPr/>
-          <p:nvPr/>
-        </p:nvSpPr>
-        <p:spPr>
-          <a:xfrm>
-            <a:off x="6217920" y="5261986"/>
-            <a:ext cx="5074920" cy="320040"/>
-          </a:xfrm>
-          <a:prstGeom prst="rect">
-            <a:avLst/>
-          </a:prstGeom>
-          <a:noFill/>
-          <a:ln/>
-        </p:spPr>
-        <p:txBody>
-          <a:bodyPr wrap="square" rtlCol="0" anchor="ctr"/>
-          <a:lstStyle/>
-          <a:p>
-            <a:pPr algn="ctr" indent="0" marL="0">
-              <a:buNone/>
-            </a:pPr>
-            <a:r>
-              <a:rPr lang="en-US" sz="1350" b="1" dirty="0">
-                <a:solidFill>
-                  <a:srgbClr val="986F0B"/>
-                </a:solidFill>
-                <a:latin typeface="Microsoft JhengHei" pitchFamily="34" charset="0"/>
-                <a:ea typeface="Microsoft JhengHei" pitchFamily="34" charset="-122"/>
-                <a:cs typeface="Microsoft JhengHei" pitchFamily="34" charset="-120"/>
-              </a:rPr>
-              <a:t>② 產出成果</a:t>
-            </a:r>
-            <a:endParaRPr lang="en-US" sz="1350" dirty="0"/>
-          </a:p>
-        </p:txBody>
-      </p:sp>
-      <p:sp>
-        <p:nvSpPr>
-          <p:cNvPr id="11" name="Shape 7"/>
-          <p:cNvSpPr/>
-          <p:nvPr/>
-        </p:nvSpPr>
-        <p:spPr>
-          <a:xfrm>
-            <a:off x="640080" y="5074920"/>
-            <a:ext cx="10911535" cy="1143000"/>
-          </a:xfrm>
-          <a:prstGeom prst="rect">
-            <a:avLst/>
-          </a:prstGeom>
-          <a:solidFill>
-            <a:srgbClr val="FFFFFF"/>
-          </a:solidFill>
-          <a:ln w="12700">
-            <a:solidFill>
-              <a:srgbClr val="E4E7F2"/>
-            </a:solidFill>
-            <a:prstDash val="solid"/>
-          </a:ln>
-        </p:spPr>
-      </p:sp>
-      <p:sp>
-        <p:nvSpPr>
-          <p:cNvPr id="12" name="Shape 8"/>
-          <p:cNvSpPr/>
-          <p:nvPr/>
-        </p:nvSpPr>
-        <p:spPr>
-          <a:xfrm>
-            <a:off x="640080" y="5074920"/>
-            <a:ext cx="91440" cy="1143000"/>
-          </a:xfrm>
-          <a:prstGeom prst="rect">
-            <a:avLst/>
-          </a:prstGeom>
-          <a:solidFill>
-            <a:srgbClr val="986F0B"/>
-          </a:solidFill>
-          <a:ln/>
-        </p:spPr>
-      </p:sp>
-      <p:sp>
-        <p:nvSpPr>
-          <p:cNvPr id="13" name="Text 9"/>
-          <p:cNvSpPr/>
-          <p:nvPr/>
-        </p:nvSpPr>
-        <p:spPr>
-          <a:xfrm>
-            <a:off x="914400" y="5184648"/>
-            <a:ext cx="1828800" cy="320040"/>
-          </a:xfrm>
-          <a:prstGeom prst="rect">
-            <a:avLst/>
-          </a:prstGeom>
-          <a:noFill/>
-          <a:ln/>
-        </p:spPr>
-        <p:txBody>
-          <a:bodyPr wrap="square" rtlCol="0" anchor="ctr"/>
-          <a:lstStyle/>
-          <a:p>
-            <a:pPr indent="0" marL="0">
-              <a:buNone/>
-            </a:pPr>
-            <a:r>
-              <a:rPr lang="en-US" sz="1400" b="1" dirty="0">
-                <a:solidFill>
-                  <a:srgbClr val="1E2235"/>
-                </a:solidFill>
-                <a:latin typeface="Microsoft JhengHei" pitchFamily="34" charset="0"/>
-                <a:ea typeface="Microsoft JhengHei" pitchFamily="34" charset="-122"/>
-                <a:cs typeface="Microsoft JhengHei" pitchFamily="34" charset="-120"/>
-              </a:rPr>
-              <a:t>產出驗收</a:t>
-            </a:r>
-            <a:endParaRPr lang="en-US" sz="1400" dirty="0"/>
-          </a:p>
-        </p:txBody>
-      </p:sp>
-      <p:pic>
-        <p:nvPicPr>
-          <p:cNvPr id="14" name="Image 2" descr="preencoded.png">    </p:cNvPr>
-          <p:cNvPicPr>
-            <a:picLocks noChangeAspect="1"/>
-          </p:cNvPicPr>
-          <p:nvPr/>
-        </p:nvPicPr>
-        <p:blipFill>
-          <a:blip r:embed="rId3"/>
-          <a:stretch>
-            <a:fillRect/>
-          </a:stretch>
-        </p:blipFill>
-        <p:spPr>
-          <a:xfrm>
-            <a:off x="2834640" y="5221224"/>
-            <a:ext cx="182880" cy="182880"/>
-          </a:xfrm>
-          <a:prstGeom prst="rect">
-            <a:avLst/>
-          </a:prstGeom>
-        </p:spPr>
-      </p:pic>
-      <p:sp>
-        <p:nvSpPr>
-          <p:cNvPr id="15" name="Text 10"/>
-          <p:cNvSpPr/>
-          <p:nvPr/>
-        </p:nvSpPr>
-        <p:spPr>
-          <a:xfrm>
-            <a:off x="3108960" y="5166360"/>
-            <a:ext cx="8168335" cy="310896"/>
-          </a:xfrm>
-          <a:prstGeom prst="rect">
-            <a:avLst/>
-          </a:prstGeom>
-          <a:noFill/>
-          <a:ln/>
-        </p:spPr>
-        <p:txBody>
-          <a:bodyPr wrap="square" rtlCol="0" anchor="ctr"/>
-          <a:lstStyle/>
-          <a:p>
-            <a:pPr indent="0" marL="0">
-              <a:buNone/>
-            </a:pPr>
-            <a:r>
-              <a:rPr lang="en-US" sz="1300" dirty="0">
-                <a:solidFill>
-                  <a:srgbClr val="1E2235"/>
-                </a:solidFill>
-                <a:latin typeface="Microsoft JhengHei" pitchFamily="34" charset="0"/>
-                <a:ea typeface="Microsoft JhengHei" pitchFamily="34" charset="-122"/>
-                <a:cs typeface="Microsoft JhengHei" pitchFamily="34" charset="-120"/>
-              </a:rPr>
-              <a:t>weekly-output-report 技能已建立，且規則包含四個固定段落與防護欄</a:t>
-            </a:r>
-            <a:endParaRPr lang="en-US" sz="1300" dirty="0"/>
-          </a:p>
-        </p:txBody>
-      </p:sp>
-      <p:pic>
-        <p:nvPicPr>
-          <p:cNvPr id="16" name="Image 3" descr="preencoded.png">    </p:cNvPr>
-          <p:cNvPicPr>
-            <a:picLocks noChangeAspect="1"/>
-          </p:cNvPicPr>
-          <p:nvPr/>
-        </p:nvPicPr>
-        <p:blipFill>
-          <a:blip r:embed="rId4"/>
-          <a:stretch>
-            <a:fillRect/>
-          </a:stretch>
-        </p:blipFill>
-        <p:spPr>
-          <a:xfrm>
-            <a:off x="2834640" y="5559552"/>
-            <a:ext cx="182880" cy="182880"/>
-          </a:xfrm>
-          <a:prstGeom prst="rect">
-            <a:avLst/>
-          </a:prstGeom>
-        </p:spPr>
-      </p:pic>
-      <p:sp>
-        <p:nvSpPr>
-          <p:cNvPr id="17" name="Text 11"/>
-          <p:cNvSpPr/>
-          <p:nvPr/>
-        </p:nvSpPr>
-        <p:spPr>
-          <a:xfrm>
-            <a:off x="3108960" y="5504688"/>
-            <a:ext cx="8168335" cy="310896"/>
-          </a:xfrm>
-          <a:prstGeom prst="rect">
-            <a:avLst/>
-          </a:prstGeom>
-          <a:noFill/>
-          <a:ln/>
-        </p:spPr>
-        <p:txBody>
-          <a:bodyPr wrap="square" rtlCol="0" anchor="ctr"/>
-          <a:lstStyle/>
-          <a:p>
-            <a:pPr indent="0" marL="0">
-              <a:buNone/>
-            </a:pPr>
-            <a:r>
-              <a:rPr lang="en-US" sz="1300" dirty="0">
-                <a:solidFill>
-                  <a:srgbClr val="1E2235"/>
-                </a:solidFill>
-                <a:latin typeface="Microsoft JhengHei" pitchFamily="34" charset="0"/>
-                <a:ea typeface="Microsoft JhengHei" pitchFamily="34" charset="-122"/>
-                <a:cs typeface="Microsoft JhengHei" pitchFamily="34" charset="-120"/>
-              </a:rPr>
-              <a:t>新工作階段能用一句話觸發技能，不必重述規則</a:t>
-            </a:r>
-            <a:endParaRPr lang="en-US" sz="1300" dirty="0"/>
-          </a:p>
-        </p:txBody>
-      </p:sp>
-      <p:pic>
-        <p:nvPicPr>
-          <p:cNvPr id="18" name="Image 4" descr="preencoded.png">    </p:cNvPr>
-          <p:cNvPicPr>
-            <a:picLocks noChangeAspect="1"/>
-          </p:cNvPicPr>
-          <p:nvPr/>
-        </p:nvPicPr>
-        <p:blipFill>
-          <a:blip r:embed="rId5"/>
-          <a:stretch>
-            <a:fillRect/>
-          </a:stretch>
-        </p:blipFill>
-        <p:spPr>
-          <a:xfrm>
-            <a:off x="2834640" y="5897880"/>
-            <a:ext cx="182880" cy="182880"/>
-          </a:xfrm>
-          <a:prstGeom prst="rect">
-            <a:avLst/>
-          </a:prstGeom>
-        </p:spPr>
-      </p:pic>
-      <p:sp>
-        <p:nvSpPr>
-          <p:cNvPr id="19" name="Text 12"/>
-          <p:cNvSpPr/>
-          <p:nvPr/>
-        </p:nvSpPr>
-        <p:spPr>
-          <a:xfrm>
-            <a:off x="3108960" y="5843016"/>
-            <a:ext cx="8168335" cy="310896"/>
-          </a:xfrm>
-          <a:prstGeom prst="rect">
-            <a:avLst/>
-          </a:prstGeom>
-          <a:noFill/>
-          <a:ln/>
-        </p:spPr>
-        <p:txBody>
-          <a:bodyPr wrap="square" rtlCol="0" anchor="ctr"/>
-          <a:lstStyle/>
-          <a:p>
-            <a:pPr indent="0" marL="0">
-              <a:buNone/>
-            </a:pPr>
-            <a:r>
-              <a:rPr lang="en-US" sz="1300" dirty="0">
-                <a:solidFill>
-                  <a:srgbClr val="1E2235"/>
-                </a:solidFill>
-                <a:latin typeface="Microsoft JhengHei" pitchFamily="34" charset="0"/>
-                <a:ea typeface="Microsoft JhengHei" pitchFamily="34" charset="-122"/>
-                <a:cs typeface="Microsoft JhengHei" pitchFamily="34" charset="-120"/>
-              </a:rPr>
-              <a:t>產出的週報數字與原始數據一致，未達標項目有被明確標示</a:t>
-            </a:r>
-            <a:endParaRPr lang="en-US" sz="1300" dirty="0"/>
-          </a:p>
-        </p:txBody>
-      </p:sp>
-      <p:sp>
-        <p:nvSpPr>
-          <p:cNvPr id="20" name="Text 13"/>
-          <p:cNvSpPr/>
-          <p:nvPr/>
-        </p:nvSpPr>
-        <p:spPr>
-          <a:xfrm>
-            <a:off x="640080" y="6473952"/>
-            <a:ext cx="5486400" cy="274320"/>
-          </a:xfrm>
-          <a:prstGeom prst="rect">
-            <a:avLst/>
-          </a:prstGeom>
-          <a:noFill/>
-          <a:ln/>
-        </p:spPr>
-        <p:txBody>
-          <a:bodyPr wrap="square" rtlCol="0" anchor="ctr"/>
-          <a:lstStyle/>
-          <a:p>
-            <a:pPr algn="l" indent="0" marL="0">
-              <a:buNone/>
-            </a:pPr>
-            <a:r>
-              <a:rPr lang="en-US" sz="900" dirty="0">
-                <a:solidFill>
-                  <a:srgbClr val="5B6079"/>
-                </a:solidFill>
-                <a:latin typeface="Microsoft JhengHei" pitchFamily="34" charset="0"/>
-                <a:ea typeface="Microsoft JhengHei" pitchFamily="34" charset="-122"/>
-                <a:cs typeface="Microsoft JhengHei" pitchFamily="34" charset="-120"/>
-              </a:rPr>
-              <a:t>Microsoft 365 Copilot Cowork</a:t>
-            </a:r>
-            <a:endParaRPr lang="en-US" sz="900" dirty="0"/>
-          </a:p>
-        </p:txBody>
-      </p:sp>
-      <p:sp>
-        <p:nvSpPr>
-          <p:cNvPr id="21" name="Text 14"/>
-          <p:cNvSpPr/>
-          <p:nvPr/>
-        </p:nvSpPr>
-        <p:spPr>
-          <a:xfrm>
-            <a:off x="11002975" y="6473952"/>
-            <a:ext cx="548640" cy="274320"/>
-          </a:xfrm>
-          <a:prstGeom prst="rect">
-            <a:avLst/>
-          </a:prstGeom>
-          <a:noFill/>
-          <a:ln/>
-        </p:spPr>
-        <p:txBody>
-          <a:bodyPr wrap="square" rtlCol="0" anchor="ctr"/>
-          <a:lstStyle/>
-          <a:p>
-            <a:pPr algn="r" indent="0" marL="0">
-              <a:buNone/>
-            </a:pPr>
-            <a:r>
-              <a:rPr lang="en-US" sz="900" dirty="0">
-                <a:solidFill>
-                  <a:srgbClr val="5B6079"/>
                 </a:solidFill>
                 <a:latin typeface="Microsoft JhengHei" pitchFamily="34" charset="0"/>
                 <a:ea typeface="Microsoft JhengHei" pitchFamily="34" charset="-122"/>
@@ -10248,7 +10337,7 @@
             <a:avLst/>
           </a:prstGeom>
           <a:solidFill>
-            <a:srgbClr val="6366F1"/>
+            <a:srgbClr val="986F0B"/>
           </a:solidFill>
           <a:ln/>
         </p:spPr>
@@ -10280,13 +10369,13 @@
             <a:r>
               <a:rPr lang="en-US" sz="1200" b="1" spc="200" kern="0" dirty="0">
                 <a:solidFill>
-                  <a:srgbClr val="6366F1"/>
-                </a:solidFill>
-                <a:latin typeface="Microsoft JhengHei" pitchFamily="34" charset="0"/>
-                <a:ea typeface="Microsoft JhengHei" pitchFamily="34" charset="-122"/>
-                <a:cs typeface="Microsoft JhengHei" pitchFamily="34" charset="-120"/>
-              </a:rPr>
-              <a:t>MAKE IT YOURS</a:t>
+                  <a:srgbClr val="986F0B"/>
+                </a:solidFill>
+                <a:latin typeface="Microsoft JhengHei" pitchFamily="34" charset="0"/>
+                <a:ea typeface="Microsoft JhengHei" pitchFamily="34" charset="-122"/>
+                <a:cs typeface="Microsoft JhengHei" pitchFamily="34" charset="-120"/>
+              </a:rPr>
+              <a:t>情境 05 · 實機示範</a:t>
             </a:r>
             <a:endParaRPr lang="en-US" sz="1200" dirty="0"/>
           </a:p>
@@ -10325,7 +10414,7 @@
                 <a:ea typeface="Microsoft JhengHei" pitchFamily="34" charset="-122"/>
                 <a:cs typeface="Microsoft JhengHei" pitchFamily="34" charset="-120"/>
               </a:rPr>
-              <a:t>把情境延伸到你的日常</a:t>
+              <a:t>看 Cowork 怎麼做、產出什麼</a:t>
             </a:r>
             <a:endParaRPr lang="en-US" sz="3000" dirty="0"/>
           </a:p>
@@ -10339,8 +10428,8 @@
         </p:nvSpPr>
         <p:spPr>
           <a:xfrm>
-            <a:off x="640080" y="1783080"/>
-            <a:ext cx="10911535" cy="731520"/>
+            <a:off x="585216" y="1773936"/>
+            <a:ext cx="5184648" cy="3433186"/>
           </a:xfrm>
           <a:prstGeom prst="rect">
             <a:avLst/>
@@ -10354,38 +10443,88 @@
             </a:solidFill>
             <a:prstDash val="solid"/>
           </a:ln>
-        </p:spPr>
-      </p:sp>
-      <p:sp>
-        <p:nvSpPr>
-          <p:cNvPr id="6" name="Shape 4"/>
-          <p:cNvSpPr/>
-          <p:nvPr/>
-        </p:nvSpPr>
-        <p:spPr>
-          <a:xfrm>
-            <a:off x="841248" y="1929384"/>
-            <a:ext cx="438912" cy="438912"/>
-          </a:xfrm>
-          <a:prstGeom prst="ellipse">
-            <a:avLst/>
-          </a:prstGeom>
-          <a:solidFill>
-            <a:srgbClr val="A4262C"/>
-          </a:solidFill>
-          <a:ln/>
-        </p:spPr>
-      </p:sp>
-      <p:sp>
-        <p:nvSpPr>
-          <p:cNvPr id="7" name="Shape 5"/>
-          <p:cNvSpPr/>
-          <p:nvPr/>
-        </p:nvSpPr>
-        <p:spPr>
-          <a:xfrm>
-            <a:off x="640080" y="2624328"/>
-            <a:ext cx="10911535" cy="731520"/>
+          <a:effectLst>
+            <a:outerShdw sx="100000" sy="100000" kx="0" ky="0" algn="bl" rotWithShape="0" blurRad="114300" dist="38100" dir="5400000">
+              <a:srgbClr val="8A90B5">
+                <a:alpha val="22000"/>
+              </a:srgbClr>
+            </a:outerShdw>
+          </a:effectLst>
+        </p:spPr>
+      </p:sp>
+      <p:pic>
+        <p:nvPicPr>
+          <p:cNvPr id="6" name="Image 0" descr="C:\temp\CoworkLab\v2\_working\screenshots\mfg5_01_howto.png">    </p:cNvPr>
+          <p:cNvPicPr>
+            <a:picLocks noChangeAspect="1"/>
+          </p:cNvPicPr>
+          <p:nvPr/>
+        </p:nvPicPr>
+        <p:blipFill>
+          <a:blip r:embed="rId1"/>
+          <a:stretch>
+            <a:fillRect/>
+          </a:stretch>
+        </p:blipFill>
+        <p:spPr>
+          <a:xfrm>
+            <a:off x="640080" y="1828800"/>
+            <a:ext cx="5074920" cy="3323458"/>
+          </a:xfrm>
+          <a:prstGeom prst="rect">
+            <a:avLst/>
+          </a:prstGeom>
+        </p:spPr>
+      </p:pic>
+      <p:sp>
+        <p:nvSpPr>
+          <p:cNvPr id="7" name="Text 4"/>
+          <p:cNvSpPr/>
+          <p:nvPr/>
+        </p:nvSpPr>
+        <p:spPr>
+          <a:xfrm>
+            <a:off x="640080" y="5261986"/>
+            <a:ext cx="5074920" cy="320040"/>
+          </a:xfrm>
+          <a:prstGeom prst="rect">
+            <a:avLst/>
+          </a:prstGeom>
+          <a:noFill/>
+          <a:ln/>
+        </p:spPr>
+        <p:txBody>
+          <a:bodyPr wrap="square" rtlCol="0" anchor="ctr"/>
+          <a:lstStyle/>
+          <a:p>
+            <a:pPr algn="ctr" indent="0" marL="0">
+              <a:buNone/>
+            </a:pPr>
+            <a:r>
+              <a:rPr lang="en-US" sz="1350" b="1" dirty="0">
+                <a:solidFill>
+                  <a:srgbClr val="986F0B"/>
+                </a:solidFill>
+                <a:latin typeface="Microsoft JhengHei" pitchFamily="34" charset="0"/>
+                <a:ea typeface="Microsoft JhengHei" pitchFamily="34" charset="-122"/>
+                <a:cs typeface="Microsoft JhengHei" pitchFamily="34" charset="-120"/>
+              </a:rPr>
+              <a:t>① 你的輸入與指令</a:t>
+            </a:r>
+            <a:endParaRPr lang="en-US" sz="1350" dirty="0"/>
+          </a:p>
+        </p:txBody>
+      </p:sp>
+      <p:sp>
+        <p:nvSpPr>
+          <p:cNvPr id="8" name="Shape 5"/>
+          <p:cNvSpPr/>
+          <p:nvPr/>
+        </p:nvSpPr>
+        <p:spPr>
+          <a:xfrm>
+            <a:off x="6163056" y="1773936"/>
+            <a:ext cx="5184648" cy="3433186"/>
           </a:xfrm>
           <a:prstGeom prst="rect">
             <a:avLst/>
@@ -10399,38 +10538,88 @@
             </a:solidFill>
             <a:prstDash val="solid"/>
           </a:ln>
-        </p:spPr>
-      </p:sp>
-      <p:sp>
-        <p:nvSpPr>
-          <p:cNvPr id="8" name="Shape 6"/>
-          <p:cNvSpPr/>
-          <p:nvPr/>
-        </p:nvSpPr>
-        <p:spPr>
-          <a:xfrm>
-            <a:off x="841248" y="2770632"/>
-            <a:ext cx="438912" cy="438912"/>
-          </a:xfrm>
-          <a:prstGeom prst="ellipse">
-            <a:avLst/>
-          </a:prstGeom>
-          <a:solidFill>
-            <a:srgbClr val="C15317"/>
-          </a:solidFill>
-          <a:ln/>
-        </p:spPr>
-      </p:sp>
-      <p:sp>
-        <p:nvSpPr>
-          <p:cNvPr id="9" name="Shape 7"/>
-          <p:cNvSpPr/>
-          <p:nvPr/>
-        </p:nvSpPr>
-        <p:spPr>
-          <a:xfrm>
-            <a:off x="640080" y="3465576"/>
-            <a:ext cx="10911535" cy="731520"/>
+          <a:effectLst>
+            <a:outerShdw sx="100000" sy="100000" kx="0" ky="0" algn="bl" rotWithShape="0" blurRad="114300" dist="38100" dir="5400000">
+              <a:srgbClr val="8A90B5">
+                <a:alpha val="22000"/>
+              </a:srgbClr>
+            </a:outerShdw>
+          </a:effectLst>
+        </p:spPr>
+      </p:sp>
+      <p:pic>
+        <p:nvPicPr>
+          <p:cNvPr id="9" name="Image 1" descr="C:\temp\CoworkLab\v2\_working\screenshots\mfg5_04_share.png">    </p:cNvPr>
+          <p:cNvPicPr>
+            <a:picLocks noChangeAspect="1"/>
+          </p:cNvPicPr>
+          <p:nvPr/>
+        </p:nvPicPr>
+        <p:blipFill>
+          <a:blip r:embed="rId2"/>
+          <a:stretch>
+            <a:fillRect/>
+          </a:stretch>
+        </p:blipFill>
+        <p:spPr>
+          <a:xfrm>
+            <a:off x="6217920" y="1828800"/>
+            <a:ext cx="5074920" cy="3323458"/>
+          </a:xfrm>
+          <a:prstGeom prst="rect">
+            <a:avLst/>
+          </a:prstGeom>
+        </p:spPr>
+      </p:pic>
+      <p:sp>
+        <p:nvSpPr>
+          <p:cNvPr id="10" name="Text 6"/>
+          <p:cNvSpPr/>
+          <p:nvPr/>
+        </p:nvSpPr>
+        <p:spPr>
+          <a:xfrm>
+            <a:off x="6217920" y="5261986"/>
+            <a:ext cx="5074920" cy="320040"/>
+          </a:xfrm>
+          <a:prstGeom prst="rect">
+            <a:avLst/>
+          </a:prstGeom>
+          <a:noFill/>
+          <a:ln/>
+        </p:spPr>
+        <p:txBody>
+          <a:bodyPr wrap="square" rtlCol="0" anchor="ctr"/>
+          <a:lstStyle/>
+          <a:p>
+            <a:pPr algn="ctr" indent="0" marL="0">
+              <a:buNone/>
+            </a:pPr>
+            <a:r>
+              <a:rPr lang="en-US" sz="1350" b="1" dirty="0">
+                <a:solidFill>
+                  <a:srgbClr val="986F0B"/>
+                </a:solidFill>
+                <a:latin typeface="Microsoft JhengHei" pitchFamily="34" charset="0"/>
+                <a:ea typeface="Microsoft JhengHei" pitchFamily="34" charset="-122"/>
+                <a:cs typeface="Microsoft JhengHei" pitchFamily="34" charset="-120"/>
+              </a:rPr>
+              <a:t>② 產出成果</a:t>
+            </a:r>
+            <a:endParaRPr lang="en-US" sz="1350" dirty="0"/>
+          </a:p>
+        </p:txBody>
+      </p:sp>
+      <p:sp>
+        <p:nvSpPr>
+          <p:cNvPr id="11" name="Shape 7"/>
+          <p:cNvSpPr/>
+          <p:nvPr/>
+        </p:nvSpPr>
+        <p:spPr>
+          <a:xfrm>
+            <a:off x="640080" y="5074920"/>
+            <a:ext cx="10911535" cy="1143000"/>
           </a:xfrm>
           <a:prstGeom prst="rect">
             <a:avLst/>
@@ -10448,106 +10637,16 @@
       </p:sp>
       <p:sp>
         <p:nvSpPr>
-          <p:cNvPr id="10" name="Shape 8"/>
-          <p:cNvSpPr/>
-          <p:nvPr/>
-        </p:nvSpPr>
-        <p:spPr>
-          <a:xfrm>
-            <a:off x="841248" y="3611880"/>
-            <a:ext cx="438912" cy="438912"/>
-          </a:xfrm>
-          <a:prstGeom prst="ellipse">
-            <a:avLst/>
-          </a:prstGeom>
-          <a:solidFill>
-            <a:srgbClr val="0E7C86"/>
-          </a:solidFill>
-          <a:ln/>
-        </p:spPr>
-      </p:sp>
-      <p:sp>
-        <p:nvSpPr>
-          <p:cNvPr id="11" name="Shape 9"/>
-          <p:cNvSpPr/>
-          <p:nvPr/>
-        </p:nvSpPr>
-        <p:spPr>
-          <a:xfrm>
-            <a:off x="640080" y="4306824"/>
-            <a:ext cx="10911535" cy="731520"/>
-          </a:xfrm>
-          <a:prstGeom prst="rect">
-            <a:avLst/>
-          </a:prstGeom>
-          <a:solidFill>
-            <a:srgbClr val="FFFFFF"/>
-          </a:solidFill>
-          <a:ln w="12700">
-            <a:solidFill>
-              <a:srgbClr val="E4E7F2"/>
-            </a:solidFill>
-            <a:prstDash val="solid"/>
-          </a:ln>
-        </p:spPr>
-      </p:sp>
-      <p:sp>
-        <p:nvSpPr>
-          <p:cNvPr id="12" name="Shape 10"/>
-          <p:cNvSpPr/>
-          <p:nvPr/>
-        </p:nvSpPr>
-        <p:spPr>
-          <a:xfrm>
-            <a:off x="841248" y="4453128"/>
-            <a:ext cx="438912" cy="438912"/>
-          </a:xfrm>
-          <a:prstGeom prst="ellipse">
-            <a:avLst/>
-          </a:prstGeom>
-          <a:solidFill>
-            <a:srgbClr val="5C2D91"/>
-          </a:solidFill>
-          <a:ln/>
-        </p:spPr>
-      </p:sp>
-      <p:sp>
-        <p:nvSpPr>
-          <p:cNvPr id="13" name="Shape 11"/>
-          <p:cNvSpPr/>
-          <p:nvPr/>
-        </p:nvSpPr>
-        <p:spPr>
-          <a:xfrm>
-            <a:off x="640080" y="5148072"/>
-            <a:ext cx="10911535" cy="731520"/>
-          </a:xfrm>
-          <a:prstGeom prst="rect">
-            <a:avLst/>
-          </a:prstGeom>
-          <a:solidFill>
-            <a:srgbClr val="FFFFFF"/>
-          </a:solidFill>
-          <a:ln w="12700">
-            <a:solidFill>
-              <a:srgbClr val="E4E7F2"/>
-            </a:solidFill>
-            <a:prstDash val="solid"/>
-          </a:ln>
-        </p:spPr>
-      </p:sp>
-      <p:sp>
-        <p:nvSpPr>
-          <p:cNvPr id="14" name="Shape 12"/>
-          <p:cNvSpPr/>
-          <p:nvPr/>
-        </p:nvSpPr>
-        <p:spPr>
-          <a:xfrm>
-            <a:off x="841248" y="5294376"/>
-            <a:ext cx="438912" cy="438912"/>
-          </a:xfrm>
-          <a:prstGeom prst="ellipse">
+          <p:cNvPr id="12" name="Shape 8"/>
+          <p:cNvSpPr/>
+          <p:nvPr/>
+        </p:nvSpPr>
+        <p:spPr>
+          <a:xfrm>
+            <a:off x="640080" y="5074920"/>
+            <a:ext cx="91440" cy="1143000"/>
+          </a:xfrm>
+          <a:prstGeom prst="rect">
             <a:avLst/>
           </a:prstGeom>
           <a:solidFill>
@@ -10556,219 +10655,48 @@
           <a:ln/>
         </p:spPr>
       </p:sp>
+      <p:sp>
+        <p:nvSpPr>
+          <p:cNvPr id="13" name="Text 9"/>
+          <p:cNvSpPr/>
+          <p:nvPr/>
+        </p:nvSpPr>
+        <p:spPr>
+          <a:xfrm>
+            <a:off x="914400" y="5184648"/>
+            <a:ext cx="1828800" cy="320040"/>
+          </a:xfrm>
+          <a:prstGeom prst="rect">
+            <a:avLst/>
+          </a:prstGeom>
+          <a:noFill/>
+          <a:ln/>
+        </p:spPr>
+        <p:txBody>
+          <a:bodyPr wrap="square" rtlCol="0" anchor="ctr"/>
+          <a:lstStyle/>
+          <a:p>
+            <a:pPr indent="0" marL="0">
+              <a:buNone/>
+            </a:pPr>
+            <a:r>
+              <a:rPr lang="en-US" sz="1400" b="1" dirty="0">
+                <a:solidFill>
+                  <a:srgbClr val="1E2235"/>
+                </a:solidFill>
+                <a:latin typeface="Microsoft JhengHei" pitchFamily="34" charset="0"/>
+                <a:ea typeface="Microsoft JhengHei" pitchFamily="34" charset="-122"/>
+                <a:cs typeface="Microsoft JhengHei" pitchFamily="34" charset="-120"/>
+              </a:rPr>
+              <a:t>產出驗收</a:t>
+            </a:r>
+            <a:endParaRPr lang="en-US" sz="1400" dirty="0"/>
+          </a:p>
+        </p:txBody>
+      </p:sp>
       <p:pic>
         <p:nvPicPr>
-          <p:cNvPr id="15" name="Image 0" descr="preencoded.png">    </p:cNvPr>
-          <p:cNvPicPr>
-            <a:picLocks noChangeAspect="1"/>
-          </p:cNvPicPr>
-          <p:nvPr/>
-        </p:nvPicPr>
-        <p:blipFill>
-          <a:blip r:embed="rId1"/>
-          <a:stretch>
-            <a:fillRect/>
-          </a:stretch>
-        </p:blipFill>
-        <p:spPr>
-          <a:xfrm>
-            <a:off x="950976" y="2039112"/>
-            <a:ext cx="219456" cy="219456"/>
-          </a:xfrm>
-          <a:prstGeom prst="rect">
-            <a:avLst/>
-          </a:prstGeom>
-        </p:spPr>
-      </p:pic>
-      <p:sp>
-        <p:nvSpPr>
-          <p:cNvPr id="16" name="Text 13"/>
-          <p:cNvSpPr/>
-          <p:nvPr/>
-        </p:nvSpPr>
-        <p:spPr>
-          <a:xfrm>
-            <a:off x="1417320" y="1819656"/>
-            <a:ext cx="2182307" cy="658368"/>
-          </a:xfrm>
-          <a:prstGeom prst="rect">
-            <a:avLst/>
-          </a:prstGeom>
-          <a:noFill/>
-          <a:ln/>
-        </p:spPr>
-        <p:txBody>
-          <a:bodyPr wrap="square" rtlCol="0" anchor="ctr"/>
-          <a:lstStyle/>
-          <a:p>
-            <a:pPr indent="0" marL="0">
-              <a:buNone/>
-            </a:pPr>
-            <a:r>
-              <a:rPr lang="en-US" sz="1400" b="1" dirty="0">
-                <a:solidFill>
-                  <a:srgbClr val="A4262C"/>
-                </a:solidFill>
-                <a:latin typeface="Microsoft JhengHei" pitchFamily="34" charset="0"/>
-                <a:ea typeface="Microsoft JhengHei" pitchFamily="34" charset="-122"/>
-                <a:cs typeface="Microsoft JhengHei" pitchFamily="34" charset="-120"/>
-              </a:rPr>
-              <a:t>製造業 · 生產</a:t>
-            </a:r>
-            <a:endParaRPr lang="en-US" sz="1400" dirty="0"/>
-          </a:p>
-        </p:txBody>
-      </p:sp>
-      <p:sp>
-        <p:nvSpPr>
-          <p:cNvPr id="17" name="Text 14"/>
-          <p:cNvSpPr/>
-          <p:nvPr/>
-        </p:nvSpPr>
-        <p:spPr>
-          <a:xfrm>
-            <a:off x="3586195" y="1819656"/>
-            <a:ext cx="7747190" cy="658368"/>
-          </a:xfrm>
-          <a:prstGeom prst="rect">
-            <a:avLst/>
-          </a:prstGeom>
-          <a:noFill/>
-          <a:ln/>
-        </p:spPr>
-        <p:txBody>
-          <a:bodyPr wrap="square" rtlCol="0" anchor="ctr"/>
-          <a:lstStyle/>
-          <a:p>
-            <a:pPr indent="0" marL="0">
-              <a:lnSpc>
-                <a:spcPct val="108000"/>
-              </a:lnSpc>
-              <a:buNone/>
-            </a:pPr>
-            <a:r>
-              <a:rPr lang="en-US" sz="1350" dirty="0">
-                <a:solidFill>
-                  <a:srgbClr val="1E2235"/>
-                </a:solidFill>
-                <a:latin typeface="Microsoft JhengHei" pitchFamily="34" charset="0"/>
-                <a:ea typeface="Microsoft JhengHei" pitchFamily="34" charset="-122"/>
-                <a:cs typeface="Microsoft JhengHei" pitchFamily="34" charset="-120"/>
-              </a:rPr>
-              <a:t>💡 換成你自己產線的日誌格式與門檻值，一樣適用。</a:t>
-            </a:r>
-            <a:endParaRPr lang="en-US" sz="1350" dirty="0"/>
-          </a:p>
-        </p:txBody>
-      </p:sp>
-      <p:pic>
-        <p:nvPicPr>
-          <p:cNvPr id="18" name="Image 1" descr="preencoded.png">    </p:cNvPr>
-          <p:cNvPicPr>
-            <a:picLocks noChangeAspect="1"/>
-          </p:cNvPicPr>
-          <p:nvPr/>
-        </p:nvPicPr>
-        <p:blipFill>
-          <a:blip r:embed="rId2"/>
-          <a:stretch>
-            <a:fillRect/>
-          </a:stretch>
-        </p:blipFill>
-        <p:spPr>
-          <a:xfrm>
-            <a:off x="950976" y="2880360"/>
-            <a:ext cx="219456" cy="219456"/>
-          </a:xfrm>
-          <a:prstGeom prst="rect">
-            <a:avLst/>
-          </a:prstGeom>
-        </p:spPr>
-      </p:pic>
-      <p:sp>
-        <p:nvSpPr>
-          <p:cNvPr id="19" name="Text 15"/>
-          <p:cNvSpPr/>
-          <p:nvPr/>
-        </p:nvSpPr>
-        <p:spPr>
-          <a:xfrm>
-            <a:off x="1417320" y="2660904"/>
-            <a:ext cx="2182307" cy="658368"/>
-          </a:xfrm>
-          <a:prstGeom prst="rect">
-            <a:avLst/>
-          </a:prstGeom>
-          <a:noFill/>
-          <a:ln/>
-        </p:spPr>
-        <p:txBody>
-          <a:bodyPr wrap="square" rtlCol="0" anchor="ctr"/>
-          <a:lstStyle/>
-          <a:p>
-            <a:pPr indent="0" marL="0">
-              <a:buNone/>
-            </a:pPr>
-            <a:r>
-              <a:rPr lang="en-US" sz="1400" b="1" dirty="0">
-                <a:solidFill>
-                  <a:srgbClr val="C15317"/>
-                </a:solidFill>
-                <a:latin typeface="Microsoft JhengHei" pitchFamily="34" charset="0"/>
-                <a:ea typeface="Microsoft JhengHei" pitchFamily="34" charset="-122"/>
-                <a:cs typeface="Microsoft JhengHei" pitchFamily="34" charset="-120"/>
-              </a:rPr>
-              <a:t>製造業 · 設備</a:t>
-            </a:r>
-            <a:endParaRPr lang="en-US" sz="1400" dirty="0"/>
-          </a:p>
-        </p:txBody>
-      </p:sp>
-      <p:sp>
-        <p:nvSpPr>
-          <p:cNvPr id="20" name="Text 16"/>
-          <p:cNvSpPr/>
-          <p:nvPr/>
-        </p:nvSpPr>
-        <p:spPr>
-          <a:xfrm>
-            <a:off x="3586195" y="2660904"/>
-            <a:ext cx="7747190" cy="658368"/>
-          </a:xfrm>
-          <a:prstGeom prst="rect">
-            <a:avLst/>
-          </a:prstGeom>
-          <a:noFill/>
-          <a:ln/>
-        </p:spPr>
-        <p:txBody>
-          <a:bodyPr wrap="square" rtlCol="0" anchor="ctr"/>
-          <a:lstStyle/>
-          <a:p>
-            <a:pPr indent="0" marL="0">
-              <a:lnSpc>
-                <a:spcPct val="108000"/>
-              </a:lnSpc>
-              <a:buNone/>
-            </a:pPr>
-            <a:r>
-              <a:rPr lang="en-US" sz="1350" dirty="0">
-                <a:solidFill>
-                  <a:srgbClr val="1E2235"/>
-                </a:solidFill>
-                <a:latin typeface="Microsoft JhengHei" pitchFamily="34" charset="0"/>
-                <a:ea typeface="Microsoft JhengHei" pitchFamily="34" charset="-122"/>
-                <a:cs typeface="Microsoft JhengHei" pitchFamily="34" charset="-120"/>
-              </a:rPr>
-              <a:t>💡 換成你自己產線真實的設備異常與聯絡人，一樣可以用。</a:t>
-            </a:r>
-            <a:endParaRPr lang="en-US" sz="1350" dirty="0"/>
-          </a:p>
-        </p:txBody>
-      </p:sp>
-      <p:pic>
-        <p:nvPicPr>
-          <p:cNvPr id="21" name="Image 2" descr="preencoded.png">    </p:cNvPr>
+          <p:cNvPr id="14" name="Image 2" descr="preencoded.png">    </p:cNvPr>
           <p:cNvPicPr>
             <a:picLocks noChangeAspect="1"/>
           </p:cNvPicPr>
@@ -10782,8 +10710,8 @@
         </p:blipFill>
         <p:spPr>
           <a:xfrm>
-            <a:off x="950976" y="3721608"/>
-            <a:ext cx="219456" cy="219456"/>
+            <a:off x="2834640" y="5221224"/>
+            <a:ext cx="182880" cy="182880"/>
           </a:xfrm>
           <a:prstGeom prst="rect">
             <a:avLst/>
@@ -10792,14 +10720,14 @@
       </p:pic>
       <p:sp>
         <p:nvSpPr>
-          <p:cNvPr id="22" name="Text 17"/>
-          <p:cNvSpPr/>
-          <p:nvPr/>
-        </p:nvSpPr>
-        <p:spPr>
-          <a:xfrm>
-            <a:off x="1417320" y="3502152"/>
-            <a:ext cx="2182307" cy="658368"/>
+          <p:cNvPr id="15" name="Text 10"/>
+          <p:cNvSpPr/>
+          <p:nvPr/>
+        </p:nvSpPr>
+        <p:spPr>
+          <a:xfrm>
+            <a:off x="3108960" y="5166360"/>
+            <a:ext cx="8168335" cy="310896"/>
           </a:xfrm>
           <a:prstGeom prst="rect">
             <a:avLst/>
@@ -10815,49 +10743,7 @@
               <a:buNone/>
             </a:pPr>
             <a:r>
-              <a:rPr lang="en-US" sz="1400" b="1" dirty="0">
-                <a:solidFill>
-                  <a:srgbClr val="0E7C86"/>
-                </a:solidFill>
-                <a:latin typeface="Microsoft JhengHei" pitchFamily="34" charset="0"/>
-                <a:ea typeface="Microsoft JhengHei" pitchFamily="34" charset="-122"/>
-                <a:cs typeface="Microsoft JhengHei" pitchFamily="34" charset="-120"/>
-              </a:rPr>
-              <a:t>製造業 · 品質</a:t>
-            </a:r>
-            <a:endParaRPr lang="en-US" sz="1400" dirty="0"/>
-          </a:p>
-        </p:txBody>
-      </p:sp>
-      <p:sp>
-        <p:nvSpPr>
-          <p:cNvPr id="23" name="Text 18"/>
-          <p:cNvSpPr/>
-          <p:nvPr/>
-        </p:nvSpPr>
-        <p:spPr>
-          <a:xfrm>
-            <a:off x="3586195" y="3502152"/>
-            <a:ext cx="7747190" cy="658368"/>
-          </a:xfrm>
-          <a:prstGeom prst="rect">
-            <a:avLst/>
-          </a:prstGeom>
-          <a:noFill/>
-          <a:ln/>
-        </p:spPr>
-        <p:txBody>
-          <a:bodyPr wrap="square" rtlCol="0" anchor="ctr"/>
-          <a:lstStyle/>
-          <a:p>
-            <a:pPr indent="0" marL="0">
-              <a:lnSpc>
-                <a:spcPct val="108000"/>
-              </a:lnSpc>
-              <a:buNone/>
-            </a:pPr>
-            <a:r>
-              <a:rPr lang="en-US" sz="1350" dirty="0">
+              <a:rPr lang="en-US" sz="1300" dirty="0">
                 <a:solidFill>
                   <a:srgbClr val="1E2235"/>
                 </a:solidFill>
@@ -10865,15 +10751,15 @@
                 <a:ea typeface="Microsoft JhengHei" pitchFamily="34" charset="-122"/>
                 <a:cs typeface="Microsoft JhengHei" pitchFamily="34" charset="-120"/>
               </a:rPr>
-              <a:t>💡 換成你自己的進料或製程檢驗數據，一樣適用。</a:t>
-            </a:r>
-            <a:endParaRPr lang="en-US" sz="1350" dirty="0"/>
+              <a:t>〔操作〕weekly-output-report 技能已建立，且規則包含四個固定段落與防護欄</a:t>
+            </a:r>
+            <a:endParaRPr lang="en-US" sz="1300" dirty="0"/>
           </a:p>
         </p:txBody>
       </p:sp>
       <p:pic>
         <p:nvPicPr>
-          <p:cNvPr id="24" name="Image 3" descr="preencoded.png">    </p:cNvPr>
+          <p:cNvPr id="16" name="Image 3" descr="preencoded.png">    </p:cNvPr>
           <p:cNvPicPr>
             <a:picLocks noChangeAspect="1"/>
           </p:cNvPicPr>
@@ -10887,8 +10773,8 @@
         </p:blipFill>
         <p:spPr>
           <a:xfrm>
-            <a:off x="950976" y="4562856"/>
-            <a:ext cx="219456" cy="219456"/>
+            <a:off x="2834640" y="5559552"/>
+            <a:ext cx="182880" cy="182880"/>
           </a:xfrm>
           <a:prstGeom prst="rect">
             <a:avLst/>
@@ -10897,14 +10783,14 @@
       </p:pic>
       <p:sp>
         <p:nvSpPr>
-          <p:cNvPr id="25" name="Text 19"/>
-          <p:cNvSpPr/>
-          <p:nvPr/>
-        </p:nvSpPr>
-        <p:spPr>
-          <a:xfrm>
-            <a:off x="1417320" y="4343400"/>
-            <a:ext cx="2182307" cy="658368"/>
+          <p:cNvPr id="17" name="Text 11"/>
+          <p:cNvSpPr/>
+          <p:nvPr/>
+        </p:nvSpPr>
+        <p:spPr>
+          <a:xfrm>
+            <a:off x="3108960" y="5504688"/>
+            <a:ext cx="8168335" cy="310896"/>
           </a:xfrm>
           <a:prstGeom prst="rect">
             <a:avLst/>
@@ -10920,49 +10806,7 @@
               <a:buNone/>
             </a:pPr>
             <a:r>
-              <a:rPr lang="en-US" sz="1400" b="1" dirty="0">
-                <a:solidFill>
-                  <a:srgbClr val="5C2D91"/>
-                </a:solidFill>
-                <a:latin typeface="Microsoft JhengHei" pitchFamily="34" charset="0"/>
-                <a:ea typeface="Microsoft JhengHei" pitchFamily="34" charset="-122"/>
-                <a:cs typeface="Microsoft JhengHei" pitchFamily="34" charset="-120"/>
-              </a:rPr>
-              <a:t>製造業 · 供應商管理</a:t>
-            </a:r>
-            <a:endParaRPr lang="en-US" sz="1400" dirty="0"/>
-          </a:p>
-        </p:txBody>
-      </p:sp>
-      <p:sp>
-        <p:nvSpPr>
-          <p:cNvPr id="26" name="Text 20"/>
-          <p:cNvSpPr/>
-          <p:nvPr/>
-        </p:nvSpPr>
-        <p:spPr>
-          <a:xfrm>
-            <a:off x="3586195" y="4343400"/>
-            <a:ext cx="7747190" cy="658368"/>
-          </a:xfrm>
-          <a:prstGeom prst="rect">
-            <a:avLst/>
-          </a:prstGeom>
-          <a:noFill/>
-          <a:ln/>
-        </p:spPr>
-        <p:txBody>
-          <a:bodyPr wrap="square" rtlCol="0" anchor="ctr"/>
-          <a:lstStyle/>
-          <a:p>
-            <a:pPr indent="0" marL="0">
-              <a:lnSpc>
-                <a:spcPct val="108000"/>
-              </a:lnSpc>
-              <a:buNone/>
-            </a:pPr>
-            <a:r>
-              <a:rPr lang="en-US" sz="1350" dirty="0">
+              <a:rPr lang="en-US" sz="1300" dirty="0">
                 <a:solidFill>
                   <a:srgbClr val="1E2235"/>
                 </a:solidFill>
@@ -10970,15 +10814,15 @@
                 <a:ea typeface="Microsoft JhengHei" pitchFamily="34" charset="-122"/>
                 <a:cs typeface="Microsoft JhengHei" pitchFamily="34" charset="-120"/>
               </a:rPr>
-              <a:t>💡 換成你自己的供應商稽核清單 PDF，一樣適用。</a:t>
-            </a:r>
-            <a:endParaRPr lang="en-US" sz="1350" dirty="0"/>
+              <a:t>〔操作〕新工作階段能用一句話觸發技能，不必重述規則</a:t>
+            </a:r>
+            <a:endParaRPr lang="en-US" sz="1300" dirty="0"/>
           </a:p>
         </p:txBody>
       </p:sp>
       <p:pic>
         <p:nvPicPr>
-          <p:cNvPr id="27" name="Image 4" descr="preencoded.png">    </p:cNvPr>
+          <p:cNvPr id="18" name="Image 4" descr="preencoded.png">    </p:cNvPr>
           <p:cNvPicPr>
             <a:picLocks noChangeAspect="1"/>
           </p:cNvPicPr>
@@ -10992,8 +10836,8 @@
         </p:blipFill>
         <p:spPr>
           <a:xfrm>
-            <a:off x="950976" y="5404104"/>
-            <a:ext cx="219456" cy="219456"/>
+            <a:off x="2834640" y="5897880"/>
+            <a:ext cx="182880" cy="182880"/>
           </a:xfrm>
           <a:prstGeom prst="rect">
             <a:avLst/>
@@ -11002,14 +10846,14 @@
       </p:pic>
       <p:sp>
         <p:nvSpPr>
-          <p:cNvPr id="28" name="Text 21"/>
-          <p:cNvSpPr/>
-          <p:nvPr/>
-        </p:nvSpPr>
-        <p:spPr>
-          <a:xfrm>
-            <a:off x="1417320" y="5184648"/>
-            <a:ext cx="2182307" cy="658368"/>
+          <p:cNvPr id="19" name="Text 12"/>
+          <p:cNvSpPr/>
+          <p:nvPr/>
+        </p:nvSpPr>
+        <p:spPr>
+          <a:xfrm>
+            <a:off x="3108960" y="5843016"/>
+            <a:ext cx="8168335" cy="310896"/>
           </a:xfrm>
           <a:prstGeom prst="rect">
             <a:avLst/>
@@ -11025,49 +10869,7 @@
               <a:buNone/>
             </a:pPr>
             <a:r>
-              <a:rPr lang="en-US" sz="1400" b="1" dirty="0">
-                <a:solidFill>
-                  <a:srgbClr val="986F0B"/>
-                </a:solidFill>
-                <a:latin typeface="Microsoft JhengHei" pitchFamily="34" charset="0"/>
-                <a:ea typeface="Microsoft JhengHei" pitchFamily="34" charset="-122"/>
-                <a:cs typeface="Microsoft JhengHei" pitchFamily="34" charset="-120"/>
-              </a:rPr>
-              <a:t>製造業 · 自動化</a:t>
-            </a:r>
-            <a:endParaRPr lang="en-US" sz="1400" dirty="0"/>
-          </a:p>
-        </p:txBody>
-      </p:sp>
-      <p:sp>
-        <p:nvSpPr>
-          <p:cNvPr id="29" name="Text 22"/>
-          <p:cNvSpPr/>
-          <p:nvPr/>
-        </p:nvSpPr>
-        <p:spPr>
-          <a:xfrm>
-            <a:off x="3586195" y="5184648"/>
-            <a:ext cx="7747190" cy="658368"/>
-          </a:xfrm>
-          <a:prstGeom prst="rect">
-            <a:avLst/>
-          </a:prstGeom>
-          <a:noFill/>
-          <a:ln/>
-        </p:spPr>
-        <p:txBody>
-          <a:bodyPr wrap="square" rtlCol="0" anchor="ctr"/>
-          <a:lstStyle/>
-          <a:p>
-            <a:pPr indent="0" marL="0">
-              <a:lnSpc>
-                <a:spcPct val="108000"/>
-              </a:lnSpc>
-              <a:buNone/>
-            </a:pPr>
-            <a:r>
-              <a:rPr lang="en-US" sz="1350" dirty="0">
+              <a:rPr lang="en-US" sz="1300" dirty="0">
                 <a:solidFill>
                   <a:srgbClr val="1E2235"/>
                 </a:solidFill>
@@ -11075,15 +10877,15 @@
                 <a:ea typeface="Microsoft JhengHei" pitchFamily="34" charset="-122"/>
                 <a:cs typeface="Microsoft JhengHei" pitchFamily="34" charset="-120"/>
               </a:rPr>
-              <a:t>💡 換成你自己產線的原始數據格式與目標值，一樣適用。</a:t>
-            </a:r>
-            <a:endParaRPr lang="en-US" sz="1350" dirty="0"/>
-          </a:p>
-        </p:txBody>
-      </p:sp>
-      <p:sp>
-        <p:nvSpPr>
-          <p:cNvPr id="30" name="Text 23"/>
+              <a:t>〔判斷〕產出的週報數字與原始數據一致，未達標項目有被明確標示</a:t>
+            </a:r>
+            <a:endParaRPr lang="en-US" sz="1300" dirty="0"/>
+          </a:p>
+        </p:txBody>
+      </p:sp>
+      <p:sp>
+        <p:nvSpPr>
+          <p:cNvPr id="20" name="Text 13"/>
           <p:cNvSpPr/>
           <p:nvPr/>
         </p:nvSpPr>
@@ -11122,7 +10924,7 @@
       </p:sp>
       <p:sp>
         <p:nvSpPr>
-          <p:cNvPr id="31" name="Text 24"/>
+          <p:cNvPr id="21" name="Text 14"/>
           <p:cNvSpPr/>
           <p:nvPr/>
         </p:nvSpPr>
@@ -11172,16 +10974,9 @@
   <p:cSld name="Slide 19">
     <p:bg>
       <p:bgPr>
-        <a:blipFill dpi="0" rotWithShape="1">
-          <a:blip r:embed="rId1">
-            <a:lum/>
-          </a:blip>
-          <a:srcRect/>
-          <a:stretch>
-            <a:fillRect/>
-          </a:stretch>
-        </a:blipFill>
-        <a:effectLst/>
+        <a:solidFill>
+          <a:srgbClr val="F7F8FC"/>
+        </a:solidFill>
       </p:bgPr>
     </p:bg>
     <p:spTree>
@@ -11213,7 +11008,7 @@
             <a:avLst/>
           </a:prstGeom>
           <a:solidFill>
-            <a:srgbClr val="22D3EE"/>
+            <a:srgbClr val="6366F1"/>
           </a:solidFill>
           <a:ln/>
         </p:spPr>
@@ -11245,13 +11040,13 @@
             <a:r>
               <a:rPr lang="en-US" sz="1200" b="1" spc="200" kern="0" dirty="0">
                 <a:solidFill>
-                  <a:srgbClr val="22D3EE"/>
-                </a:solidFill>
-                <a:latin typeface="Microsoft JhengHei" pitchFamily="34" charset="0"/>
-                <a:ea typeface="Microsoft JhengHei" pitchFamily="34" charset="-122"/>
-                <a:cs typeface="Microsoft JhengHei" pitchFamily="34" charset="-120"/>
-              </a:rPr>
-              <a:t>TRUST &amp; CONTROL</a:t>
+                  <a:srgbClr val="6366F1"/>
+                </a:solidFill>
+                <a:latin typeface="Microsoft JhengHei" pitchFamily="34" charset="0"/>
+                <a:ea typeface="Microsoft JhengHei" pitchFamily="34" charset="-122"/>
+                <a:cs typeface="Microsoft JhengHei" pitchFamily="34" charset="-120"/>
+              </a:rPr>
+              <a:t>MAKE IT YOURS</a:t>
             </a:r>
             <a:endParaRPr lang="en-US" sz="1200" dirty="0"/>
           </a:p>
@@ -11284,13 +11079,13 @@
             <a:r>
               <a:rPr lang="en-US" sz="3000" b="1" dirty="0">
                 <a:solidFill>
-                  <a:srgbClr val="FFFFFF"/>
-                </a:solidFill>
-                <a:latin typeface="Microsoft JhengHei" pitchFamily="34" charset="0"/>
-                <a:ea typeface="Microsoft JhengHei" pitchFamily="34" charset="-122"/>
-                <a:cs typeface="Microsoft JhengHei" pitchFamily="34" charset="-120"/>
-              </a:rPr>
-              <a:t>自動化，但你始終是決策者</a:t>
+                  <a:srgbClr val="1E2235"/>
+                </a:solidFill>
+                <a:latin typeface="Microsoft JhengHei" pitchFamily="34" charset="0"/>
+                <a:ea typeface="Microsoft JhengHei" pitchFamily="34" charset="-122"/>
+                <a:cs typeface="Microsoft JhengHei" pitchFamily="34" charset="-120"/>
+              </a:rPr>
+              <a:t>把情境延伸到你的日常</a:t>
             </a:r>
             <a:endParaRPr lang="en-US" sz="3000" dirty="0"/>
           </a:p>
@@ -11304,32 +11099,331 @@
         </p:nvSpPr>
         <p:spPr>
           <a:xfrm>
-            <a:off x="640080" y="1874520"/>
-            <a:ext cx="777240" cy="777240"/>
-          </a:xfrm>
-          <a:prstGeom prst="roundRect">
-            <a:avLst>
-              <a:gd name="adj" fmla="val 18824"/>
-            </a:avLst>
+            <a:off x="640080" y="1783080"/>
+            <a:ext cx="10911535" cy="731520"/>
+          </a:xfrm>
+          <a:prstGeom prst="rect">
+            <a:avLst/>
           </a:prstGeom>
           <a:solidFill>
-            <a:srgbClr val="FFFFFF">
-              <a:alpha val="14000"/>
-            </a:srgbClr>
+            <a:srgbClr val="FFFFFF"/>
           </a:solidFill>
           <a:ln w="12700">
             <a:solidFill>
-              <a:srgbClr val="22D3EE">
-                <a:alpha val="60000"/>
-              </a:srgbClr>
+              <a:srgbClr val="E4E7F2"/>
             </a:solidFill>
             <a:prstDash val="solid"/>
           </a:ln>
         </p:spPr>
       </p:sp>
+      <p:sp>
+        <p:nvSpPr>
+          <p:cNvPr id="6" name="Shape 4"/>
+          <p:cNvSpPr/>
+          <p:nvPr/>
+        </p:nvSpPr>
+        <p:spPr>
+          <a:xfrm>
+            <a:off x="841248" y="1929384"/>
+            <a:ext cx="438912" cy="438912"/>
+          </a:xfrm>
+          <a:prstGeom prst="ellipse">
+            <a:avLst/>
+          </a:prstGeom>
+          <a:solidFill>
+            <a:srgbClr val="A4262C"/>
+          </a:solidFill>
+          <a:ln/>
+        </p:spPr>
+      </p:sp>
+      <p:sp>
+        <p:nvSpPr>
+          <p:cNvPr id="7" name="Shape 5"/>
+          <p:cNvSpPr/>
+          <p:nvPr/>
+        </p:nvSpPr>
+        <p:spPr>
+          <a:xfrm>
+            <a:off x="640080" y="2624328"/>
+            <a:ext cx="10911535" cy="731520"/>
+          </a:xfrm>
+          <a:prstGeom prst="rect">
+            <a:avLst/>
+          </a:prstGeom>
+          <a:solidFill>
+            <a:srgbClr val="FFFFFF"/>
+          </a:solidFill>
+          <a:ln w="12700">
+            <a:solidFill>
+              <a:srgbClr val="E4E7F2"/>
+            </a:solidFill>
+            <a:prstDash val="solid"/>
+          </a:ln>
+        </p:spPr>
+      </p:sp>
+      <p:sp>
+        <p:nvSpPr>
+          <p:cNvPr id="8" name="Shape 6"/>
+          <p:cNvSpPr/>
+          <p:nvPr/>
+        </p:nvSpPr>
+        <p:spPr>
+          <a:xfrm>
+            <a:off x="841248" y="2770632"/>
+            <a:ext cx="438912" cy="438912"/>
+          </a:xfrm>
+          <a:prstGeom prst="ellipse">
+            <a:avLst/>
+          </a:prstGeom>
+          <a:solidFill>
+            <a:srgbClr val="C15317"/>
+          </a:solidFill>
+          <a:ln/>
+        </p:spPr>
+      </p:sp>
+      <p:sp>
+        <p:nvSpPr>
+          <p:cNvPr id="9" name="Shape 7"/>
+          <p:cNvSpPr/>
+          <p:nvPr/>
+        </p:nvSpPr>
+        <p:spPr>
+          <a:xfrm>
+            <a:off x="640080" y="3465576"/>
+            <a:ext cx="10911535" cy="731520"/>
+          </a:xfrm>
+          <a:prstGeom prst="rect">
+            <a:avLst/>
+          </a:prstGeom>
+          <a:solidFill>
+            <a:srgbClr val="FFFFFF"/>
+          </a:solidFill>
+          <a:ln w="12700">
+            <a:solidFill>
+              <a:srgbClr val="E4E7F2"/>
+            </a:solidFill>
+            <a:prstDash val="solid"/>
+          </a:ln>
+        </p:spPr>
+      </p:sp>
+      <p:sp>
+        <p:nvSpPr>
+          <p:cNvPr id="10" name="Shape 8"/>
+          <p:cNvSpPr/>
+          <p:nvPr/>
+        </p:nvSpPr>
+        <p:spPr>
+          <a:xfrm>
+            <a:off x="841248" y="3611880"/>
+            <a:ext cx="438912" cy="438912"/>
+          </a:xfrm>
+          <a:prstGeom prst="ellipse">
+            <a:avLst/>
+          </a:prstGeom>
+          <a:solidFill>
+            <a:srgbClr val="0E7C86"/>
+          </a:solidFill>
+          <a:ln/>
+        </p:spPr>
+      </p:sp>
+      <p:sp>
+        <p:nvSpPr>
+          <p:cNvPr id="11" name="Shape 9"/>
+          <p:cNvSpPr/>
+          <p:nvPr/>
+        </p:nvSpPr>
+        <p:spPr>
+          <a:xfrm>
+            <a:off x="640080" y="4306824"/>
+            <a:ext cx="10911535" cy="731520"/>
+          </a:xfrm>
+          <a:prstGeom prst="rect">
+            <a:avLst/>
+          </a:prstGeom>
+          <a:solidFill>
+            <a:srgbClr val="FFFFFF"/>
+          </a:solidFill>
+          <a:ln w="12700">
+            <a:solidFill>
+              <a:srgbClr val="E4E7F2"/>
+            </a:solidFill>
+            <a:prstDash val="solid"/>
+          </a:ln>
+        </p:spPr>
+      </p:sp>
+      <p:sp>
+        <p:nvSpPr>
+          <p:cNvPr id="12" name="Shape 10"/>
+          <p:cNvSpPr/>
+          <p:nvPr/>
+        </p:nvSpPr>
+        <p:spPr>
+          <a:xfrm>
+            <a:off x="841248" y="4453128"/>
+            <a:ext cx="438912" cy="438912"/>
+          </a:xfrm>
+          <a:prstGeom prst="ellipse">
+            <a:avLst/>
+          </a:prstGeom>
+          <a:solidFill>
+            <a:srgbClr val="5C2D91"/>
+          </a:solidFill>
+          <a:ln/>
+        </p:spPr>
+      </p:sp>
+      <p:sp>
+        <p:nvSpPr>
+          <p:cNvPr id="13" name="Shape 11"/>
+          <p:cNvSpPr/>
+          <p:nvPr/>
+        </p:nvSpPr>
+        <p:spPr>
+          <a:xfrm>
+            <a:off x="640080" y="5148072"/>
+            <a:ext cx="10911535" cy="731520"/>
+          </a:xfrm>
+          <a:prstGeom prst="rect">
+            <a:avLst/>
+          </a:prstGeom>
+          <a:solidFill>
+            <a:srgbClr val="FFFFFF"/>
+          </a:solidFill>
+          <a:ln w="12700">
+            <a:solidFill>
+              <a:srgbClr val="E4E7F2"/>
+            </a:solidFill>
+            <a:prstDash val="solid"/>
+          </a:ln>
+        </p:spPr>
+      </p:sp>
+      <p:sp>
+        <p:nvSpPr>
+          <p:cNvPr id="14" name="Shape 12"/>
+          <p:cNvSpPr/>
+          <p:nvPr/>
+        </p:nvSpPr>
+        <p:spPr>
+          <a:xfrm>
+            <a:off x="841248" y="5294376"/>
+            <a:ext cx="438912" cy="438912"/>
+          </a:xfrm>
+          <a:prstGeom prst="ellipse">
+            <a:avLst/>
+          </a:prstGeom>
+          <a:solidFill>
+            <a:srgbClr val="986F0B"/>
+          </a:solidFill>
+          <a:ln/>
+        </p:spPr>
+      </p:sp>
       <p:pic>
         <p:nvPicPr>
-          <p:cNvPr id="6" name="Image 0" descr="preencoded.png">    </p:cNvPr>
+          <p:cNvPr id="15" name="Image 0" descr="preencoded.png">    </p:cNvPr>
+          <p:cNvPicPr>
+            <a:picLocks noChangeAspect="1"/>
+          </p:cNvPicPr>
+          <p:nvPr/>
+        </p:nvPicPr>
+        <p:blipFill>
+          <a:blip r:embed="rId1"/>
+          <a:stretch>
+            <a:fillRect/>
+          </a:stretch>
+        </p:blipFill>
+        <p:spPr>
+          <a:xfrm>
+            <a:off x="950976" y="2039112"/>
+            <a:ext cx="219456" cy="219456"/>
+          </a:xfrm>
+          <a:prstGeom prst="rect">
+            <a:avLst/>
+          </a:prstGeom>
+        </p:spPr>
+      </p:pic>
+      <p:sp>
+        <p:nvSpPr>
+          <p:cNvPr id="16" name="Text 13"/>
+          <p:cNvSpPr/>
+          <p:nvPr/>
+        </p:nvSpPr>
+        <p:spPr>
+          <a:xfrm>
+            <a:off x="1417320" y="1819656"/>
+            <a:ext cx="2182307" cy="658368"/>
+          </a:xfrm>
+          <a:prstGeom prst="rect">
+            <a:avLst/>
+          </a:prstGeom>
+          <a:noFill/>
+          <a:ln/>
+        </p:spPr>
+        <p:txBody>
+          <a:bodyPr wrap="square" rtlCol="0" anchor="ctr"/>
+          <a:lstStyle/>
+          <a:p>
+            <a:pPr indent="0" marL="0">
+              <a:buNone/>
+            </a:pPr>
+            <a:r>
+              <a:rPr lang="en-US" sz="1400" b="1" dirty="0">
+                <a:solidFill>
+                  <a:srgbClr val="A4262C"/>
+                </a:solidFill>
+                <a:latin typeface="Microsoft JhengHei" pitchFamily="34" charset="0"/>
+                <a:ea typeface="Microsoft JhengHei" pitchFamily="34" charset="-122"/>
+                <a:cs typeface="Microsoft JhengHei" pitchFamily="34" charset="-120"/>
+              </a:rPr>
+              <a:t>製造業 · 生產</a:t>
+            </a:r>
+            <a:endParaRPr lang="en-US" sz="1400" dirty="0"/>
+          </a:p>
+        </p:txBody>
+      </p:sp>
+      <p:sp>
+        <p:nvSpPr>
+          <p:cNvPr id="17" name="Text 14"/>
+          <p:cNvSpPr/>
+          <p:nvPr/>
+        </p:nvSpPr>
+        <p:spPr>
+          <a:xfrm>
+            <a:off x="3586195" y="1819656"/>
+            <a:ext cx="7747190" cy="658368"/>
+          </a:xfrm>
+          <a:prstGeom prst="rect">
+            <a:avLst/>
+          </a:prstGeom>
+          <a:noFill/>
+          <a:ln/>
+        </p:spPr>
+        <p:txBody>
+          <a:bodyPr wrap="square" rtlCol="0" anchor="ctr"/>
+          <a:lstStyle/>
+          <a:p>
+            <a:pPr indent="0" marL="0">
+              <a:lnSpc>
+                <a:spcPct val="108000"/>
+              </a:lnSpc>
+              <a:buNone/>
+            </a:pPr>
+            <a:r>
+              <a:rPr lang="en-US" sz="1350" dirty="0">
+                <a:solidFill>
+                  <a:srgbClr val="1E2235"/>
+                </a:solidFill>
+                <a:latin typeface="Microsoft JhengHei" pitchFamily="34" charset="0"/>
+                <a:ea typeface="Microsoft JhengHei" pitchFamily="34" charset="-122"/>
+                <a:cs typeface="Microsoft JhengHei" pitchFamily="34" charset="-120"/>
+              </a:rPr>
+              <a:t>💡 換成你自己產線的日誌格式與門檻值，一樣適用。</a:t>
+            </a:r>
+            <a:endParaRPr lang="en-US" sz="1350" dirty="0"/>
+          </a:p>
+        </p:txBody>
+      </p:sp>
+      <p:pic>
+        <p:nvPicPr>
+          <p:cNvPr id="18" name="Image 1" descr="preencoded.png">    </p:cNvPr>
           <p:cNvPicPr>
             <a:picLocks noChangeAspect="1"/>
           </p:cNvPicPr>
@@ -11343,8 +11437,8 @@
         </p:blipFill>
         <p:spPr>
           <a:xfrm>
-            <a:off x="804672" y="2039112"/>
-            <a:ext cx="448056" cy="448056"/>
+            <a:off x="950976" y="2880360"/>
+            <a:ext cx="219456" cy="219456"/>
           </a:xfrm>
           <a:prstGeom prst="rect">
             <a:avLst/>
@@ -11353,14 +11447,14 @@
       </p:pic>
       <p:sp>
         <p:nvSpPr>
-          <p:cNvPr id="7" name="Text 4"/>
-          <p:cNvSpPr/>
-          <p:nvPr/>
-        </p:nvSpPr>
-        <p:spPr>
-          <a:xfrm>
-            <a:off x="1691640" y="1856232"/>
-            <a:ext cx="6858000" cy="347472"/>
+          <p:cNvPr id="19" name="Text 15"/>
+          <p:cNvSpPr/>
+          <p:nvPr/>
+        </p:nvSpPr>
+        <p:spPr>
+          <a:xfrm>
+            <a:off x="1417320" y="2660904"/>
+            <a:ext cx="2182307" cy="658368"/>
           </a:xfrm>
           <a:prstGeom prst="rect">
             <a:avLst/>
@@ -11376,30 +11470,30 @@
               <a:buNone/>
             </a:pPr>
             <a:r>
-              <a:rPr lang="en-US" sz="1700" b="1" dirty="0">
-                <a:solidFill>
-                  <a:srgbClr val="FFFFFF"/>
-                </a:solidFill>
-                <a:latin typeface="Microsoft JhengHei" pitchFamily="34" charset="0"/>
-                <a:ea typeface="Microsoft JhengHei" pitchFamily="34" charset="-122"/>
-                <a:cs typeface="Microsoft JhengHei" pitchFamily="34" charset="-120"/>
-              </a:rPr>
-              <a:t>行動前審核</a:t>
-            </a:r>
-            <a:endParaRPr lang="en-US" sz="1700" dirty="0"/>
-          </a:p>
-        </p:txBody>
-      </p:sp>
-      <p:sp>
-        <p:nvSpPr>
-          <p:cNvPr id="8" name="Text 5"/>
-          <p:cNvSpPr/>
-          <p:nvPr/>
-        </p:nvSpPr>
-        <p:spPr>
-          <a:xfrm>
-            <a:off x="1691640" y="2203704"/>
-            <a:ext cx="9966960" cy="658368"/>
+              <a:rPr lang="en-US" sz="1400" b="1" dirty="0">
+                <a:solidFill>
+                  <a:srgbClr val="C15317"/>
+                </a:solidFill>
+                <a:latin typeface="Microsoft JhengHei" pitchFamily="34" charset="0"/>
+                <a:ea typeface="Microsoft JhengHei" pitchFamily="34" charset="-122"/>
+                <a:cs typeface="Microsoft JhengHei" pitchFamily="34" charset="-120"/>
+              </a:rPr>
+              <a:t>製造業 · 設備</a:t>
+            </a:r>
+            <a:endParaRPr lang="en-US" sz="1400" dirty="0"/>
+          </a:p>
+        </p:txBody>
+      </p:sp>
+      <p:sp>
+        <p:nvSpPr>
+          <p:cNvPr id="20" name="Text 16"/>
+          <p:cNvSpPr/>
+          <p:nvPr/>
+        </p:nvSpPr>
+        <p:spPr>
+          <a:xfrm>
+            <a:off x="3586195" y="2660904"/>
+            <a:ext cx="7747190" cy="658368"/>
           </a:xfrm>
           <a:prstGeom prst="rect">
             <a:avLst/>
@@ -11413,59 +11507,28 @@
           <a:p>
             <a:pPr indent="0" marL="0">
               <a:lnSpc>
-                <a:spcPct val="118000"/>
+                <a:spcPct val="108000"/>
               </a:lnSpc>
               <a:buNone/>
             </a:pPr>
             <a:r>
-              <a:rPr lang="en-US" sz="1300" dirty="0">
-                <a:solidFill>
-                  <a:srgbClr val="C7CAEC"/>
-                </a:solidFill>
-                <a:latin typeface="Microsoft JhengHei" pitchFamily="34" charset="0"/>
-                <a:ea typeface="Microsoft JhengHei" pitchFamily="34" charset="-122"/>
-                <a:cs typeface="Microsoft JhengHei" pitchFamily="34" charset="-120"/>
-              </a:rPr>
-              <a:t>中高風險動作會顯示 RISK-LEVEL；寄信、發 Teams、建立會議等動作先攤開可編輯預覽，核准後才送出。</a:t>
-            </a:r>
-            <a:endParaRPr lang="en-US" sz="1300" dirty="0"/>
-          </a:p>
-        </p:txBody>
-      </p:sp>
-      <p:sp>
-        <p:nvSpPr>
-          <p:cNvPr id="9" name="Shape 6"/>
-          <p:cNvSpPr/>
-          <p:nvPr/>
-        </p:nvSpPr>
-        <p:spPr>
-          <a:xfrm>
-            <a:off x="640080" y="3044952"/>
-            <a:ext cx="777240" cy="777240"/>
-          </a:xfrm>
-          <a:prstGeom prst="roundRect">
-            <a:avLst>
-              <a:gd name="adj" fmla="val 18824"/>
-            </a:avLst>
-          </a:prstGeom>
-          <a:solidFill>
-            <a:srgbClr val="FFFFFF">
-              <a:alpha val="14000"/>
-            </a:srgbClr>
-          </a:solidFill>
-          <a:ln w="12700">
-            <a:solidFill>
-              <a:srgbClr val="22D3EE">
-                <a:alpha val="60000"/>
-              </a:srgbClr>
-            </a:solidFill>
-            <a:prstDash val="solid"/>
-          </a:ln>
-        </p:spPr>
+              <a:rPr lang="en-US" sz="1350" dirty="0">
+                <a:solidFill>
+                  <a:srgbClr val="1E2235"/>
+                </a:solidFill>
+                <a:latin typeface="Microsoft JhengHei" pitchFamily="34" charset="0"/>
+                <a:ea typeface="Microsoft JhengHei" pitchFamily="34" charset="-122"/>
+                <a:cs typeface="Microsoft JhengHei" pitchFamily="34" charset="-120"/>
+              </a:rPr>
+              <a:t>💡 換成你自己產線真實的設備異常與聯絡人，一樣可以用。</a:t>
+            </a:r>
+            <a:endParaRPr lang="en-US" sz="1350" dirty="0"/>
+          </a:p>
+        </p:txBody>
       </p:sp>
       <p:pic>
         <p:nvPicPr>
-          <p:cNvPr id="10" name="Image 1" descr="preencoded.png">    </p:cNvPr>
+          <p:cNvPr id="21" name="Image 2" descr="preencoded.png">    </p:cNvPr>
           <p:cNvPicPr>
             <a:picLocks noChangeAspect="1"/>
           </p:cNvPicPr>
@@ -11479,8 +11542,8 @@
         </p:blipFill>
         <p:spPr>
           <a:xfrm>
-            <a:off x="804672" y="3209544"/>
-            <a:ext cx="448056" cy="448056"/>
+            <a:off x="950976" y="3721608"/>
+            <a:ext cx="219456" cy="219456"/>
           </a:xfrm>
           <a:prstGeom prst="rect">
             <a:avLst/>
@@ -11489,14 +11552,14 @@
       </p:pic>
       <p:sp>
         <p:nvSpPr>
-          <p:cNvPr id="11" name="Text 7"/>
-          <p:cNvSpPr/>
-          <p:nvPr/>
-        </p:nvSpPr>
-        <p:spPr>
-          <a:xfrm>
-            <a:off x="1691640" y="3026664"/>
-            <a:ext cx="6858000" cy="347472"/>
+          <p:cNvPr id="22" name="Text 17"/>
+          <p:cNvSpPr/>
+          <p:nvPr/>
+        </p:nvSpPr>
+        <p:spPr>
+          <a:xfrm>
+            <a:off x="1417320" y="3502152"/>
+            <a:ext cx="2182307" cy="658368"/>
           </a:xfrm>
           <a:prstGeom prst="rect">
             <a:avLst/>
@@ -11512,30 +11575,30 @@
               <a:buNone/>
             </a:pPr>
             <a:r>
-              <a:rPr lang="en-US" sz="1700" b="1" dirty="0">
-                <a:solidFill>
-                  <a:srgbClr val="FFFFFF"/>
-                </a:solidFill>
-                <a:latin typeface="Microsoft JhengHei" pitchFamily="34" charset="0"/>
-                <a:ea typeface="Microsoft JhengHei" pitchFamily="34" charset="-122"/>
-                <a:cs typeface="Microsoft JhengHei" pitchFamily="34" charset="-120"/>
-              </a:rPr>
-              <a:t>控制範圍清楚</a:t>
-            </a:r>
-            <a:endParaRPr lang="en-US" sz="1700" dirty="0"/>
-          </a:p>
-        </p:txBody>
-      </p:sp>
-      <p:sp>
-        <p:nvSpPr>
-          <p:cNvPr id="12" name="Text 8"/>
-          <p:cNvSpPr/>
-          <p:nvPr/>
-        </p:nvSpPr>
-        <p:spPr>
-          <a:xfrm>
-            <a:off x="1691640" y="3374136"/>
-            <a:ext cx="9966960" cy="658368"/>
+              <a:rPr lang="en-US" sz="1400" b="1" dirty="0">
+                <a:solidFill>
+                  <a:srgbClr val="0E7C86"/>
+                </a:solidFill>
+                <a:latin typeface="Microsoft JhengHei" pitchFamily="34" charset="0"/>
+                <a:ea typeface="Microsoft JhengHei" pitchFamily="34" charset="-122"/>
+                <a:cs typeface="Microsoft JhengHei" pitchFamily="34" charset="-120"/>
+              </a:rPr>
+              <a:t>製造業 · 品質</a:t>
+            </a:r>
+            <a:endParaRPr lang="en-US" sz="1400" dirty="0"/>
+          </a:p>
+        </p:txBody>
+      </p:sp>
+      <p:sp>
+        <p:nvSpPr>
+          <p:cNvPr id="23" name="Text 18"/>
+          <p:cNvSpPr/>
+          <p:nvPr/>
+        </p:nvSpPr>
+        <p:spPr>
+          <a:xfrm>
+            <a:off x="3586195" y="3502152"/>
+            <a:ext cx="7747190" cy="658368"/>
           </a:xfrm>
           <a:prstGeom prst="rect">
             <a:avLst/>
@@ -11549,59 +11612,28 @@
           <a:p>
             <a:pPr indent="0" marL="0">
               <a:lnSpc>
-                <a:spcPct val="118000"/>
+                <a:spcPct val="108000"/>
               </a:lnSpc>
               <a:buNone/>
             </a:pPr>
             <a:r>
-              <a:rPr lang="en-US" sz="1300" dirty="0">
-                <a:solidFill>
-                  <a:srgbClr val="C7CAEC"/>
-                </a:solidFill>
-                <a:latin typeface="Microsoft JhengHei" pitchFamily="34" charset="0"/>
-                <a:ea typeface="Microsoft JhengHei" pitchFamily="34" charset="-122"/>
-                <a:cs typeface="Microsoft JhengHei" pitchFamily="34" charset="-120"/>
-              </a:rPr>
-              <a:t>don’t ask again 可限定 per-recipient、per-domain 或 always；任務可軟／硬暫停、恢復或取消。</a:t>
-            </a:r>
-            <a:endParaRPr lang="en-US" sz="1300" dirty="0"/>
-          </a:p>
-        </p:txBody>
-      </p:sp>
-      <p:sp>
-        <p:nvSpPr>
-          <p:cNvPr id="13" name="Shape 9"/>
-          <p:cNvSpPr/>
-          <p:nvPr/>
-        </p:nvSpPr>
-        <p:spPr>
-          <a:xfrm>
-            <a:off x="640080" y="4215384"/>
-            <a:ext cx="777240" cy="777240"/>
-          </a:xfrm>
-          <a:prstGeom prst="roundRect">
-            <a:avLst>
-              <a:gd name="adj" fmla="val 18824"/>
-            </a:avLst>
-          </a:prstGeom>
-          <a:solidFill>
-            <a:srgbClr val="FFFFFF">
-              <a:alpha val="14000"/>
-            </a:srgbClr>
-          </a:solidFill>
-          <a:ln w="12700">
-            <a:solidFill>
-              <a:srgbClr val="22D3EE">
-                <a:alpha val="60000"/>
-              </a:srgbClr>
-            </a:solidFill>
-            <a:prstDash val="solid"/>
-          </a:ln>
-        </p:spPr>
+              <a:rPr lang="en-US" sz="1350" dirty="0">
+                <a:solidFill>
+                  <a:srgbClr val="1E2235"/>
+                </a:solidFill>
+                <a:latin typeface="Microsoft JhengHei" pitchFamily="34" charset="0"/>
+                <a:ea typeface="Microsoft JhengHei" pitchFamily="34" charset="-122"/>
+                <a:cs typeface="Microsoft JhengHei" pitchFamily="34" charset="-120"/>
+              </a:rPr>
+              <a:t>💡 換成你自己的進料或製程檢驗數據，一樣適用。</a:t>
+            </a:r>
+            <a:endParaRPr lang="en-US" sz="1350" dirty="0"/>
+          </a:p>
+        </p:txBody>
       </p:sp>
       <p:pic>
         <p:nvPicPr>
-          <p:cNvPr id="14" name="Image 2" descr="preencoded.png">    </p:cNvPr>
+          <p:cNvPr id="24" name="Image 3" descr="preencoded.png">    </p:cNvPr>
           <p:cNvPicPr>
             <a:picLocks noChangeAspect="1"/>
           </p:cNvPicPr>
@@ -11615,8 +11647,8 @@
         </p:blipFill>
         <p:spPr>
           <a:xfrm>
-            <a:off x="804672" y="4379976"/>
-            <a:ext cx="448056" cy="448056"/>
+            <a:off x="950976" y="4562856"/>
+            <a:ext cx="219456" cy="219456"/>
           </a:xfrm>
           <a:prstGeom prst="rect">
             <a:avLst/>
@@ -11625,14 +11657,14 @@
       </p:pic>
       <p:sp>
         <p:nvSpPr>
-          <p:cNvPr id="15" name="Text 10"/>
-          <p:cNvSpPr/>
-          <p:nvPr/>
-        </p:nvSpPr>
-        <p:spPr>
-          <a:xfrm>
-            <a:off x="1691640" y="4197096"/>
-            <a:ext cx="6858000" cy="347472"/>
+          <p:cNvPr id="25" name="Text 19"/>
+          <p:cNvSpPr/>
+          <p:nvPr/>
+        </p:nvSpPr>
+        <p:spPr>
+          <a:xfrm>
+            <a:off x="1417320" y="4343400"/>
+            <a:ext cx="2182307" cy="658368"/>
           </a:xfrm>
           <a:prstGeom prst="rect">
             <a:avLst/>
@@ -11648,30 +11680,30 @@
               <a:buNone/>
             </a:pPr>
             <a:r>
-              <a:rPr lang="en-US" sz="1700" b="1" dirty="0">
-                <a:solidFill>
-                  <a:srgbClr val="FFFFFF"/>
-                </a:solidFill>
-                <a:latin typeface="Microsoft JhengHei" pitchFamily="34" charset="0"/>
-                <a:ea typeface="Microsoft JhengHei" pitchFamily="34" charset="-122"/>
-                <a:cs typeface="Microsoft JhengHei" pitchFamily="34" charset="-120"/>
-              </a:rPr>
-              <a:t>自動化任務也有把關</a:t>
-            </a:r>
-            <a:endParaRPr lang="en-US" sz="1700" dirty="0"/>
-          </a:p>
-        </p:txBody>
-      </p:sp>
-      <p:sp>
-        <p:nvSpPr>
-          <p:cNvPr id="16" name="Text 11"/>
-          <p:cNvSpPr/>
-          <p:nvPr/>
-        </p:nvSpPr>
-        <p:spPr>
-          <a:xfrm>
-            <a:off x="1691640" y="4544568"/>
-            <a:ext cx="9966960" cy="658368"/>
+              <a:rPr lang="en-US" sz="1400" b="1" dirty="0">
+                <a:solidFill>
+                  <a:srgbClr val="5C2D91"/>
+                </a:solidFill>
+                <a:latin typeface="Microsoft JhengHei" pitchFamily="34" charset="0"/>
+                <a:ea typeface="Microsoft JhengHei" pitchFamily="34" charset="-122"/>
+                <a:cs typeface="Microsoft JhengHei" pitchFamily="34" charset="-120"/>
+              </a:rPr>
+              <a:t>製造業 · 供應商管理</a:t>
+            </a:r>
+            <a:endParaRPr lang="en-US" sz="1400" dirty="0"/>
+          </a:p>
+        </p:txBody>
+      </p:sp>
+      <p:sp>
+        <p:nvSpPr>
+          <p:cNvPr id="26" name="Text 20"/>
+          <p:cNvSpPr/>
+          <p:nvPr/>
+        </p:nvSpPr>
+        <p:spPr>
+          <a:xfrm>
+            <a:off x="3586195" y="4343400"/>
+            <a:ext cx="7747190" cy="658368"/>
           </a:xfrm>
           <a:prstGeom prst="rect">
             <a:avLst/>
@@ -11685,59 +11717,28 @@
           <a:p>
             <a:pPr indent="0" marL="0">
               <a:lnSpc>
-                <a:spcPct val="118000"/>
+                <a:spcPct val="108000"/>
               </a:lnSpc>
               <a:buNone/>
             </a:pPr>
             <a:r>
-              <a:rPr lang="en-US" sz="1300" dirty="0">
-                <a:solidFill>
-                  <a:srgbClr val="C7CAEC"/>
-                </a:solidFill>
-                <a:latin typeface="Microsoft JhengHei" pitchFamily="34" charset="0"/>
-                <a:ea typeface="Microsoft JhengHei" pitchFamily="34" charset="-122"/>
-                <a:cs typeface="Microsoft JhengHei" pitchFamily="34" charset="-120"/>
-              </a:rPr>
-              <a:t>排程提示與事件驅動任務有執行頻率限制與防迴圈保護；一律以建立者權限執行，且與其他 Cowork 活動一同記錄在統一稽核日誌，套用 Microsoft Purview 政策。</a:t>
-            </a:r>
-            <a:endParaRPr lang="en-US" sz="1300" dirty="0"/>
-          </a:p>
-        </p:txBody>
-      </p:sp>
-      <p:sp>
-        <p:nvSpPr>
-          <p:cNvPr id="17" name="Shape 12"/>
-          <p:cNvSpPr/>
-          <p:nvPr/>
-        </p:nvSpPr>
-        <p:spPr>
-          <a:xfrm>
-            <a:off x="640080" y="5385816"/>
-            <a:ext cx="777240" cy="777240"/>
-          </a:xfrm>
-          <a:prstGeom prst="roundRect">
-            <a:avLst>
-              <a:gd name="adj" fmla="val 18824"/>
-            </a:avLst>
-          </a:prstGeom>
-          <a:solidFill>
-            <a:srgbClr val="FFFFFF">
-              <a:alpha val="14000"/>
-            </a:srgbClr>
-          </a:solidFill>
-          <a:ln w="12700">
-            <a:solidFill>
-              <a:srgbClr val="22D3EE">
-                <a:alpha val="60000"/>
-              </a:srgbClr>
-            </a:solidFill>
-            <a:prstDash val="solid"/>
-          </a:ln>
-        </p:spPr>
+              <a:rPr lang="en-US" sz="1350" dirty="0">
+                <a:solidFill>
+                  <a:srgbClr val="1E2235"/>
+                </a:solidFill>
+                <a:latin typeface="Microsoft JhengHei" pitchFamily="34" charset="0"/>
+                <a:ea typeface="Microsoft JhengHei" pitchFamily="34" charset="-122"/>
+                <a:cs typeface="Microsoft JhengHei" pitchFamily="34" charset="-120"/>
+              </a:rPr>
+              <a:t>💡 換成你自己的供應商稽核清單 PDF，一樣適用。</a:t>
+            </a:r>
+            <a:endParaRPr lang="en-US" sz="1350" dirty="0"/>
+          </a:p>
+        </p:txBody>
       </p:sp>
       <p:pic>
         <p:nvPicPr>
-          <p:cNvPr id="18" name="Image 3" descr="preencoded.png">    </p:cNvPr>
+          <p:cNvPr id="27" name="Image 4" descr="preencoded.png">    </p:cNvPr>
           <p:cNvPicPr>
             <a:picLocks noChangeAspect="1"/>
           </p:cNvPicPr>
@@ -11751,8 +11752,8 @@
         </p:blipFill>
         <p:spPr>
           <a:xfrm>
-            <a:off x="804672" y="5550408"/>
-            <a:ext cx="448056" cy="448056"/>
+            <a:off x="950976" y="5404104"/>
+            <a:ext cx="219456" cy="219456"/>
           </a:xfrm>
           <a:prstGeom prst="rect">
             <a:avLst/>
@@ -11761,14 +11762,14 @@
       </p:pic>
       <p:sp>
         <p:nvSpPr>
-          <p:cNvPr id="19" name="Text 13"/>
-          <p:cNvSpPr/>
-          <p:nvPr/>
-        </p:nvSpPr>
-        <p:spPr>
-          <a:xfrm>
-            <a:off x="1691640" y="5367528"/>
-            <a:ext cx="6858000" cy="347472"/>
+          <p:cNvPr id="28" name="Text 21"/>
+          <p:cNvSpPr/>
+          <p:nvPr/>
+        </p:nvSpPr>
+        <p:spPr>
+          <a:xfrm>
+            <a:off x="1417320" y="5184648"/>
+            <a:ext cx="2182307" cy="658368"/>
           </a:xfrm>
           <a:prstGeom prst="rect">
             <a:avLst/>
@@ -11784,30 +11785,30 @@
               <a:buNone/>
             </a:pPr>
             <a:r>
-              <a:rPr lang="en-US" sz="1700" b="1" dirty="0">
-                <a:solidFill>
-                  <a:srgbClr val="FFFFFF"/>
-                </a:solidFill>
-                <a:latin typeface="Microsoft JhengHei" pitchFamily="34" charset="0"/>
-                <a:ea typeface="Microsoft JhengHei" pitchFamily="34" charset="-122"/>
-                <a:cs typeface="Microsoft JhengHei" pitchFamily="34" charset="-120"/>
-              </a:rPr>
-              <a:t>限制也要知道</a:t>
-            </a:r>
-            <a:endParaRPr lang="en-US" sz="1700" dirty="0"/>
-          </a:p>
-        </p:txBody>
-      </p:sp>
-      <p:sp>
-        <p:nvSpPr>
-          <p:cNvPr id="20" name="Text 14"/>
-          <p:cNvSpPr/>
-          <p:nvPr/>
-        </p:nvSpPr>
-        <p:spPr>
-          <a:xfrm>
-            <a:off x="1691640" y="5715000"/>
-            <a:ext cx="9966960" cy="658368"/>
+              <a:rPr lang="en-US" sz="1400" b="1" dirty="0">
+                <a:solidFill>
+                  <a:srgbClr val="986F0B"/>
+                </a:solidFill>
+                <a:latin typeface="Microsoft JhengHei" pitchFamily="34" charset="0"/>
+                <a:ea typeface="Microsoft JhengHei" pitchFamily="34" charset="-122"/>
+                <a:cs typeface="Microsoft JhengHei" pitchFamily="34" charset="-120"/>
+              </a:rPr>
+              <a:t>製造業 · 自動化</a:t>
+            </a:r>
+            <a:endParaRPr lang="en-US" sz="1400" dirty="0"/>
+          </a:p>
+        </p:txBody>
+      </p:sp>
+      <p:sp>
+        <p:nvSpPr>
+          <p:cNvPr id="29" name="Text 22"/>
+          <p:cNvSpPr/>
+          <p:nvPr/>
+        </p:nvSpPr>
+        <p:spPr>
+          <a:xfrm>
+            <a:off x="3586195" y="5184648"/>
+            <a:ext cx="7747190" cy="658368"/>
           </a:xfrm>
           <a:prstGeom prst="rect">
             <a:avLst/>
@@ -11821,28 +11822,28 @@
           <a:p>
             <a:pPr indent="0" marL="0">
               <a:lnSpc>
-                <a:spcPct val="118000"/>
+                <a:spcPct val="108000"/>
               </a:lnSpc>
               <a:buNone/>
             </a:pPr>
             <a:r>
-              <a:rPr lang="en-US" sz="1300" dirty="0">
-                <a:solidFill>
-                  <a:srgbClr val="C7CAEC"/>
-                </a:solidFill>
-                <a:latin typeface="Microsoft JhengHei" pitchFamily="34" charset="0"/>
-                <a:ea typeface="Microsoft JhengHei" pitchFamily="34" charset="-122"/>
-                <a:cs typeface="Microsoft JhengHei" pitchFamily="34" charset="-120"/>
-              </a:rPr>
-              <a:t>不能存取本機檔案、刪除 OneDrive/SharePoint 檔案或讀取加密檔；附件 &lt;200MB；自訂技能與第三方 plugin 未經 Microsoft 驗證，需自行審閱。官方明列不適用於「免人工審查即需保證正確」的用途。</a:t>
-            </a:r>
-            <a:endParaRPr lang="en-US" sz="1300" dirty="0"/>
-          </a:p>
-        </p:txBody>
-      </p:sp>
-      <p:sp>
-        <p:nvSpPr>
-          <p:cNvPr id="21" name="Text 15"/>
+              <a:rPr lang="en-US" sz="1350" dirty="0">
+                <a:solidFill>
+                  <a:srgbClr val="1E2235"/>
+                </a:solidFill>
+                <a:latin typeface="Microsoft JhengHei" pitchFamily="34" charset="0"/>
+                <a:ea typeface="Microsoft JhengHei" pitchFamily="34" charset="-122"/>
+                <a:cs typeface="Microsoft JhengHei" pitchFamily="34" charset="-120"/>
+              </a:rPr>
+              <a:t>💡 換成你自己產線的原始數據格式與目標值，一樣適用。</a:t>
+            </a:r>
+            <a:endParaRPr lang="en-US" sz="1350" dirty="0"/>
+          </a:p>
+        </p:txBody>
+      </p:sp>
+      <p:sp>
+        <p:nvSpPr>
+          <p:cNvPr id="30" name="Text 23"/>
           <p:cNvSpPr/>
           <p:nvPr/>
         </p:nvSpPr>
@@ -11867,7 +11868,7 @@
             <a:r>
               <a:rPr lang="en-US" sz="900" dirty="0">
                 <a:solidFill>
-                  <a:srgbClr val="8A8FB5"/>
+                  <a:srgbClr val="5B6079"/>
                 </a:solidFill>
                 <a:latin typeface="Microsoft JhengHei" pitchFamily="34" charset="0"/>
                 <a:ea typeface="Microsoft JhengHei" pitchFamily="34" charset="-122"/>
@@ -11881,7 +11882,7 @@
       </p:sp>
       <p:sp>
         <p:nvSpPr>
-          <p:cNvPr id="22" name="Text 16"/>
+          <p:cNvPr id="31" name="Text 24"/>
           <p:cNvSpPr/>
           <p:nvPr/>
         </p:nvSpPr>
@@ -11906,7 +11907,7 @@
             <a:r>
               <a:rPr lang="en-US" sz="900" dirty="0">
                 <a:solidFill>
-                  <a:srgbClr val="8A8FB5"/>
+                  <a:srgbClr val="5B6079"/>
                 </a:solidFill>
                 <a:latin typeface="Microsoft JhengHei" pitchFamily="34" charset="0"/>
                 <a:ea typeface="Microsoft JhengHei" pitchFamily="34" charset="-122"/>
@@ -12056,7 +12057,7 @@
         </p:nvSpPr>
         <p:spPr>
           <a:xfrm>
-            <a:off x="640080" y="1737360"/>
+            <a:off x="640080" y="1664208"/>
             <a:ext cx="1005840" cy="822960"/>
           </a:xfrm>
           <a:prstGeom prst="rect">
@@ -12073,7 +12074,7 @@
               <a:buNone/>
             </a:pPr>
             <a:r>
-              <a:rPr lang="en-US" sz="3800" b="1" dirty="0">
+              <a:rPr lang="en-US" sz="3400" b="1" dirty="0">
                 <a:solidFill>
                   <a:srgbClr val="6366F1"/>
                 </a:solidFill>
@@ -12083,7 +12084,7 @@
               </a:rPr>
               <a:t>01</a:t>
             </a:r>
-            <a:endParaRPr lang="en-US" sz="3800" dirty="0"/>
+            <a:endParaRPr lang="en-US" sz="3400" dirty="0"/>
           </a:p>
         </p:txBody>
       </p:sp>
@@ -12095,7 +12096,7 @@
         </p:nvSpPr>
         <p:spPr>
           <a:xfrm>
-            <a:off x="1737360" y="1773936"/>
+            <a:off x="1737360" y="1700784"/>
             <a:ext cx="3657600" cy="457200"/>
           </a:xfrm>
           <a:prstGeom prst="rect">
@@ -12112,7 +12113,7 @@
               <a:buNone/>
             </a:pPr>
             <a:r>
-              <a:rPr lang="en-US" sz="2000" b="1" dirty="0">
+              <a:rPr lang="en-US" sz="1900" b="1" dirty="0">
                 <a:solidFill>
                   <a:srgbClr val="1E2235"/>
                 </a:solidFill>
@@ -12122,7 +12123,7 @@
               </a:rPr>
               <a:t>認識 Cowork</a:t>
             </a:r>
-            <a:endParaRPr lang="en-US" sz="2000" dirty="0"/>
+            <a:endParaRPr lang="en-US" sz="1900" dirty="0"/>
           </a:p>
         </p:txBody>
       </p:sp>
@@ -12134,7 +12135,7 @@
         </p:nvSpPr>
         <p:spPr>
           <a:xfrm>
-            <a:off x="1737360" y="2212848"/>
+            <a:off x="1737360" y="2121408"/>
             <a:ext cx="9601200" cy="365760"/>
           </a:xfrm>
           <a:prstGeom prst="rect">
@@ -12151,7 +12152,7 @@
               <a:buNone/>
             </a:pPr>
             <a:r>
-              <a:rPr lang="en-US" sz="1400" dirty="0">
+              <a:rPr lang="en-US" sz="1350" dirty="0">
                 <a:solidFill>
                   <a:srgbClr val="5B6079"/>
                 </a:solidFill>
@@ -12161,7 +12162,7 @@
               </a:rPr>
               <a:t>什麼是代理式 AI，和一般 Copilot Chat 有何不同</a:t>
             </a:r>
-            <a:endParaRPr lang="en-US" sz="1400" dirty="0"/>
+            <a:endParaRPr lang="en-US" sz="1350" dirty="0"/>
           </a:p>
         </p:txBody>
       </p:sp>
@@ -12173,7 +12174,7 @@
         </p:nvSpPr>
         <p:spPr>
           <a:xfrm>
-            <a:off x="640080" y="2816352"/>
+            <a:off x="640080" y="2578608"/>
             <a:ext cx="1005840" cy="822960"/>
           </a:xfrm>
           <a:prstGeom prst="rect">
@@ -12190,7 +12191,7 @@
               <a:buNone/>
             </a:pPr>
             <a:r>
-              <a:rPr lang="en-US" sz="3800" b="1" dirty="0">
+              <a:rPr lang="en-US" sz="3400" b="1" dirty="0">
                 <a:solidFill>
                   <a:srgbClr val="6366F1"/>
                 </a:solidFill>
@@ -12200,7 +12201,7 @@
               </a:rPr>
               <a:t>02</a:t>
             </a:r>
-            <a:endParaRPr lang="en-US" sz="3800" dirty="0"/>
+            <a:endParaRPr lang="en-US" sz="3400" dirty="0"/>
           </a:p>
         </p:txBody>
       </p:sp>
@@ -12212,7 +12213,7 @@
         </p:nvSpPr>
         <p:spPr>
           <a:xfrm>
-            <a:off x="1737360" y="2852928"/>
+            <a:off x="1737360" y="2615184"/>
             <a:ext cx="3657600" cy="457200"/>
           </a:xfrm>
           <a:prstGeom prst="rect">
@@ -12229,7 +12230,7 @@
               <a:buNone/>
             </a:pPr>
             <a:r>
-              <a:rPr lang="en-US" sz="2000" b="1" dirty="0">
+              <a:rPr lang="en-US" sz="1900" b="1" dirty="0">
                 <a:solidFill>
                   <a:srgbClr val="1E2235"/>
                 </a:solidFill>
@@ -12239,7 +12240,7 @@
               </a:rPr>
               <a:t>核心能力與運作</a:t>
             </a:r>
-            <a:endParaRPr lang="en-US" sz="2000" dirty="0"/>
+            <a:endParaRPr lang="en-US" sz="1900" dirty="0"/>
           </a:p>
         </p:txBody>
       </p:sp>
@@ -12251,7 +12252,7 @@
         </p:nvSpPr>
         <p:spPr>
           <a:xfrm>
-            <a:off x="1737360" y="3291840"/>
+            <a:off x="1737360" y="3035808"/>
             <a:ext cx="9601200" cy="365760"/>
           </a:xfrm>
           <a:prstGeom prst="rect">
@@ -12268,7 +12269,7 @@
               <a:buNone/>
             </a:pPr>
             <a:r>
-              <a:rPr lang="en-US" sz="1400" dirty="0">
+              <a:rPr lang="en-US" sz="1350" dirty="0">
                 <a:solidFill>
                   <a:srgbClr val="5B6079"/>
                 </a:solidFill>
@@ -12278,7 +12279,7 @@
               </a:rPr>
               <a:t>技能、工作區、行動前審核、自我驗證</a:t>
             </a:r>
-            <a:endParaRPr lang="en-US" sz="1400" dirty="0"/>
+            <a:endParaRPr lang="en-US" sz="1350" dirty="0"/>
           </a:p>
         </p:txBody>
       </p:sp>
@@ -12290,7 +12291,7 @@
         </p:nvSpPr>
         <p:spPr>
           <a:xfrm>
-            <a:off x="640080" y="3895344"/>
+            <a:off x="640080" y="3493008"/>
             <a:ext cx="1005840" cy="822960"/>
           </a:xfrm>
           <a:prstGeom prst="rect">
@@ -12307,7 +12308,7 @@
               <a:buNone/>
             </a:pPr>
             <a:r>
-              <a:rPr lang="en-US" sz="3800" b="1" dirty="0">
+              <a:rPr lang="en-US" sz="3400" b="1" dirty="0">
                 <a:solidFill>
                   <a:srgbClr val="6366F1"/>
                 </a:solidFill>
@@ -12317,7 +12318,7 @@
               </a:rPr>
               <a:t>03</a:t>
             </a:r>
-            <a:endParaRPr lang="en-US" sz="3800" dirty="0"/>
+            <a:endParaRPr lang="en-US" sz="3400" dirty="0"/>
           </a:p>
         </p:txBody>
       </p:sp>
@@ -12329,7 +12330,7 @@
         </p:nvSpPr>
         <p:spPr>
           <a:xfrm>
-            <a:off x="1737360" y="3931920"/>
+            <a:off x="1737360" y="3529584"/>
             <a:ext cx="3657600" cy="457200"/>
           </a:xfrm>
           <a:prstGeom prst="rect">
@@ -12346,7 +12347,7 @@
               <a:buNone/>
             </a:pPr>
             <a:r>
-              <a:rPr lang="en-US" sz="2000" b="1" dirty="0">
+              <a:rPr lang="en-US" sz="1900" b="1" dirty="0">
                 <a:solidFill>
                   <a:srgbClr val="1E2235"/>
                 </a:solidFill>
@@ -12354,21 +12355,138 @@
                 <a:ea typeface="Microsoft JhengHei" pitchFamily="34" charset="-122"/>
                 <a:cs typeface="Microsoft JhengHei" pitchFamily="34" charset="-120"/>
               </a:rPr>
+              <a:t>練習環境準備</a:t>
+            </a:r>
+            <a:endParaRPr lang="en-US" sz="1900" dirty="0"/>
+          </a:p>
+        </p:txBody>
+      </p:sp>
+      <p:sp>
+        <p:nvSpPr>
+          <p:cNvPr id="13" name="Text 11"/>
+          <p:cNvSpPr/>
+          <p:nvPr/>
+        </p:nvSpPr>
+        <p:spPr>
+          <a:xfrm>
+            <a:off x="1737360" y="3950208"/>
+            <a:ext cx="9601200" cy="365760"/>
+          </a:xfrm>
+          <a:prstGeom prst="rect">
+            <a:avLst/>
+          </a:prstGeom>
+          <a:noFill/>
+          <a:ln/>
+        </p:spPr>
+        <p:txBody>
+          <a:bodyPr wrap="square" rtlCol="0" anchor="ctr"/>
+          <a:lstStyle/>
+          <a:p>
+            <a:pPr indent="0" marL="0">
+              <a:buNone/>
+            </a:pPr>
+            <a:r>
+              <a:rPr lang="en-US" sz="1350" dirty="0">
+                <a:solidFill>
+                  <a:srgbClr val="5B6079"/>
+                </a:solidFill>
+                <a:latin typeface="Microsoft JhengHei" pitchFamily="34" charset="0"/>
+                <a:ea typeface="Microsoft JhengHei" pitchFamily="34" charset="-122"/>
+                <a:cs typeface="Microsoft JhengHei" pitchFamily="34" charset="-120"/>
+              </a:rPr>
+              <a:t>範例檔下載後拖進對話，以及哪些情境會動到信箱與行事曆</a:t>
+            </a:r>
+            <a:endParaRPr lang="en-US" sz="1350" dirty="0"/>
+          </a:p>
+        </p:txBody>
+      </p:sp>
+      <p:sp>
+        <p:nvSpPr>
+          <p:cNvPr id="14" name="Text 12"/>
+          <p:cNvSpPr/>
+          <p:nvPr/>
+        </p:nvSpPr>
+        <p:spPr>
+          <a:xfrm>
+            <a:off x="640080" y="4407408"/>
+            <a:ext cx="1005840" cy="822960"/>
+          </a:xfrm>
+          <a:prstGeom prst="rect">
+            <a:avLst/>
+          </a:prstGeom>
+          <a:noFill/>
+          <a:ln/>
+        </p:spPr>
+        <p:txBody>
+          <a:bodyPr wrap="square" rtlCol="0" anchor="ctr"/>
+          <a:lstStyle/>
+          <a:p>
+            <a:pPr algn="l" indent="0" marL="0">
+              <a:buNone/>
+            </a:pPr>
+            <a:r>
+              <a:rPr lang="en-US" sz="3400" b="1" dirty="0">
+                <a:solidFill>
+                  <a:srgbClr val="6366F1"/>
+                </a:solidFill>
+                <a:latin typeface="Microsoft JhengHei" pitchFamily="34" charset="0"/>
+                <a:ea typeface="Microsoft JhengHei" pitchFamily="34" charset="-122"/>
+                <a:cs typeface="Microsoft JhengHei" pitchFamily="34" charset="-120"/>
+              </a:rPr>
+              <a:t>04</a:t>
+            </a:r>
+            <a:endParaRPr lang="en-US" sz="3400" dirty="0"/>
+          </a:p>
+        </p:txBody>
+      </p:sp>
+      <p:sp>
+        <p:nvSpPr>
+          <p:cNvPr id="15" name="Text 13"/>
+          <p:cNvSpPr/>
+          <p:nvPr/>
+        </p:nvSpPr>
+        <p:spPr>
+          <a:xfrm>
+            <a:off x="1737360" y="4443984"/>
+            <a:ext cx="3657600" cy="457200"/>
+          </a:xfrm>
+          <a:prstGeom prst="rect">
+            <a:avLst/>
+          </a:prstGeom>
+          <a:noFill/>
+          <a:ln/>
+        </p:spPr>
+        <p:txBody>
+          <a:bodyPr wrap="square" rtlCol="0" anchor="ctr"/>
+          <a:lstStyle/>
+          <a:p>
+            <a:pPr indent="0" marL="0">
+              <a:buNone/>
+            </a:pPr>
+            <a:r>
+              <a:rPr lang="en-US" sz="1900" b="1" dirty="0">
+                <a:solidFill>
+                  <a:srgbClr val="1E2235"/>
+                </a:solidFill>
+                <a:latin typeface="Microsoft JhengHei" pitchFamily="34" charset="0"/>
+                <a:ea typeface="Microsoft JhengHei" pitchFamily="34" charset="-122"/>
+                <a:cs typeface="Microsoft JhengHei" pitchFamily="34" charset="-120"/>
+              </a:rPr>
               <a:t>5 個實戰情境</a:t>
             </a:r>
-            <a:endParaRPr lang="en-US" sz="2000" dirty="0"/>
-          </a:p>
-        </p:txBody>
-      </p:sp>
-      <p:sp>
-        <p:nvSpPr>
-          <p:cNvPr id="13" name="Text 11"/>
-          <p:cNvSpPr/>
-          <p:nvPr/>
-        </p:nvSpPr>
-        <p:spPr>
-          <a:xfrm>
-            <a:off x="1737360" y="4370832"/>
+            <a:endParaRPr lang="en-US" sz="1900" dirty="0"/>
+          </a:p>
+        </p:txBody>
+      </p:sp>
+      <p:sp>
+        <p:nvSpPr>
+          <p:cNvPr id="16" name="Text 14"/>
+          <p:cNvSpPr/>
+          <p:nvPr/>
+        </p:nvSpPr>
+        <p:spPr>
+          <a:xfrm>
+            <a:off x="1737360" y="4864608"/>
             <a:ext cx="9601200" cy="365760"/>
           </a:xfrm>
           <a:prstGeom prst="rect">
@@ -12385,7 +12503,7 @@
               <a:buNone/>
             </a:pPr>
             <a:r>
-              <a:rPr lang="en-US" sz="1400" dirty="0">
+              <a:rPr lang="en-US" sz="1350" dirty="0">
                 <a:solidFill>
                   <a:srgbClr val="5B6079"/>
                 </a:solidFill>
@@ -12395,19 +12513,19 @@
               </a:rPr>
               <a:t>交接晨報、設備異常雙軌處理、品質數據洞察、供應商到期提醒、週產能報告技能，逐一拆解工作流</a:t>
             </a:r>
-            <a:endParaRPr lang="en-US" sz="1400" dirty="0"/>
-          </a:p>
-        </p:txBody>
-      </p:sp>
-      <p:sp>
-        <p:nvSpPr>
-          <p:cNvPr id="14" name="Text 12"/>
-          <p:cNvSpPr/>
-          <p:nvPr/>
-        </p:nvSpPr>
-        <p:spPr>
-          <a:xfrm>
-            <a:off x="640080" y="4974336"/>
+            <a:endParaRPr lang="en-US" sz="1350" dirty="0"/>
+          </a:p>
+        </p:txBody>
+      </p:sp>
+      <p:sp>
+        <p:nvSpPr>
+          <p:cNvPr id="17" name="Text 15"/>
+          <p:cNvSpPr/>
+          <p:nvPr/>
+        </p:nvSpPr>
+        <p:spPr>
+          <a:xfrm>
+            <a:off x="640080" y="5321808"/>
             <a:ext cx="1005840" cy="822960"/>
           </a:xfrm>
           <a:prstGeom prst="rect">
@@ -12424,7 +12542,7 @@
               <a:buNone/>
             </a:pPr>
             <a:r>
-              <a:rPr lang="en-US" sz="3800" b="1" dirty="0">
+              <a:rPr lang="en-US" sz="3400" b="1" dirty="0">
                 <a:solidFill>
                   <a:srgbClr val="6366F1"/>
                 </a:solidFill>
@@ -12432,21 +12550,21 @@
                 <a:ea typeface="Microsoft JhengHei" pitchFamily="34" charset="-122"/>
                 <a:cs typeface="Microsoft JhengHei" pitchFamily="34" charset="-120"/>
               </a:rPr>
-              <a:t>04</a:t>
-            </a:r>
-            <a:endParaRPr lang="en-US" sz="3800" dirty="0"/>
-          </a:p>
-        </p:txBody>
-      </p:sp>
-      <p:sp>
-        <p:nvSpPr>
-          <p:cNvPr id="15" name="Text 13"/>
-          <p:cNvSpPr/>
-          <p:nvPr/>
-        </p:nvSpPr>
-        <p:spPr>
-          <a:xfrm>
-            <a:off x="1737360" y="5010912"/>
+              <a:t>05</a:t>
+            </a:r>
+            <a:endParaRPr lang="en-US" sz="3400" dirty="0"/>
+          </a:p>
+        </p:txBody>
+      </p:sp>
+      <p:sp>
+        <p:nvSpPr>
+          <p:cNvPr id="18" name="Text 16"/>
+          <p:cNvSpPr/>
+          <p:nvPr/>
+        </p:nvSpPr>
+        <p:spPr>
+          <a:xfrm>
+            <a:off x="1737360" y="5358384"/>
             <a:ext cx="3657600" cy="457200"/>
           </a:xfrm>
           <a:prstGeom prst="rect">
@@ -12463,7 +12581,7 @@
               <a:buNone/>
             </a:pPr>
             <a:r>
-              <a:rPr lang="en-US" sz="2000" b="1" dirty="0">
+              <a:rPr lang="en-US" sz="1900" b="1" dirty="0">
                 <a:solidFill>
                   <a:srgbClr val="1E2235"/>
                 </a:solidFill>
@@ -12473,19 +12591,19 @@
               </a:rPr>
               <a:t>套用到你的日常</a:t>
             </a:r>
-            <a:endParaRPr lang="en-US" sz="2000" dirty="0"/>
-          </a:p>
-        </p:txBody>
-      </p:sp>
-      <p:sp>
-        <p:nvSpPr>
-          <p:cNvPr id="16" name="Text 14"/>
-          <p:cNvSpPr/>
-          <p:nvPr/>
-        </p:nvSpPr>
-        <p:spPr>
-          <a:xfrm>
-            <a:off x="1737360" y="5449824"/>
+            <a:endParaRPr lang="en-US" sz="1900" dirty="0"/>
+          </a:p>
+        </p:txBody>
+      </p:sp>
+      <p:sp>
+        <p:nvSpPr>
+          <p:cNvPr id="19" name="Text 17"/>
+          <p:cNvSpPr/>
+          <p:nvPr/>
+        </p:nvSpPr>
+        <p:spPr>
+          <a:xfrm>
+            <a:off x="1737360" y="5779008"/>
             <a:ext cx="9601200" cy="365760"/>
           </a:xfrm>
           <a:prstGeom prst="rect">
@@ -12502,7 +12620,7 @@
               <a:buNone/>
             </a:pPr>
             <a:r>
-              <a:rPr lang="en-US" sz="1400" dirty="0">
+              <a:rPr lang="en-US" sz="1350" dirty="0">
                 <a:solidFill>
                   <a:srgbClr val="5B6079"/>
                 </a:solidFill>
@@ -12512,13 +12630,13 @@
               </a:rPr>
               <a:t>如何把這些情境延伸到自己的工作</a:t>
             </a:r>
-            <a:endParaRPr lang="en-US" sz="1400" dirty="0"/>
-          </a:p>
-        </p:txBody>
-      </p:sp>
-      <p:sp>
-        <p:nvSpPr>
-          <p:cNvPr id="17" name="Text 15"/>
+            <a:endParaRPr lang="en-US" sz="1350" dirty="0"/>
+          </a:p>
+        </p:txBody>
+      </p:sp>
+      <p:sp>
+        <p:nvSpPr>
+          <p:cNvPr id="20" name="Text 18"/>
           <p:cNvSpPr/>
           <p:nvPr/>
         </p:nvSpPr>
@@ -12557,7 +12675,7 @@
       </p:sp>
       <p:sp>
         <p:nvSpPr>
-          <p:cNvPr id="18" name="Text 16"/>
+          <p:cNvPr id="21" name="Text 19"/>
           <p:cNvSpPr/>
           <p:nvPr/>
         </p:nvSpPr>
@@ -12635,14 +12753,34 @@
       </p:grpSpPr>
       <p:sp>
         <p:nvSpPr>
-          <p:cNvPr id="2" name="Text 0"/>
-          <p:cNvSpPr/>
-          <p:nvPr/>
-        </p:nvSpPr>
-        <p:spPr>
-          <a:xfrm>
-            <a:off x="640080" y="1371600"/>
-            <a:ext cx="10058400" cy="822960"/>
+          <p:cNvPr id="2" name="Shape 0"/>
+          <p:cNvSpPr/>
+          <p:nvPr/>
+        </p:nvSpPr>
+        <p:spPr>
+          <a:xfrm>
+            <a:off x="640080" y="566928"/>
+            <a:ext cx="384048" cy="128016"/>
+          </a:xfrm>
+          <a:prstGeom prst="rect">
+            <a:avLst/>
+          </a:prstGeom>
+          <a:solidFill>
+            <a:srgbClr val="22D3EE"/>
+          </a:solidFill>
+          <a:ln/>
+        </p:spPr>
+      </p:sp>
+      <p:sp>
+        <p:nvSpPr>
+          <p:cNvPr id="3" name="Text 1"/>
+          <p:cNvSpPr/>
+          <p:nvPr/>
+        </p:nvSpPr>
+        <p:spPr>
+          <a:xfrm>
+            <a:off x="1143000" y="457200"/>
+            <a:ext cx="8229600" cy="310896"/>
           </a:xfrm>
           <a:prstGeom prst="rect">
             <a:avLst/>
@@ -12658,7 +12796,46 @@
               <a:buNone/>
             </a:pPr>
             <a:r>
-              <a:rPr lang="en-US" sz="4000" b="1" dirty="0">
+              <a:rPr lang="en-US" sz="1200" b="1" spc="200" kern="0" dirty="0">
+                <a:solidFill>
+                  <a:srgbClr val="22D3EE"/>
+                </a:solidFill>
+                <a:latin typeface="Microsoft JhengHei" pitchFamily="34" charset="0"/>
+                <a:ea typeface="Microsoft JhengHei" pitchFamily="34" charset="-122"/>
+                <a:cs typeface="Microsoft JhengHei" pitchFamily="34" charset="-120"/>
+              </a:rPr>
+              <a:t>TRUST &amp; CONTROL</a:t>
+            </a:r>
+            <a:endParaRPr lang="en-US" sz="1200" dirty="0"/>
+          </a:p>
+        </p:txBody>
+      </p:sp>
+      <p:sp>
+        <p:nvSpPr>
+          <p:cNvPr id="4" name="Text 2"/>
+          <p:cNvSpPr/>
+          <p:nvPr/>
+        </p:nvSpPr>
+        <p:spPr>
+          <a:xfrm>
+            <a:off x="640080" y="786384"/>
+            <a:ext cx="10972800" cy="640080"/>
+          </a:xfrm>
+          <a:prstGeom prst="rect">
+            <a:avLst/>
+          </a:prstGeom>
+          <a:noFill/>
+          <a:ln/>
+        </p:spPr>
+        <p:txBody>
+          <a:bodyPr wrap="square" rtlCol="0" anchor="ctr"/>
+          <a:lstStyle/>
+          <a:p>
+            <a:pPr indent="0" marL="0">
+              <a:buNone/>
+            </a:pPr>
+            <a:r>
+              <a:rPr lang="en-US" sz="3000" b="1" dirty="0">
                 <a:solidFill>
                   <a:srgbClr val="FFFFFF"/>
                 </a:solidFill>
@@ -12666,76 +12843,37 @@
                 <a:ea typeface="Microsoft JhengHei" pitchFamily="34" charset="-122"/>
                 <a:cs typeface="Microsoft JhengHei" pitchFamily="34" charset="-120"/>
               </a:rPr>
-              <a:t>現在就開始練習</a:t>
-            </a:r>
-            <a:endParaRPr lang="en-US" sz="4000" dirty="0"/>
-          </a:p>
-        </p:txBody>
-      </p:sp>
-      <p:sp>
-        <p:nvSpPr>
-          <p:cNvPr id="3" name="Text 1"/>
-          <p:cNvSpPr/>
-          <p:nvPr/>
-        </p:nvSpPr>
-        <p:spPr>
-          <a:xfrm>
-            <a:off x="640080" y="2377440"/>
-            <a:ext cx="10058400" cy="548640"/>
-          </a:xfrm>
-          <a:prstGeom prst="rect">
-            <a:avLst/>
-          </a:prstGeom>
-          <a:noFill/>
-          <a:ln/>
-        </p:spPr>
-        <p:txBody>
-          <a:bodyPr wrap="square" rtlCol="0" anchor="ctr"/>
-          <a:lstStyle/>
-          <a:p>
-            <a:pPr indent="0" marL="0">
-              <a:buNone/>
-            </a:pPr>
-            <a:r>
-              <a:rPr lang="en-US" sz="1500" dirty="0">
-                <a:solidFill>
-                  <a:srgbClr val="C7CAEC"/>
-                </a:solidFill>
-                <a:latin typeface="Microsoft JhengHei" pitchFamily="34" charset="0"/>
-                <a:ea typeface="Microsoft JhengHei" pitchFamily="34" charset="-122"/>
-                <a:cs typeface="Microsoft JhengHei" pitchFamily="34" charset="-120"/>
-              </a:rPr>
-              <a:t>開始前請確認：每位使用者一張 M365 Copilot 授權、管理員已啟用用量計費（Copilot Credits，未啟用則無法存取）、租戶位於 Anthropic 支援地區；可在 Web/桌面/行動/Outlook/Teams 使用（本機瀏覽器工作僅限網頁版＋Edge 150 以上，且預設停用需管理員開啟）。</a:t>
-            </a:r>
-            <a:endParaRPr lang="en-US" sz="1500" dirty="0"/>
-          </a:p>
-        </p:txBody>
-      </p:sp>
-      <p:sp>
-        <p:nvSpPr>
-          <p:cNvPr id="4" name="Shape 2"/>
-          <p:cNvSpPr/>
-          <p:nvPr/>
-        </p:nvSpPr>
-        <p:spPr>
-          <a:xfrm>
-            <a:off x="640080" y="3017520"/>
-            <a:ext cx="8686800" cy="868680"/>
+              <a:t>自動化，但你始終是決策者</a:t>
+            </a:r>
+            <a:endParaRPr lang="en-US" sz="3000" dirty="0"/>
+          </a:p>
+        </p:txBody>
+      </p:sp>
+      <p:sp>
+        <p:nvSpPr>
+          <p:cNvPr id="5" name="Shape 3"/>
+          <p:cNvSpPr/>
+          <p:nvPr/>
+        </p:nvSpPr>
+        <p:spPr>
+          <a:xfrm>
+            <a:off x="640080" y="1874520"/>
+            <a:ext cx="777240" cy="777240"/>
           </a:xfrm>
           <a:prstGeom prst="roundRect">
             <a:avLst>
-              <a:gd name="adj" fmla="val 12632"/>
+              <a:gd name="adj" fmla="val 18824"/>
             </a:avLst>
           </a:prstGeom>
           <a:solidFill>
             <a:srgbClr val="FFFFFF">
-              <a:alpha val="10000"/>
+              <a:alpha val="14000"/>
             </a:srgbClr>
           </a:solidFill>
           <a:ln w="12700">
             <a:solidFill>
-              <a:srgbClr val="FFFFFF">
-                <a:alpha val="35000"/>
+              <a:srgbClr val="22D3EE">
+                <a:alpha val="60000"/>
               </a:srgbClr>
             </a:solidFill>
             <a:prstDash val="solid"/>
@@ -12744,7 +12882,7 @@
       </p:sp>
       <p:pic>
         <p:nvPicPr>
-          <p:cNvPr id="5" name="Image 0" descr="preencoded.png">    </p:cNvPr>
+          <p:cNvPr id="6" name="Image 0" descr="preencoded.png">    </p:cNvPr>
           <p:cNvPicPr>
             <a:picLocks noChangeAspect="1"/>
           </p:cNvPicPr>
@@ -12758,8 +12896,8 @@
         </p:blipFill>
         <p:spPr>
           <a:xfrm>
-            <a:off x="914400" y="3291840"/>
-            <a:ext cx="329184" cy="329184"/>
+            <a:off x="804672" y="2039112"/>
+            <a:ext cx="448056" cy="448056"/>
           </a:xfrm>
           <a:prstGeom prst="rect">
             <a:avLst/>
@@ -12768,14 +12906,14 @@
       </p:pic>
       <p:sp>
         <p:nvSpPr>
-          <p:cNvPr id="6" name="Text 3"/>
-          <p:cNvSpPr/>
-          <p:nvPr/>
-        </p:nvSpPr>
-        <p:spPr>
-          <a:xfrm>
-            <a:off x="1417320" y="3127248"/>
-            <a:ext cx="7315200" cy="320040"/>
+          <p:cNvPr id="7" name="Text 4"/>
+          <p:cNvSpPr/>
+          <p:nvPr/>
+        </p:nvSpPr>
+        <p:spPr>
+          <a:xfrm>
+            <a:off x="1691640" y="1856232"/>
+            <a:ext cx="6858000" cy="347472"/>
           </a:xfrm>
           <a:prstGeom prst="rect">
             <a:avLst/>
@@ -12791,7 +12929,7 @@
               <a:buNone/>
             </a:pPr>
             <a:r>
-              <a:rPr lang="en-US" sz="1400" b="1" dirty="0">
+              <a:rPr lang="en-US" sz="1700" b="1" dirty="0">
                 <a:solidFill>
                   <a:srgbClr val="FFFFFF"/>
                 </a:solidFill>
@@ -12799,24 +12937,22 @@
                 <a:ea typeface="Microsoft JhengHei" pitchFamily="34" charset="-122"/>
                 <a:cs typeface="Microsoft JhengHei" pitchFamily="34" charset="-120"/>
               </a:rPr>
-              <a:t>Cowork 練習手冊</a:t>
-            </a:r>
-            <a:endParaRPr lang="en-US" sz="1400" dirty="0"/>
-          </a:p>
-        </p:txBody>
-      </p:sp>
-      <p:sp>
-        <p:nvSpPr>
-          <p:cNvPr id="7" name="Text 4">
-            <a:hlinkClick r:id="rId3" tooltip=""/>
-          </p:cNvPr>
-          <p:cNvSpPr/>
-          <p:nvPr/>
-        </p:nvSpPr>
-        <p:spPr>
-          <a:xfrm>
-            <a:off x="1417320" y="3419856"/>
-            <a:ext cx="7772400" cy="320040"/>
+              <a:t>行動前審核</a:t>
+            </a:r>
+            <a:endParaRPr lang="en-US" sz="1700" dirty="0"/>
+          </a:p>
+        </p:txBody>
+      </p:sp>
+      <p:sp>
+        <p:nvSpPr>
+          <p:cNvPr id="8" name="Text 5"/>
+          <p:cNvSpPr/>
+          <p:nvPr/>
+        </p:nvSpPr>
+        <p:spPr>
+          <a:xfrm>
+            <a:off x="1691640" y="2203704"/>
+            <a:ext cx="9966960" cy="658368"/>
           </a:xfrm>
           <a:prstGeom prst="rect">
             <a:avLst/>
@@ -12829,33 +12965,196 @@
           <a:lstStyle/>
           <a:p>
             <a:pPr indent="0" marL="0">
-              <a:buNone/>
-            </a:pPr>
-            <a:r>
-              <a:rPr lang="en-US" sz="1300" u="sng" dirty="0">
-                <a:solidFill>
-                  <a:srgbClr val="9FE9FF"/>
-                </a:solidFill>
-                <a:latin typeface="Microsoft JhengHei" pitchFamily="34" charset="0"/>
-                <a:ea typeface="Microsoft JhengHei" pitchFamily="34" charset="-122"/>
-                <a:cs typeface="Microsoft JhengHei" pitchFamily="34" charset="-120"/>
-                <a:hlinkClick r:id="rId3" invalidUrl="" action="" tgtFrame="" tooltip="" history="1" highlightClick="0" endSnd="0">
-                  <a:extLst>
-                    <a:ext uri="{A12FA001-AC4F-418D-AE19-62706E023703}">
-                      <ahyp:hlinkClr xmlns:ahyp="http://schemas.microsoft.com/office/drawing/2018/hyperlinkcolor" val="tx"/>
-                    </a:ext>
-                  </a:extLst>
-                </a:hlinkClick>
-              </a:rPr>
-              <a:t>andyhung11.github.io/Copilot-in-1mins/CoworkPlaybook/</a:t>
+              <a:lnSpc>
+                <a:spcPct val="118000"/>
+              </a:lnSpc>
+              <a:buNone/>
+            </a:pPr>
+            <a:r>
+              <a:rPr lang="en-US" sz="1300" dirty="0">
+                <a:solidFill>
+                  <a:srgbClr val="C7CAEC"/>
+                </a:solidFill>
+                <a:latin typeface="Microsoft JhengHei" pitchFamily="34" charset="0"/>
+                <a:ea typeface="Microsoft JhengHei" pitchFamily="34" charset="-122"/>
+                <a:cs typeface="Microsoft JhengHei" pitchFamily="34" charset="-120"/>
+              </a:rPr>
+              <a:t>中高風險動作會顯示 RISK-LEVEL；寄信、發 Teams、建立會議等動作先攤開可編輯預覽，核准後才送出。</a:t>
             </a:r>
             <a:endParaRPr lang="en-US" sz="1300" dirty="0"/>
           </a:p>
         </p:txBody>
+      </p:sp>
+      <p:sp>
+        <p:nvSpPr>
+          <p:cNvPr id="9" name="Shape 6"/>
+          <p:cNvSpPr/>
+          <p:nvPr/>
+        </p:nvSpPr>
+        <p:spPr>
+          <a:xfrm>
+            <a:off x="640080" y="3044952"/>
+            <a:ext cx="777240" cy="777240"/>
+          </a:xfrm>
+          <a:prstGeom prst="roundRect">
+            <a:avLst>
+              <a:gd name="adj" fmla="val 18824"/>
+            </a:avLst>
+          </a:prstGeom>
+          <a:solidFill>
+            <a:srgbClr val="FFFFFF">
+              <a:alpha val="14000"/>
+            </a:srgbClr>
+          </a:solidFill>
+          <a:ln w="12700">
+            <a:solidFill>
+              <a:srgbClr val="22D3EE">
+                <a:alpha val="60000"/>
+              </a:srgbClr>
+            </a:solidFill>
+            <a:prstDash val="solid"/>
+          </a:ln>
+        </p:spPr>
       </p:sp>
       <p:pic>
         <p:nvPicPr>
-          <p:cNvPr id="8" name="Image 1" descr="preencoded.png">    </p:cNvPr>
+          <p:cNvPr id="10" name="Image 1" descr="preencoded.png">    </p:cNvPr>
+          <p:cNvPicPr>
+            <a:picLocks noChangeAspect="1"/>
+          </p:cNvPicPr>
+          <p:nvPr/>
+        </p:nvPicPr>
+        <p:blipFill>
+          <a:blip r:embed="rId3"/>
+          <a:stretch>
+            <a:fillRect/>
+          </a:stretch>
+        </p:blipFill>
+        <p:spPr>
+          <a:xfrm>
+            <a:off x="804672" y="3209544"/>
+            <a:ext cx="448056" cy="448056"/>
+          </a:xfrm>
+          <a:prstGeom prst="rect">
+            <a:avLst/>
+          </a:prstGeom>
+        </p:spPr>
+      </p:pic>
+      <p:sp>
+        <p:nvSpPr>
+          <p:cNvPr id="11" name="Text 7"/>
+          <p:cNvSpPr/>
+          <p:nvPr/>
+        </p:nvSpPr>
+        <p:spPr>
+          <a:xfrm>
+            <a:off x="1691640" y="3026664"/>
+            <a:ext cx="6858000" cy="347472"/>
+          </a:xfrm>
+          <a:prstGeom prst="rect">
+            <a:avLst/>
+          </a:prstGeom>
+          <a:noFill/>
+          <a:ln/>
+        </p:spPr>
+        <p:txBody>
+          <a:bodyPr wrap="square" rtlCol="0" anchor="ctr"/>
+          <a:lstStyle/>
+          <a:p>
+            <a:pPr indent="0" marL="0">
+              <a:buNone/>
+            </a:pPr>
+            <a:r>
+              <a:rPr lang="en-US" sz="1700" b="1" dirty="0">
+                <a:solidFill>
+                  <a:srgbClr val="FFFFFF"/>
+                </a:solidFill>
+                <a:latin typeface="Microsoft JhengHei" pitchFamily="34" charset="0"/>
+                <a:ea typeface="Microsoft JhengHei" pitchFamily="34" charset="-122"/>
+                <a:cs typeface="Microsoft JhengHei" pitchFamily="34" charset="-120"/>
+              </a:rPr>
+              <a:t>控制範圍清楚</a:t>
+            </a:r>
+            <a:endParaRPr lang="en-US" sz="1700" dirty="0"/>
+          </a:p>
+        </p:txBody>
+      </p:sp>
+      <p:sp>
+        <p:nvSpPr>
+          <p:cNvPr id="12" name="Text 8"/>
+          <p:cNvSpPr/>
+          <p:nvPr/>
+        </p:nvSpPr>
+        <p:spPr>
+          <a:xfrm>
+            <a:off x="1691640" y="3374136"/>
+            <a:ext cx="9966960" cy="658368"/>
+          </a:xfrm>
+          <a:prstGeom prst="rect">
+            <a:avLst/>
+          </a:prstGeom>
+          <a:noFill/>
+          <a:ln/>
+        </p:spPr>
+        <p:txBody>
+          <a:bodyPr wrap="square" rtlCol="0" anchor="ctr"/>
+          <a:lstStyle/>
+          <a:p>
+            <a:pPr indent="0" marL="0">
+              <a:lnSpc>
+                <a:spcPct val="118000"/>
+              </a:lnSpc>
+              <a:buNone/>
+            </a:pPr>
+            <a:r>
+              <a:rPr lang="en-US" sz="1300" dirty="0">
+                <a:solidFill>
+                  <a:srgbClr val="C7CAEC"/>
+                </a:solidFill>
+                <a:latin typeface="Microsoft JhengHei" pitchFamily="34" charset="0"/>
+                <a:ea typeface="Microsoft JhengHei" pitchFamily="34" charset="-122"/>
+                <a:cs typeface="Microsoft JhengHei" pitchFamily="34" charset="-120"/>
+              </a:rPr>
+              <a:t>don’t ask again 可限定 per-recipient、per-domain 或 always；任務可軟／硬暫停、恢復或取消。</a:t>
+            </a:r>
+            <a:endParaRPr lang="en-US" sz="1300" dirty="0"/>
+          </a:p>
+        </p:txBody>
+      </p:sp>
+      <p:sp>
+        <p:nvSpPr>
+          <p:cNvPr id="13" name="Shape 9"/>
+          <p:cNvSpPr/>
+          <p:nvPr/>
+        </p:nvSpPr>
+        <p:spPr>
+          <a:xfrm>
+            <a:off x="640080" y="4215384"/>
+            <a:ext cx="777240" cy="777240"/>
+          </a:xfrm>
+          <a:prstGeom prst="roundRect">
+            <a:avLst>
+              <a:gd name="adj" fmla="val 18824"/>
+            </a:avLst>
+          </a:prstGeom>
+          <a:solidFill>
+            <a:srgbClr val="FFFFFF">
+              <a:alpha val="14000"/>
+            </a:srgbClr>
+          </a:solidFill>
+          <a:ln w="12700">
+            <a:solidFill>
+              <a:srgbClr val="22D3EE">
+                <a:alpha val="60000"/>
+              </a:srgbClr>
+            </a:solidFill>
+            <a:prstDash val="solid"/>
+          </a:ln>
+        </p:spPr>
+      </p:sp>
+      <p:pic>
+        <p:nvPicPr>
+          <p:cNvPr id="14" name="Image 2" descr="preencoded.png">    </p:cNvPr>
           <p:cNvPicPr>
             <a:picLocks noChangeAspect="1"/>
           </p:cNvPicPr>
@@ -12869,8 +13168,8 @@
         </p:blipFill>
         <p:spPr>
           <a:xfrm>
-            <a:off x="640080" y="4315968"/>
-            <a:ext cx="237744" cy="237744"/>
+            <a:off x="804672" y="4379976"/>
+            <a:ext cx="448056" cy="448056"/>
           </a:xfrm>
           <a:prstGeom prst="rect">
             <a:avLst/>
@@ -12879,14 +13178,14 @@
       </p:pic>
       <p:sp>
         <p:nvSpPr>
-          <p:cNvPr id="9" name="Text 5"/>
-          <p:cNvSpPr/>
-          <p:nvPr/>
-        </p:nvSpPr>
-        <p:spPr>
-          <a:xfrm>
-            <a:off x="1005840" y="4261104"/>
-            <a:ext cx="9144000" cy="365760"/>
+          <p:cNvPr id="15" name="Text 10"/>
+          <p:cNvSpPr/>
+          <p:nvPr/>
+        </p:nvSpPr>
+        <p:spPr>
+          <a:xfrm>
+            <a:off x="1691640" y="4197096"/>
+            <a:ext cx="6858000" cy="347472"/>
           </a:xfrm>
           <a:prstGeom prst="rect">
             <a:avLst/>
@@ -12902,23 +13201,96 @@
               <a:buNone/>
             </a:pPr>
             <a:r>
-              <a:rPr lang="en-US" sz="1400" dirty="0">
-                <a:solidFill>
-                  <a:srgbClr val="E3E5F7"/>
-                </a:solidFill>
-                <a:latin typeface="Microsoft JhengHei" pitchFamily="34" charset="0"/>
-                <a:ea typeface="Microsoft JhengHei" pitchFamily="34" charset="-122"/>
-                <a:cs typeface="Microsoft JhengHei" pitchFamily="34" charset="-120"/>
-              </a:rPr>
-              <a:t>挑一個最貼近你工作的情境開始</a:t>
-            </a:r>
-            <a:endParaRPr lang="en-US" sz="1400" dirty="0"/>
-          </a:p>
-        </p:txBody>
+              <a:rPr lang="en-US" sz="1700" b="1" dirty="0">
+                <a:solidFill>
+                  <a:srgbClr val="FFFFFF"/>
+                </a:solidFill>
+                <a:latin typeface="Microsoft JhengHei" pitchFamily="34" charset="0"/>
+                <a:ea typeface="Microsoft JhengHei" pitchFamily="34" charset="-122"/>
+                <a:cs typeface="Microsoft JhengHei" pitchFamily="34" charset="-120"/>
+              </a:rPr>
+              <a:t>自動化任務也有把關</a:t>
+            </a:r>
+            <a:endParaRPr lang="en-US" sz="1700" dirty="0"/>
+          </a:p>
+        </p:txBody>
+      </p:sp>
+      <p:sp>
+        <p:nvSpPr>
+          <p:cNvPr id="16" name="Text 11"/>
+          <p:cNvSpPr/>
+          <p:nvPr/>
+        </p:nvSpPr>
+        <p:spPr>
+          <a:xfrm>
+            <a:off x="1691640" y="4544568"/>
+            <a:ext cx="9966960" cy="658368"/>
+          </a:xfrm>
+          <a:prstGeom prst="rect">
+            <a:avLst/>
+          </a:prstGeom>
+          <a:noFill/>
+          <a:ln/>
+        </p:spPr>
+        <p:txBody>
+          <a:bodyPr wrap="square" rtlCol="0" anchor="ctr"/>
+          <a:lstStyle/>
+          <a:p>
+            <a:pPr indent="0" marL="0">
+              <a:lnSpc>
+                <a:spcPct val="118000"/>
+              </a:lnSpc>
+              <a:buNone/>
+            </a:pPr>
+            <a:r>
+              <a:rPr lang="en-US" sz="1300" dirty="0">
+                <a:solidFill>
+                  <a:srgbClr val="C7CAEC"/>
+                </a:solidFill>
+                <a:latin typeface="Microsoft JhengHei" pitchFamily="34" charset="0"/>
+                <a:ea typeface="Microsoft JhengHei" pitchFamily="34" charset="-122"/>
+                <a:cs typeface="Microsoft JhengHei" pitchFamily="34" charset="-120"/>
+              </a:rPr>
+              <a:t>排程提示與事件驅動任務有執行頻率限制與防迴圈保護；一律以建立者權限執行，且與其他 Cowork 活動一同記錄在統一稽核日誌，套用 Microsoft Purview 政策。</a:t>
+            </a:r>
+            <a:endParaRPr lang="en-US" sz="1300" dirty="0"/>
+          </a:p>
+        </p:txBody>
+      </p:sp>
+      <p:sp>
+        <p:nvSpPr>
+          <p:cNvPr id="17" name="Shape 12"/>
+          <p:cNvSpPr/>
+          <p:nvPr/>
+        </p:nvSpPr>
+        <p:spPr>
+          <a:xfrm>
+            <a:off x="640080" y="5385816"/>
+            <a:ext cx="777240" cy="777240"/>
+          </a:xfrm>
+          <a:prstGeom prst="roundRect">
+            <a:avLst>
+              <a:gd name="adj" fmla="val 18824"/>
+            </a:avLst>
+          </a:prstGeom>
+          <a:solidFill>
+            <a:srgbClr val="FFFFFF">
+              <a:alpha val="14000"/>
+            </a:srgbClr>
+          </a:solidFill>
+          <a:ln w="12700">
+            <a:solidFill>
+              <a:srgbClr val="22D3EE">
+                <a:alpha val="60000"/>
+              </a:srgbClr>
+            </a:solidFill>
+            <a:prstDash val="solid"/>
+          </a:ln>
+        </p:spPr>
       </p:sp>
       <p:pic>
         <p:nvPicPr>
-          <p:cNvPr id="10" name="Image 2" descr="preencoded.png">    </p:cNvPr>
+          <p:cNvPr id="18" name="Image 3" descr="preencoded.png">    </p:cNvPr>
           <p:cNvPicPr>
             <a:picLocks noChangeAspect="1"/>
           </p:cNvPicPr>
@@ -12932,8 +13304,8 @@
         </p:blipFill>
         <p:spPr>
           <a:xfrm>
-            <a:off x="640080" y="4791456"/>
-            <a:ext cx="237744" cy="237744"/>
+            <a:off x="804672" y="5550408"/>
+            <a:ext cx="448056" cy="448056"/>
           </a:xfrm>
           <a:prstGeom prst="rect">
             <a:avLst/>
@@ -12942,14 +13314,14 @@
       </p:pic>
       <p:sp>
         <p:nvSpPr>
-          <p:cNvPr id="11" name="Text 6"/>
-          <p:cNvSpPr/>
-          <p:nvPr/>
-        </p:nvSpPr>
-        <p:spPr>
-          <a:xfrm>
-            <a:off x="1005840" y="4736592"/>
-            <a:ext cx="9144000" cy="365760"/>
+          <p:cNvPr id="19" name="Text 13"/>
+          <p:cNvSpPr/>
+          <p:nvPr/>
+        </p:nvSpPr>
+        <p:spPr>
+          <a:xfrm>
+            <a:off x="1691640" y="5367528"/>
+            <a:ext cx="6858000" cy="347472"/>
           </a:xfrm>
           <a:prstGeom prst="rect">
             <a:avLst/>
@@ -12965,54 +13337,30 @@
               <a:buNone/>
             </a:pPr>
             <a:r>
-              <a:rPr lang="en-US" sz="1400" dirty="0">
-                <a:solidFill>
-                  <a:srgbClr val="E3E5F7"/>
-                </a:solidFill>
-                <a:latin typeface="Microsoft JhengHei" pitchFamily="34" charset="0"/>
-                <a:ea typeface="Microsoft JhengHei" pitchFamily="34" charset="-122"/>
-                <a:cs typeface="Microsoft JhengHei" pitchFamily="34" charset="-120"/>
-              </a:rPr>
-              <a:t>自訂技能放 OneDrive /Documents/Cowork/skills/ 的 SKILL.md（最多 50 個、每個 1MB）</a:t>
-            </a:r>
-            <a:endParaRPr lang="en-US" sz="1400" dirty="0"/>
-          </a:p>
-        </p:txBody>
-      </p:sp>
-      <p:pic>
-        <p:nvPicPr>
-          <p:cNvPr id="12" name="Image 3" descr="preencoded.png">    </p:cNvPr>
-          <p:cNvPicPr>
-            <a:picLocks noChangeAspect="1"/>
-          </p:cNvPicPr>
-          <p:nvPr/>
-        </p:nvPicPr>
-        <p:blipFill>
-          <a:blip r:embed="rId6"/>
-          <a:stretch>
-            <a:fillRect/>
-          </a:stretch>
-        </p:blipFill>
-        <p:spPr>
-          <a:xfrm>
-            <a:off x="640080" y="5266944"/>
-            <a:ext cx="237744" cy="237744"/>
-          </a:xfrm>
-          <a:prstGeom prst="rect">
-            <a:avLst/>
-          </a:prstGeom>
-        </p:spPr>
-      </p:pic>
-      <p:sp>
-        <p:nvSpPr>
-          <p:cNvPr id="13" name="Text 7"/>
-          <p:cNvSpPr/>
-          <p:nvPr/>
-        </p:nvSpPr>
-        <p:spPr>
-          <a:xfrm>
-            <a:off x="1005840" y="5212080"/>
-            <a:ext cx="9144000" cy="365760"/>
+              <a:rPr lang="en-US" sz="1700" b="1" dirty="0">
+                <a:solidFill>
+                  <a:srgbClr val="FFFFFF"/>
+                </a:solidFill>
+                <a:latin typeface="Microsoft JhengHei" pitchFamily="34" charset="0"/>
+                <a:ea typeface="Microsoft JhengHei" pitchFamily="34" charset="-122"/>
+                <a:cs typeface="Microsoft JhengHei" pitchFamily="34" charset="-120"/>
+              </a:rPr>
+              <a:t>限制也要知道</a:t>
+            </a:r>
+            <a:endParaRPr lang="en-US" sz="1700" dirty="0"/>
+          </a:p>
+        </p:txBody>
+      </p:sp>
+      <p:sp>
+        <p:nvSpPr>
+          <p:cNvPr id="20" name="Text 14"/>
+          <p:cNvSpPr/>
+          <p:nvPr/>
+        </p:nvSpPr>
+        <p:spPr>
+          <a:xfrm>
+            <a:off x="1691640" y="5715000"/>
+            <a:ext cx="9966960" cy="658368"/>
           </a:xfrm>
           <a:prstGeom prst="rect">
             <a:avLst/>
@@ -13025,83 +13373,101 @@
           <a:lstStyle/>
           <a:p>
             <a:pPr indent="0" marL="0">
-              <a:buNone/>
-            </a:pPr>
-            <a:r>
-              <a:rPr lang="en-US" sz="1400" dirty="0">
-                <a:solidFill>
-                  <a:srgbClr val="E3E5F7"/>
-                </a:solidFill>
-                <a:latin typeface="Microsoft JhengHei" pitchFamily="34" charset="0"/>
-                <a:ea typeface="Microsoft JhengHei" pitchFamily="34" charset="-122"/>
-                <a:cs typeface="Microsoft JhengHei" pitchFamily="34" charset="-120"/>
-              </a:rPr>
-              <a:t>模型選擇器：Auto（預設）、GPT 5.5 Frontier、GPT 5.6 Sol／Terra、Opus 5、Sonnet 5、Fable 5（預覽・預設關閉）</a:t>
-            </a:r>
-            <a:endParaRPr lang="en-US" sz="1400" dirty="0"/>
-          </a:p>
-        </p:txBody>
-      </p:sp>
-      <p:pic>
-        <p:nvPicPr>
-          <p:cNvPr id="14" name="Image 4" descr="preencoded.png">    </p:cNvPr>
-          <p:cNvPicPr>
-            <a:picLocks noChangeAspect="1"/>
-          </p:cNvPicPr>
-          <p:nvPr/>
-        </p:nvPicPr>
-        <p:blipFill>
-          <a:blip r:embed="rId7"/>
-          <a:stretch>
-            <a:fillRect/>
-          </a:stretch>
-        </p:blipFill>
-        <p:spPr>
-          <a:xfrm>
-            <a:off x="640080" y="5742432"/>
-            <a:ext cx="237744" cy="237744"/>
-          </a:xfrm>
-          <a:prstGeom prst="rect">
-            <a:avLst/>
-          </a:prstGeom>
-        </p:spPr>
-      </p:pic>
-      <p:sp>
-        <p:nvSpPr>
-          <p:cNvPr id="15" name="Text 8"/>
-          <p:cNvSpPr/>
-          <p:nvPr/>
-        </p:nvSpPr>
-        <p:spPr>
-          <a:xfrm>
-            <a:off x="1005840" y="5687568"/>
-            <a:ext cx="9144000" cy="365760"/>
-          </a:xfrm>
-          <a:prstGeom prst="rect">
-            <a:avLst/>
-          </a:prstGeom>
-          <a:noFill/>
-          <a:ln/>
-        </p:spPr>
-        <p:txBody>
-          <a:bodyPr wrap="square" rtlCol="0" anchor="ctr"/>
-          <a:lstStyle/>
-          <a:p>
-            <a:pPr indent="0" marL="0">
-              <a:buNone/>
-            </a:pPr>
-            <a:r>
-              <a:rPr lang="en-US" sz="1400" dirty="0">
-                <a:solidFill>
-                  <a:srgbClr val="E3E5F7"/>
-                </a:solidFill>
-                <a:latin typeface="Microsoft JhengHei" pitchFamily="34" charset="0"/>
-                <a:ea typeface="Microsoft JhengHei" pitchFamily="34" charset="-122"/>
-                <a:cs typeface="Microsoft JhengHei" pitchFamily="34" charset="-120"/>
-              </a:rPr>
-              <a:t>想要自動觸發？到「Automations」頁設定排程提示（上限 5 個）或事件觸發任務（收信／被 @提及）</a:t>
-            </a:r>
-            <a:endParaRPr lang="en-US" sz="1400" dirty="0"/>
+              <a:lnSpc>
+                <a:spcPct val="118000"/>
+              </a:lnSpc>
+              <a:buNone/>
+            </a:pPr>
+            <a:r>
+              <a:rPr lang="en-US" sz="1300" dirty="0">
+                <a:solidFill>
+                  <a:srgbClr val="C7CAEC"/>
+                </a:solidFill>
+                <a:latin typeface="Microsoft JhengHei" pitchFamily="34" charset="0"/>
+                <a:ea typeface="Microsoft JhengHei" pitchFamily="34" charset="-122"/>
+                <a:cs typeface="Microsoft JhengHei" pitchFamily="34" charset="-120"/>
+              </a:rPr>
+              <a:t>不能存取本機檔案、刪除 OneDrive/SharePoint 檔案或讀取加密檔；附件 &lt;200MB；自訂技能與第三方 plugin 未經 Microsoft 驗證，需自行審閱。官方明列不適用於「免人工審查即需保證正確」的用途。</a:t>
+            </a:r>
+            <a:endParaRPr lang="en-US" sz="1300" dirty="0"/>
+          </a:p>
+        </p:txBody>
+      </p:sp>
+      <p:sp>
+        <p:nvSpPr>
+          <p:cNvPr id="21" name="Text 15"/>
+          <p:cNvSpPr/>
+          <p:nvPr/>
+        </p:nvSpPr>
+        <p:spPr>
+          <a:xfrm>
+            <a:off x="640080" y="6473952"/>
+            <a:ext cx="5486400" cy="274320"/>
+          </a:xfrm>
+          <a:prstGeom prst="rect">
+            <a:avLst/>
+          </a:prstGeom>
+          <a:noFill/>
+          <a:ln/>
+        </p:spPr>
+        <p:txBody>
+          <a:bodyPr wrap="square" rtlCol="0" anchor="ctr"/>
+          <a:lstStyle/>
+          <a:p>
+            <a:pPr algn="l" indent="0" marL="0">
+              <a:buNone/>
+            </a:pPr>
+            <a:r>
+              <a:rPr lang="en-US" sz="900" dirty="0">
+                <a:solidFill>
+                  <a:srgbClr val="8A8FB5"/>
+                </a:solidFill>
+                <a:latin typeface="Microsoft JhengHei" pitchFamily="34" charset="0"/>
+                <a:ea typeface="Microsoft JhengHei" pitchFamily="34" charset="-122"/>
+                <a:cs typeface="Microsoft JhengHei" pitchFamily="34" charset="-120"/>
+              </a:rPr>
+              <a:t>Microsoft 365 Copilot Cowork</a:t>
+            </a:r>
+            <a:endParaRPr lang="en-US" sz="900" dirty="0"/>
+          </a:p>
+        </p:txBody>
+      </p:sp>
+      <p:sp>
+        <p:nvSpPr>
+          <p:cNvPr id="22" name="Text 16"/>
+          <p:cNvSpPr/>
+          <p:nvPr/>
+        </p:nvSpPr>
+        <p:spPr>
+          <a:xfrm>
+            <a:off x="11002975" y="6473952"/>
+            <a:ext cx="548640" cy="274320"/>
+          </a:xfrm>
+          <a:prstGeom prst="rect">
+            <a:avLst/>
+          </a:prstGeom>
+          <a:noFill/>
+          <a:ln/>
+        </p:spPr>
+        <p:txBody>
+          <a:bodyPr wrap="square" rtlCol="0" anchor="ctr"/>
+          <a:lstStyle/>
+          <a:p>
+            <a:pPr algn="r" indent="0" marL="0">
+              <a:buNone/>
+            </a:pPr>
+            <a:r>
+              <a:rPr lang="en-US" sz="900" dirty="0">
+                <a:solidFill>
+                  <a:srgbClr val="8A8FB5"/>
+                </a:solidFill>
+                <a:latin typeface="Microsoft JhengHei" pitchFamily="34" charset="0"/>
+                <a:ea typeface="Microsoft JhengHei" pitchFamily="34" charset="-122"/>
+                <a:cs typeface="Microsoft JhengHei" pitchFamily="34" charset="-120"/>
+              </a:rPr>
+              <a:t>19</a:t>
+            </a:r>
+            <a:endParaRPr lang="en-US" sz="900" dirty="0"/>
           </a:p>
         </p:txBody>
       </p:sp>
@@ -13152,6 +13518,517 @@
         </p:nvSpPr>
         <p:spPr>
           <a:xfrm>
+            <a:off x="640080" y="1371600"/>
+            <a:ext cx="10058400" cy="822960"/>
+          </a:xfrm>
+          <a:prstGeom prst="rect">
+            <a:avLst/>
+          </a:prstGeom>
+          <a:noFill/>
+          <a:ln/>
+        </p:spPr>
+        <p:txBody>
+          <a:bodyPr wrap="square" rtlCol="0" anchor="ctr"/>
+          <a:lstStyle/>
+          <a:p>
+            <a:pPr indent="0" marL="0">
+              <a:buNone/>
+            </a:pPr>
+            <a:r>
+              <a:rPr lang="en-US" sz="4000" b="1" dirty="0">
+                <a:solidFill>
+                  <a:srgbClr val="FFFFFF"/>
+                </a:solidFill>
+                <a:latin typeface="Microsoft JhengHei" pitchFamily="34" charset="0"/>
+                <a:ea typeface="Microsoft JhengHei" pitchFamily="34" charset="-122"/>
+                <a:cs typeface="Microsoft JhengHei" pitchFamily="34" charset="-120"/>
+              </a:rPr>
+              <a:t>現在就開始練習</a:t>
+            </a:r>
+            <a:endParaRPr lang="en-US" sz="4000" dirty="0"/>
+          </a:p>
+        </p:txBody>
+      </p:sp>
+      <p:sp>
+        <p:nvSpPr>
+          <p:cNvPr id="3" name="Text 1"/>
+          <p:cNvSpPr/>
+          <p:nvPr/>
+        </p:nvSpPr>
+        <p:spPr>
+          <a:xfrm>
+            <a:off x="640080" y="2377440"/>
+            <a:ext cx="10058400" cy="548640"/>
+          </a:xfrm>
+          <a:prstGeom prst="rect">
+            <a:avLst/>
+          </a:prstGeom>
+          <a:noFill/>
+          <a:ln/>
+        </p:spPr>
+        <p:txBody>
+          <a:bodyPr wrap="square" rtlCol="0" anchor="ctr"/>
+          <a:lstStyle/>
+          <a:p>
+            <a:pPr indent="0" marL="0">
+              <a:buNone/>
+            </a:pPr>
+            <a:r>
+              <a:rPr lang="en-US" sz="1500" dirty="0">
+                <a:solidFill>
+                  <a:srgbClr val="C7CAEC"/>
+                </a:solidFill>
+                <a:latin typeface="Microsoft JhengHei" pitchFamily="34" charset="0"/>
+                <a:ea typeface="Microsoft JhengHei" pitchFamily="34" charset="-122"/>
+                <a:cs typeface="Microsoft JhengHei" pitchFamily="34" charset="-120"/>
+              </a:rPr>
+              <a:t>開始前請確認：每位使用者一張 M365 Copilot 授權、管理員已啟用用量計費（Copilot Credits，未啟用則無法存取）、租戶位於 Anthropic 支援地區；可在 Web/桌面/行動/Outlook/Teams 使用（本機瀏覽器工作僅限網頁版＋Edge 150 以上，且預設停用需管理員開啟）。</a:t>
+            </a:r>
+            <a:endParaRPr lang="en-US" sz="1500" dirty="0"/>
+          </a:p>
+        </p:txBody>
+      </p:sp>
+      <p:sp>
+        <p:nvSpPr>
+          <p:cNvPr id="4" name="Shape 2"/>
+          <p:cNvSpPr/>
+          <p:nvPr/>
+        </p:nvSpPr>
+        <p:spPr>
+          <a:xfrm>
+            <a:off x="640080" y="3017520"/>
+            <a:ext cx="8686800" cy="868680"/>
+          </a:xfrm>
+          <a:prstGeom prst="roundRect">
+            <a:avLst>
+              <a:gd name="adj" fmla="val 12632"/>
+            </a:avLst>
+          </a:prstGeom>
+          <a:solidFill>
+            <a:srgbClr val="FFFFFF">
+              <a:alpha val="10000"/>
+            </a:srgbClr>
+          </a:solidFill>
+          <a:ln w="12700">
+            <a:solidFill>
+              <a:srgbClr val="FFFFFF">
+                <a:alpha val="35000"/>
+              </a:srgbClr>
+            </a:solidFill>
+            <a:prstDash val="solid"/>
+          </a:ln>
+        </p:spPr>
+      </p:sp>
+      <p:pic>
+        <p:nvPicPr>
+          <p:cNvPr id="5" name="Image 0" descr="preencoded.png">    </p:cNvPr>
+          <p:cNvPicPr>
+            <a:picLocks noChangeAspect="1"/>
+          </p:cNvPicPr>
+          <p:nvPr/>
+        </p:nvPicPr>
+        <p:blipFill>
+          <a:blip r:embed="rId2"/>
+          <a:stretch>
+            <a:fillRect/>
+          </a:stretch>
+        </p:blipFill>
+        <p:spPr>
+          <a:xfrm>
+            <a:off x="914400" y="3291840"/>
+            <a:ext cx="329184" cy="329184"/>
+          </a:xfrm>
+          <a:prstGeom prst="rect">
+            <a:avLst/>
+          </a:prstGeom>
+        </p:spPr>
+      </p:pic>
+      <p:sp>
+        <p:nvSpPr>
+          <p:cNvPr id="6" name="Text 3"/>
+          <p:cNvSpPr/>
+          <p:nvPr/>
+        </p:nvSpPr>
+        <p:spPr>
+          <a:xfrm>
+            <a:off x="1417320" y="3127248"/>
+            <a:ext cx="7315200" cy="320040"/>
+          </a:xfrm>
+          <a:prstGeom prst="rect">
+            <a:avLst/>
+          </a:prstGeom>
+          <a:noFill/>
+          <a:ln/>
+        </p:spPr>
+        <p:txBody>
+          <a:bodyPr wrap="square" rtlCol="0" anchor="ctr"/>
+          <a:lstStyle/>
+          <a:p>
+            <a:pPr indent="0" marL="0">
+              <a:buNone/>
+            </a:pPr>
+            <a:r>
+              <a:rPr lang="en-US" sz="1400" b="1" dirty="0">
+                <a:solidFill>
+                  <a:srgbClr val="FFFFFF"/>
+                </a:solidFill>
+                <a:latin typeface="Microsoft JhengHei" pitchFamily="34" charset="0"/>
+                <a:ea typeface="Microsoft JhengHei" pitchFamily="34" charset="-122"/>
+                <a:cs typeface="Microsoft JhengHei" pitchFamily="34" charset="-120"/>
+              </a:rPr>
+              <a:t>Cowork 練習手冊</a:t>
+            </a:r>
+            <a:endParaRPr lang="en-US" sz="1400" dirty="0"/>
+          </a:p>
+        </p:txBody>
+      </p:sp>
+      <p:sp>
+        <p:nvSpPr>
+          <p:cNvPr id="7" name="Text 4">
+            <a:hlinkClick r:id="rId3" tooltip=""/>
+          </p:cNvPr>
+          <p:cNvSpPr/>
+          <p:nvPr/>
+        </p:nvSpPr>
+        <p:spPr>
+          <a:xfrm>
+            <a:off x="1417320" y="3419856"/>
+            <a:ext cx="7772400" cy="320040"/>
+          </a:xfrm>
+          <a:prstGeom prst="rect">
+            <a:avLst/>
+          </a:prstGeom>
+          <a:noFill/>
+          <a:ln/>
+        </p:spPr>
+        <p:txBody>
+          <a:bodyPr wrap="square" rtlCol="0" anchor="ctr"/>
+          <a:lstStyle/>
+          <a:p>
+            <a:pPr indent="0" marL="0">
+              <a:buNone/>
+            </a:pPr>
+            <a:r>
+              <a:rPr lang="en-US" sz="1300" u="sng" dirty="0">
+                <a:solidFill>
+                  <a:srgbClr val="9FE9FF"/>
+                </a:solidFill>
+                <a:latin typeface="Microsoft JhengHei" pitchFamily="34" charset="0"/>
+                <a:ea typeface="Microsoft JhengHei" pitchFamily="34" charset="-122"/>
+                <a:cs typeface="Microsoft JhengHei" pitchFamily="34" charset="-120"/>
+                <a:hlinkClick r:id="rId3" invalidUrl="" action="" tgtFrame="" tooltip="" history="1" highlightClick="0" endSnd="0">
+                  <a:extLst>
+                    <a:ext uri="{A12FA001-AC4F-418D-AE19-62706E023703}">
+                      <ahyp:hlinkClr xmlns:ahyp="http://schemas.microsoft.com/office/drawing/2018/hyperlinkcolor" val="tx"/>
+                    </a:ext>
+                  </a:extLst>
+                </a:hlinkClick>
+              </a:rPr>
+              <a:t>andyhung11.github.io/Copilot-in-1mins/CoworkPlaybook/</a:t>
+            </a:r>
+            <a:endParaRPr lang="en-US" sz="1300" dirty="0"/>
+          </a:p>
+        </p:txBody>
+      </p:sp>
+      <p:pic>
+        <p:nvPicPr>
+          <p:cNvPr id="8" name="Image 1" descr="preencoded.png">    </p:cNvPr>
+          <p:cNvPicPr>
+            <a:picLocks noChangeAspect="1"/>
+          </p:cNvPicPr>
+          <p:nvPr/>
+        </p:nvPicPr>
+        <p:blipFill>
+          <a:blip r:embed="rId4"/>
+          <a:stretch>
+            <a:fillRect/>
+          </a:stretch>
+        </p:blipFill>
+        <p:spPr>
+          <a:xfrm>
+            <a:off x="640080" y="4315968"/>
+            <a:ext cx="237744" cy="237744"/>
+          </a:xfrm>
+          <a:prstGeom prst="rect">
+            <a:avLst/>
+          </a:prstGeom>
+        </p:spPr>
+      </p:pic>
+      <p:sp>
+        <p:nvSpPr>
+          <p:cNvPr id="9" name="Text 5"/>
+          <p:cNvSpPr/>
+          <p:nvPr/>
+        </p:nvSpPr>
+        <p:spPr>
+          <a:xfrm>
+            <a:off x="1005840" y="4261104"/>
+            <a:ext cx="9144000" cy="365760"/>
+          </a:xfrm>
+          <a:prstGeom prst="rect">
+            <a:avLst/>
+          </a:prstGeom>
+          <a:noFill/>
+          <a:ln/>
+        </p:spPr>
+        <p:txBody>
+          <a:bodyPr wrap="square" rtlCol="0" anchor="ctr"/>
+          <a:lstStyle/>
+          <a:p>
+            <a:pPr indent="0" marL="0">
+              <a:buNone/>
+            </a:pPr>
+            <a:r>
+              <a:rPr lang="en-US" sz="1400" dirty="0">
+                <a:solidFill>
+                  <a:srgbClr val="E3E5F7"/>
+                </a:solidFill>
+                <a:latin typeface="Microsoft JhengHei" pitchFamily="34" charset="0"/>
+                <a:ea typeface="Microsoft JhengHei" pitchFamily="34" charset="-122"/>
+                <a:cs typeface="Microsoft JhengHei" pitchFamily="34" charset="-120"/>
+              </a:rPr>
+              <a:t>挑一個最貼近你工作的情境開始</a:t>
+            </a:r>
+            <a:endParaRPr lang="en-US" sz="1400" dirty="0"/>
+          </a:p>
+        </p:txBody>
+      </p:sp>
+      <p:pic>
+        <p:nvPicPr>
+          <p:cNvPr id="10" name="Image 2" descr="preencoded.png">    </p:cNvPr>
+          <p:cNvPicPr>
+            <a:picLocks noChangeAspect="1"/>
+          </p:cNvPicPr>
+          <p:nvPr/>
+        </p:nvPicPr>
+        <p:blipFill>
+          <a:blip r:embed="rId5"/>
+          <a:stretch>
+            <a:fillRect/>
+          </a:stretch>
+        </p:blipFill>
+        <p:spPr>
+          <a:xfrm>
+            <a:off x="640080" y="4791456"/>
+            <a:ext cx="237744" cy="237744"/>
+          </a:xfrm>
+          <a:prstGeom prst="rect">
+            <a:avLst/>
+          </a:prstGeom>
+        </p:spPr>
+      </p:pic>
+      <p:sp>
+        <p:nvSpPr>
+          <p:cNvPr id="11" name="Text 6"/>
+          <p:cNvSpPr/>
+          <p:nvPr/>
+        </p:nvSpPr>
+        <p:spPr>
+          <a:xfrm>
+            <a:off x="1005840" y="4736592"/>
+            <a:ext cx="9144000" cy="365760"/>
+          </a:xfrm>
+          <a:prstGeom prst="rect">
+            <a:avLst/>
+          </a:prstGeom>
+          <a:noFill/>
+          <a:ln/>
+        </p:spPr>
+        <p:txBody>
+          <a:bodyPr wrap="square" rtlCol="0" anchor="ctr"/>
+          <a:lstStyle/>
+          <a:p>
+            <a:pPr indent="0" marL="0">
+              <a:buNone/>
+            </a:pPr>
+            <a:r>
+              <a:rPr lang="en-US" sz="1400" dirty="0">
+                <a:solidFill>
+                  <a:srgbClr val="E3E5F7"/>
+                </a:solidFill>
+                <a:latin typeface="Microsoft JhengHei" pitchFamily="34" charset="0"/>
+                <a:ea typeface="Microsoft JhengHei" pitchFamily="34" charset="-122"/>
+                <a:cs typeface="Microsoft JhengHei" pitchFamily="34" charset="-120"/>
+              </a:rPr>
+              <a:t>自訂技能放 OneDrive /Documents/Cowork/skills/ 的 SKILL.md（最多 50 個、每個 1MB）</a:t>
+            </a:r>
+            <a:endParaRPr lang="en-US" sz="1400" dirty="0"/>
+          </a:p>
+        </p:txBody>
+      </p:sp>
+      <p:pic>
+        <p:nvPicPr>
+          <p:cNvPr id="12" name="Image 3" descr="preencoded.png">    </p:cNvPr>
+          <p:cNvPicPr>
+            <a:picLocks noChangeAspect="1"/>
+          </p:cNvPicPr>
+          <p:nvPr/>
+        </p:nvPicPr>
+        <p:blipFill>
+          <a:blip r:embed="rId6"/>
+          <a:stretch>
+            <a:fillRect/>
+          </a:stretch>
+        </p:blipFill>
+        <p:spPr>
+          <a:xfrm>
+            <a:off x="640080" y="5266944"/>
+            <a:ext cx="237744" cy="237744"/>
+          </a:xfrm>
+          <a:prstGeom prst="rect">
+            <a:avLst/>
+          </a:prstGeom>
+        </p:spPr>
+      </p:pic>
+      <p:sp>
+        <p:nvSpPr>
+          <p:cNvPr id="13" name="Text 7"/>
+          <p:cNvSpPr/>
+          <p:nvPr/>
+        </p:nvSpPr>
+        <p:spPr>
+          <a:xfrm>
+            <a:off x="1005840" y="5212080"/>
+            <a:ext cx="9144000" cy="365760"/>
+          </a:xfrm>
+          <a:prstGeom prst="rect">
+            <a:avLst/>
+          </a:prstGeom>
+          <a:noFill/>
+          <a:ln/>
+        </p:spPr>
+        <p:txBody>
+          <a:bodyPr wrap="square" rtlCol="0" anchor="ctr"/>
+          <a:lstStyle/>
+          <a:p>
+            <a:pPr indent="0" marL="0">
+              <a:buNone/>
+            </a:pPr>
+            <a:r>
+              <a:rPr lang="en-US" sz="1400" dirty="0">
+                <a:solidFill>
+                  <a:srgbClr val="E3E5F7"/>
+                </a:solidFill>
+                <a:latin typeface="Microsoft JhengHei" pitchFamily="34" charset="0"/>
+                <a:ea typeface="Microsoft JhengHei" pitchFamily="34" charset="-122"/>
+                <a:cs typeface="Microsoft JhengHei" pitchFamily="34" charset="-120"/>
+              </a:rPr>
+              <a:t>模型選擇器：Auto（預設）、GPT 5.5 Frontier、GPT 5.6 Sol／Terra、Opus 5、Sonnet 5、Fable 5（預覽・預設關閉）</a:t>
+            </a:r>
+            <a:endParaRPr lang="en-US" sz="1400" dirty="0"/>
+          </a:p>
+        </p:txBody>
+      </p:sp>
+      <p:pic>
+        <p:nvPicPr>
+          <p:cNvPr id="14" name="Image 4" descr="preencoded.png">    </p:cNvPr>
+          <p:cNvPicPr>
+            <a:picLocks noChangeAspect="1"/>
+          </p:cNvPicPr>
+          <p:nvPr/>
+        </p:nvPicPr>
+        <p:blipFill>
+          <a:blip r:embed="rId7"/>
+          <a:stretch>
+            <a:fillRect/>
+          </a:stretch>
+        </p:blipFill>
+        <p:spPr>
+          <a:xfrm>
+            <a:off x="640080" y="5742432"/>
+            <a:ext cx="237744" cy="237744"/>
+          </a:xfrm>
+          <a:prstGeom prst="rect">
+            <a:avLst/>
+          </a:prstGeom>
+        </p:spPr>
+      </p:pic>
+      <p:sp>
+        <p:nvSpPr>
+          <p:cNvPr id="15" name="Text 8"/>
+          <p:cNvSpPr/>
+          <p:nvPr/>
+        </p:nvSpPr>
+        <p:spPr>
+          <a:xfrm>
+            <a:off x="1005840" y="5687568"/>
+            <a:ext cx="9144000" cy="365760"/>
+          </a:xfrm>
+          <a:prstGeom prst="rect">
+            <a:avLst/>
+          </a:prstGeom>
+          <a:noFill/>
+          <a:ln/>
+        </p:spPr>
+        <p:txBody>
+          <a:bodyPr wrap="square" rtlCol="0" anchor="ctr"/>
+          <a:lstStyle/>
+          <a:p>
+            <a:pPr indent="0" marL="0">
+              <a:buNone/>
+            </a:pPr>
+            <a:r>
+              <a:rPr lang="en-US" sz="1400" dirty="0">
+                <a:solidFill>
+                  <a:srgbClr val="E3E5F7"/>
+                </a:solidFill>
+                <a:latin typeface="Microsoft JhengHei" pitchFamily="34" charset="0"/>
+                <a:ea typeface="Microsoft JhengHei" pitchFamily="34" charset="-122"/>
+                <a:cs typeface="Microsoft JhengHei" pitchFamily="34" charset="-120"/>
+              </a:rPr>
+              <a:t>想要自動觸發？到「Automations」頁設定排程提示（上限 5 個）或事件觸發任務（收信／被 @提及）</a:t>
+            </a:r>
+            <a:endParaRPr lang="en-US" sz="1400" dirty="0"/>
+          </a:p>
+        </p:txBody>
+      </p:sp>
+    </p:spTree>
+  </p:cSld>
+  <p:clrMapOvr>
+    <a:masterClrMapping/>
+  </p:clrMapOvr>
+</p:sld>
+</file>
+
+<file path=ppt/slides/slide22.xml><?xml version="1.0" encoding="utf-8"?>
+<p:sld xmlns:a="http://schemas.openxmlformats.org/drawingml/2006/main" xmlns:r="http://schemas.openxmlformats.org/officeDocument/2006/relationships" xmlns:p="http://schemas.openxmlformats.org/presentationml/2006/main">
+  <p:cSld name="Slide 22">
+    <p:bg>
+      <p:bgPr>
+        <a:blipFill dpi="0" rotWithShape="1">
+          <a:blip r:embed="rId1">
+            <a:lum/>
+          </a:blip>
+          <a:srcRect/>
+          <a:stretch>
+            <a:fillRect/>
+          </a:stretch>
+        </a:blipFill>
+        <a:effectLst/>
+      </p:bgPr>
+    </p:bg>
+    <p:spTree>
+      <p:nvGrpSpPr>
+        <p:cNvPr id="1" name=""/>
+        <p:cNvGrpSpPr/>
+        <p:nvPr/>
+      </p:nvGrpSpPr>
+      <p:grpSpPr>
+        <a:xfrm>
+          <a:off x="0" y="0"/>
+          <a:ext cx="0" cy="0"/>
+          <a:chOff x="0" y="0"/>
+          <a:chExt cx="0" cy="0"/>
+        </a:xfrm>
+      </p:grpSpPr>
+      <p:sp>
+        <p:nvSpPr>
+          <p:cNvPr id="2" name="Text 0"/>
+          <p:cNvSpPr/>
+          <p:nvPr/>
+        </p:nvSpPr>
+        <p:spPr>
+          <a:xfrm>
             <a:off x="640080" y="2377440"/>
             <a:ext cx="10058400" cy="1097280"/>
           </a:xfrm>
@@ -18078,6 +18955,1516 @@
                 <a:ea typeface="Microsoft JhengHei" pitchFamily="34" charset="-122"/>
                 <a:cs typeface="Microsoft JhengHei" pitchFamily="34" charset="-120"/>
               </a:rPr>
+              <a:t>BEFORE YOU START</a:t>
+            </a:r>
+            <a:endParaRPr lang="en-US" sz="1200" dirty="0"/>
+          </a:p>
+        </p:txBody>
+      </p:sp>
+      <p:sp>
+        <p:nvSpPr>
+          <p:cNvPr id="4" name="Text 2"/>
+          <p:cNvSpPr/>
+          <p:nvPr/>
+        </p:nvSpPr>
+        <p:spPr>
+          <a:xfrm>
+            <a:off x="640080" y="786384"/>
+            <a:ext cx="10972800" cy="640080"/>
+          </a:xfrm>
+          <a:prstGeom prst="rect">
+            <a:avLst/>
+          </a:prstGeom>
+          <a:noFill/>
+          <a:ln/>
+        </p:spPr>
+        <p:txBody>
+          <a:bodyPr wrap="square" rtlCol="0" anchor="ctr"/>
+          <a:lstStyle/>
+          <a:p>
+            <a:pPr indent="0" marL="0">
+              <a:buNone/>
+            </a:pPr>
+            <a:r>
+              <a:rPr lang="en-US" sz="3000" b="1" dirty="0">
+                <a:solidFill>
+                  <a:srgbClr val="1E2235"/>
+                </a:solidFill>
+                <a:latin typeface="Microsoft JhengHei" pitchFamily="34" charset="0"/>
+                <a:ea typeface="Microsoft JhengHei" pitchFamily="34" charset="-122"/>
+                <a:cs typeface="Microsoft JhengHei" pitchFamily="34" charset="-120"/>
+              </a:rPr>
+              <a:t>練習環境準備</a:t>
+            </a:r>
+            <a:endParaRPr lang="en-US" sz="3000" dirty="0"/>
+          </a:p>
+        </p:txBody>
+      </p:sp>
+      <p:sp>
+        <p:nvSpPr>
+          <p:cNvPr id="5" name="Text 3"/>
+          <p:cNvSpPr/>
+          <p:nvPr/>
+        </p:nvSpPr>
+        <p:spPr>
+          <a:xfrm>
+            <a:off x="640080" y="1481328"/>
+            <a:ext cx="10972800" cy="329184"/>
+          </a:xfrm>
+          <a:prstGeom prst="rect">
+            <a:avLst/>
+          </a:prstGeom>
+          <a:noFill/>
+          <a:ln/>
+        </p:spPr>
+        <p:txBody>
+          <a:bodyPr wrap="square" rtlCol="0" anchor="ctr"/>
+          <a:lstStyle/>
+          <a:p>
+            <a:pPr indent="0" marL="0">
+              <a:buNone/>
+            </a:pPr>
+            <a:r>
+              <a:rPr lang="en-US" sz="1300" dirty="0">
+                <a:solidFill>
+                  <a:srgbClr val="5B6079"/>
+                </a:solidFill>
+                <a:latin typeface="Microsoft JhengHei" pitchFamily="34" charset="0"/>
+                <a:ea typeface="Microsoft JhengHei" pitchFamily="34" charset="-122"/>
+                <a:cs typeface="Microsoft JhengHei" pitchFamily="34" charset="-120"/>
+              </a:rPr>
+              <a:t>素材下載後拖進對話即可，不需事先放進 OneDrive · 準備時間 約 5 分鐘</a:t>
+            </a:r>
+            <a:endParaRPr lang="en-US" sz="1300" dirty="0"/>
+          </a:p>
+        </p:txBody>
+      </p:sp>
+      <p:sp>
+        <p:nvSpPr>
+          <p:cNvPr id="6" name="Shape 4"/>
+          <p:cNvSpPr/>
+          <p:nvPr/>
+        </p:nvSpPr>
+        <p:spPr>
+          <a:xfrm>
+            <a:off x="640080" y="1874520"/>
+            <a:ext cx="5272888" cy="914400"/>
+          </a:xfrm>
+          <a:prstGeom prst="rect">
+            <a:avLst/>
+          </a:prstGeom>
+          <a:solidFill>
+            <a:srgbClr val="FFFFFF"/>
+          </a:solidFill>
+          <a:ln w="12700">
+            <a:solidFill>
+              <a:srgbClr val="E4E7F2"/>
+            </a:solidFill>
+            <a:prstDash val="solid"/>
+          </a:ln>
+        </p:spPr>
+      </p:sp>
+      <p:sp>
+        <p:nvSpPr>
+          <p:cNvPr id="7" name="Shape 5"/>
+          <p:cNvSpPr/>
+          <p:nvPr/>
+        </p:nvSpPr>
+        <p:spPr>
+          <a:xfrm>
+            <a:off x="640080" y="1874520"/>
+            <a:ext cx="68580" cy="914400"/>
+          </a:xfrm>
+          <a:prstGeom prst="rect">
+            <a:avLst/>
+          </a:prstGeom>
+          <a:solidFill>
+            <a:srgbClr val="6366F1"/>
+          </a:solidFill>
+          <a:ln/>
+        </p:spPr>
+      </p:sp>
+      <p:sp>
+        <p:nvSpPr>
+          <p:cNvPr id="8" name="Text 6"/>
+          <p:cNvSpPr/>
+          <p:nvPr/>
+        </p:nvSpPr>
+        <p:spPr>
+          <a:xfrm>
+            <a:off x="804672" y="1929384"/>
+            <a:ext cx="411480" cy="329184"/>
+          </a:xfrm>
+          <a:prstGeom prst="rect">
+            <a:avLst/>
+          </a:prstGeom>
+          <a:noFill/>
+          <a:ln/>
+        </p:spPr>
+        <p:txBody>
+          <a:bodyPr wrap="square" rtlCol="0" anchor="ctr"/>
+          <a:lstStyle/>
+          <a:p>
+            <a:pPr algn="ctr" indent="0" marL="0">
+              <a:buNone/>
+            </a:pPr>
+            <a:r>
+              <a:rPr lang="en-US" sz="1500" dirty="0">
+                <a:solidFill>
+                  <a:srgbClr val="000000"/>
+                </a:solidFill>
+                <a:latin typeface="Microsoft JhengHei" pitchFamily="34" charset="0"/>
+                <a:ea typeface="Microsoft JhengHei" pitchFamily="34" charset="-122"/>
+                <a:cs typeface="Microsoft JhengHei" pitchFamily="34" charset="-120"/>
+              </a:rPr>
+              <a:t>📥</a:t>
+            </a:r>
+            <a:endParaRPr lang="en-US" sz="1500" dirty="0"/>
+          </a:p>
+        </p:txBody>
+      </p:sp>
+      <p:sp>
+        <p:nvSpPr>
+          <p:cNvPr id="9" name="Text 7"/>
+          <p:cNvSpPr/>
+          <p:nvPr/>
+        </p:nvSpPr>
+        <p:spPr>
+          <a:xfrm>
+            <a:off x="1243584" y="1920240"/>
+            <a:ext cx="4495648" cy="292608"/>
+          </a:xfrm>
+          <a:prstGeom prst="rect">
+            <a:avLst/>
+          </a:prstGeom>
+          <a:noFill/>
+          <a:ln/>
+        </p:spPr>
+        <p:txBody>
+          <a:bodyPr wrap="square" rtlCol="0" anchor="ctr"/>
+          <a:lstStyle/>
+          <a:p>
+            <a:pPr indent="0" marL="0">
+              <a:buNone/>
+            </a:pPr>
+            <a:r>
+              <a:rPr lang="en-US" sz="1250" b="1" dirty="0">
+                <a:solidFill>
+                  <a:srgbClr val="1E2235"/>
+                </a:solidFill>
+                <a:latin typeface="Microsoft JhengHei" pitchFamily="34" charset="0"/>
+                <a:ea typeface="Microsoft JhengHei" pitchFamily="34" charset="-122"/>
+                <a:cs typeface="Microsoft JhengHei" pitchFamily="34" charset="-120"/>
+              </a:rPr>
+              <a:t>下載範例檔</a:t>
+            </a:r>
+            <a:endParaRPr lang="en-US" sz="1250" dirty="0"/>
+          </a:p>
+        </p:txBody>
+      </p:sp>
+      <p:sp>
+        <p:nvSpPr>
+          <p:cNvPr id="10" name="Text 8"/>
+          <p:cNvSpPr/>
+          <p:nvPr/>
+        </p:nvSpPr>
+        <p:spPr>
+          <a:xfrm>
+            <a:off x="1243584" y="2194560"/>
+            <a:ext cx="4495648" cy="548640"/>
+          </a:xfrm>
+          <a:prstGeom prst="rect">
+            <a:avLst/>
+          </a:prstGeom>
+          <a:noFill/>
+          <a:ln/>
+        </p:spPr>
+        <p:txBody>
+          <a:bodyPr wrap="square" rtlCol="0" anchor="ctr"/>
+          <a:lstStyle/>
+          <a:p>
+            <a:pPr indent="0" marL="0">
+              <a:lnSpc>
+                <a:spcPct val="112000"/>
+              </a:lnSpc>
+              <a:buNone/>
+            </a:pPr>
+            <a:r>
+              <a:rPr lang="en-US" sz="1050" dirty="0">
+                <a:solidFill>
+                  <a:srgbClr val="5B6079"/>
+                </a:solidFill>
+                <a:latin typeface="Microsoft JhengHei" pitchFamily="34" charset="0"/>
+                <a:ea typeface="Microsoft JhengHei" pitchFamily="34" charset="-122"/>
+                <a:cs typeface="Microsoft JhengHei" pitchFamily="34" charset="-120"/>
+              </a:rPr>
+              <a:t>每個情境的〈參考檔案〉區都有下載連結，點了就存到你的電腦。</a:t>
+            </a:r>
+            <a:endParaRPr lang="en-US" sz="1050" dirty="0"/>
+          </a:p>
+        </p:txBody>
+      </p:sp>
+      <p:sp>
+        <p:nvSpPr>
+          <p:cNvPr id="11" name="Shape 9"/>
+          <p:cNvSpPr/>
+          <p:nvPr/>
+        </p:nvSpPr>
+        <p:spPr>
+          <a:xfrm>
+            <a:off x="6278728" y="1874520"/>
+            <a:ext cx="5272888" cy="914400"/>
+          </a:xfrm>
+          <a:prstGeom prst="rect">
+            <a:avLst/>
+          </a:prstGeom>
+          <a:solidFill>
+            <a:srgbClr val="FFFFFF"/>
+          </a:solidFill>
+          <a:ln w="12700">
+            <a:solidFill>
+              <a:srgbClr val="E4E7F2"/>
+            </a:solidFill>
+            <a:prstDash val="solid"/>
+          </a:ln>
+        </p:spPr>
+      </p:sp>
+      <p:sp>
+        <p:nvSpPr>
+          <p:cNvPr id="12" name="Shape 10"/>
+          <p:cNvSpPr/>
+          <p:nvPr/>
+        </p:nvSpPr>
+        <p:spPr>
+          <a:xfrm>
+            <a:off x="6278728" y="1874520"/>
+            <a:ext cx="68580" cy="914400"/>
+          </a:xfrm>
+          <a:prstGeom prst="rect">
+            <a:avLst/>
+          </a:prstGeom>
+          <a:solidFill>
+            <a:srgbClr val="6366F1"/>
+          </a:solidFill>
+          <a:ln/>
+        </p:spPr>
+      </p:sp>
+      <p:sp>
+        <p:nvSpPr>
+          <p:cNvPr id="13" name="Text 11"/>
+          <p:cNvSpPr/>
+          <p:nvPr/>
+        </p:nvSpPr>
+        <p:spPr>
+          <a:xfrm>
+            <a:off x="6443320" y="1929384"/>
+            <a:ext cx="411480" cy="329184"/>
+          </a:xfrm>
+          <a:prstGeom prst="rect">
+            <a:avLst/>
+          </a:prstGeom>
+          <a:noFill/>
+          <a:ln/>
+        </p:spPr>
+        <p:txBody>
+          <a:bodyPr wrap="square" rtlCol="0" anchor="ctr"/>
+          <a:lstStyle/>
+          <a:p>
+            <a:pPr algn="ctr" indent="0" marL="0">
+              <a:buNone/>
+            </a:pPr>
+            <a:r>
+              <a:rPr lang="en-US" sz="1500" dirty="0">
+                <a:solidFill>
+                  <a:srgbClr val="000000"/>
+                </a:solidFill>
+                <a:latin typeface="Microsoft JhengHei" pitchFamily="34" charset="0"/>
+                <a:ea typeface="Microsoft JhengHei" pitchFamily="34" charset="-122"/>
+                <a:cs typeface="Microsoft JhengHei" pitchFamily="34" charset="-120"/>
+              </a:rPr>
+              <a:t>📧</a:t>
+            </a:r>
+            <a:endParaRPr lang="en-US" sz="1500" dirty="0"/>
+          </a:p>
+        </p:txBody>
+      </p:sp>
+      <p:sp>
+        <p:nvSpPr>
+          <p:cNvPr id="14" name="Text 12"/>
+          <p:cNvSpPr/>
+          <p:nvPr/>
+        </p:nvSpPr>
+        <p:spPr>
+          <a:xfrm>
+            <a:off x="6882232" y="1920240"/>
+            <a:ext cx="4495648" cy="292608"/>
+          </a:xfrm>
+          <a:prstGeom prst="rect">
+            <a:avLst/>
+          </a:prstGeom>
+          <a:noFill/>
+          <a:ln/>
+        </p:spPr>
+        <p:txBody>
+          <a:bodyPr wrap="square" rtlCol="0" anchor="ctr"/>
+          <a:lstStyle/>
+          <a:p>
+            <a:pPr indent="0" marL="0">
+              <a:buNone/>
+            </a:pPr>
+            <a:r>
+              <a:rPr lang="en-US" sz="1250" b="1" dirty="0">
+                <a:solidFill>
+                  <a:srgbClr val="1E2235"/>
+                </a:solidFill>
+                <a:latin typeface="Microsoft JhengHei" pitchFamily="34" charset="0"/>
+                <a:ea typeface="Microsoft JhengHei" pitchFamily="34" charset="-122"/>
+                <a:cs typeface="Microsoft JhengHei" pitchFamily="34" charset="-120"/>
+              </a:rPr>
+              <a:t>信箱：它會建立草稿，不會擅自寄出</a:t>
+            </a:r>
+            <a:endParaRPr lang="en-US" sz="1250" dirty="0"/>
+          </a:p>
+        </p:txBody>
+      </p:sp>
+      <p:sp>
+        <p:nvSpPr>
+          <p:cNvPr id="15" name="Text 13"/>
+          <p:cNvSpPr/>
+          <p:nvPr/>
+        </p:nvSpPr>
+        <p:spPr>
+          <a:xfrm>
+            <a:off x="6882232" y="2194560"/>
+            <a:ext cx="4495648" cy="548640"/>
+          </a:xfrm>
+          <a:prstGeom prst="rect">
+            <a:avLst/>
+          </a:prstGeom>
+          <a:noFill/>
+          <a:ln/>
+        </p:spPr>
+        <p:txBody>
+          <a:bodyPr wrap="square" rtlCol="0" anchor="ctr"/>
+          <a:lstStyle/>
+          <a:p>
+            <a:pPr indent="0" marL="0">
+              <a:lnSpc>
+                <a:spcPct val="112000"/>
+              </a:lnSpc>
+              <a:buNone/>
+            </a:pPr>
+            <a:r>
+              <a:rPr lang="en-US" sz="1050" dirty="0">
+                <a:solidFill>
+                  <a:srgbClr val="5B6079"/>
+                </a:solidFill>
+                <a:latin typeface="Microsoft JhengHei" pitchFamily="34" charset="0"/>
+                <a:ea typeface="Microsoft JhengHei" pitchFamily="34" charset="-122"/>
+                <a:cs typeface="Microsoft JhengHei" pitchFamily="34" charset="-120"/>
+              </a:rPr>
+              <a:t>有幾個情境會請 Cowork 草擬信件。</a:t>
+            </a:r>
+            <a:endParaRPr lang="en-US" sz="1050" dirty="0"/>
+          </a:p>
+        </p:txBody>
+      </p:sp>
+      <p:sp>
+        <p:nvSpPr>
+          <p:cNvPr id="16" name="Shape 14"/>
+          <p:cNvSpPr/>
+          <p:nvPr/>
+        </p:nvSpPr>
+        <p:spPr>
+          <a:xfrm>
+            <a:off x="640080" y="2916936"/>
+            <a:ext cx="5272888" cy="914400"/>
+          </a:xfrm>
+          <a:prstGeom prst="rect">
+            <a:avLst/>
+          </a:prstGeom>
+          <a:solidFill>
+            <a:srgbClr val="FFFFFF"/>
+          </a:solidFill>
+          <a:ln w="12700">
+            <a:solidFill>
+              <a:srgbClr val="E4E7F2"/>
+            </a:solidFill>
+            <a:prstDash val="solid"/>
+          </a:ln>
+        </p:spPr>
+      </p:sp>
+      <p:sp>
+        <p:nvSpPr>
+          <p:cNvPr id="17" name="Shape 15"/>
+          <p:cNvSpPr/>
+          <p:nvPr/>
+        </p:nvSpPr>
+        <p:spPr>
+          <a:xfrm>
+            <a:off x="640080" y="2916936"/>
+            <a:ext cx="68580" cy="914400"/>
+          </a:xfrm>
+          <a:prstGeom prst="rect">
+            <a:avLst/>
+          </a:prstGeom>
+          <a:solidFill>
+            <a:srgbClr val="6366F1"/>
+          </a:solidFill>
+          <a:ln/>
+        </p:spPr>
+      </p:sp>
+      <p:sp>
+        <p:nvSpPr>
+          <p:cNvPr id="18" name="Text 16"/>
+          <p:cNvSpPr/>
+          <p:nvPr/>
+        </p:nvSpPr>
+        <p:spPr>
+          <a:xfrm>
+            <a:off x="804672" y="2971800"/>
+            <a:ext cx="411480" cy="329184"/>
+          </a:xfrm>
+          <a:prstGeom prst="rect">
+            <a:avLst/>
+          </a:prstGeom>
+          <a:noFill/>
+          <a:ln/>
+        </p:spPr>
+        <p:txBody>
+          <a:bodyPr wrap="square" rtlCol="0" anchor="ctr"/>
+          <a:lstStyle/>
+          <a:p>
+            <a:pPr algn="ctr" indent="0" marL="0">
+              <a:buNone/>
+            </a:pPr>
+            <a:r>
+              <a:rPr lang="en-US" sz="1500" dirty="0">
+                <a:solidFill>
+                  <a:srgbClr val="000000"/>
+                </a:solidFill>
+                <a:latin typeface="Microsoft JhengHei" pitchFamily="34" charset="0"/>
+                <a:ea typeface="Microsoft JhengHei" pitchFamily="34" charset="-122"/>
+                <a:cs typeface="Microsoft JhengHei" pitchFamily="34" charset="-120"/>
+              </a:rPr>
+              <a:t>📅</a:t>
+            </a:r>
+            <a:endParaRPr lang="en-US" sz="1500" dirty="0"/>
+          </a:p>
+        </p:txBody>
+      </p:sp>
+      <p:sp>
+        <p:nvSpPr>
+          <p:cNvPr id="19" name="Text 17"/>
+          <p:cNvSpPr/>
+          <p:nvPr/>
+        </p:nvSpPr>
+        <p:spPr>
+          <a:xfrm>
+            <a:off x="1243584" y="2962656"/>
+            <a:ext cx="4495648" cy="292608"/>
+          </a:xfrm>
+          <a:prstGeom prst="rect">
+            <a:avLst/>
+          </a:prstGeom>
+          <a:noFill/>
+          <a:ln/>
+        </p:spPr>
+        <p:txBody>
+          <a:bodyPr wrap="square" rtlCol="0" anchor="ctr"/>
+          <a:lstStyle/>
+          <a:p>
+            <a:pPr indent="0" marL="0">
+              <a:buNone/>
+            </a:pPr>
+            <a:r>
+              <a:rPr lang="en-US" sz="1250" b="1" dirty="0">
+                <a:solidFill>
+                  <a:srgbClr val="1E2235"/>
+                </a:solidFill>
+                <a:latin typeface="Microsoft JhengHei" pitchFamily="34" charset="0"/>
+                <a:ea typeface="Microsoft JhengHei" pitchFamily="34" charset="-122"/>
+                <a:cs typeface="Microsoft JhengHei" pitchFamily="34" charset="-120"/>
+              </a:rPr>
+              <a:t>行事曆：本週留一些空檔</a:t>
+            </a:r>
+            <a:endParaRPr lang="en-US" sz="1250" dirty="0"/>
+          </a:p>
+        </p:txBody>
+      </p:sp>
+      <p:sp>
+        <p:nvSpPr>
+          <p:cNvPr id="20" name="Text 18"/>
+          <p:cNvSpPr/>
+          <p:nvPr/>
+        </p:nvSpPr>
+        <p:spPr>
+          <a:xfrm>
+            <a:off x="1243584" y="3236976"/>
+            <a:ext cx="4495648" cy="548640"/>
+          </a:xfrm>
+          <a:prstGeom prst="rect">
+            <a:avLst/>
+          </a:prstGeom>
+          <a:noFill/>
+          <a:ln/>
+        </p:spPr>
+        <p:txBody>
+          <a:bodyPr wrap="square" rtlCol="0" anchor="ctr"/>
+          <a:lstStyle/>
+          <a:p>
+            <a:pPr indent="0" marL="0">
+              <a:lnSpc>
+                <a:spcPct val="112000"/>
+              </a:lnSpc>
+              <a:buNone/>
+            </a:pPr>
+            <a:r>
+              <a:rPr lang="en-US" sz="1050" dirty="0">
+                <a:solidFill>
+                  <a:srgbClr val="5B6079"/>
+                </a:solidFill>
+                <a:latin typeface="Microsoft JhengHei" pitchFamily="34" charset="0"/>
+                <a:ea typeface="Microsoft JhengHei" pitchFamily="34" charset="-122"/>
+                <a:cs typeface="Microsoft JhengHei" pitchFamily="34" charset="-120"/>
+              </a:rPr>
+              <a:t>有幾個情境會請 Cowork 排會議或建立提醒，寫進的是你自己的行事曆。</a:t>
+            </a:r>
+            <a:endParaRPr lang="en-US" sz="1050" dirty="0"/>
+          </a:p>
+        </p:txBody>
+      </p:sp>
+      <p:sp>
+        <p:nvSpPr>
+          <p:cNvPr id="21" name="Shape 19"/>
+          <p:cNvSpPr/>
+          <p:nvPr/>
+        </p:nvSpPr>
+        <p:spPr>
+          <a:xfrm>
+            <a:off x="6278728" y="2916936"/>
+            <a:ext cx="5272888" cy="914400"/>
+          </a:xfrm>
+          <a:prstGeom prst="rect">
+            <a:avLst/>
+          </a:prstGeom>
+          <a:solidFill>
+            <a:srgbClr val="FFFFFF"/>
+          </a:solidFill>
+          <a:ln w="12700">
+            <a:solidFill>
+              <a:srgbClr val="E4E7F2"/>
+            </a:solidFill>
+            <a:prstDash val="solid"/>
+          </a:ln>
+        </p:spPr>
+      </p:sp>
+      <p:sp>
+        <p:nvSpPr>
+          <p:cNvPr id="22" name="Shape 20"/>
+          <p:cNvSpPr/>
+          <p:nvPr/>
+        </p:nvSpPr>
+        <p:spPr>
+          <a:xfrm>
+            <a:off x="6278728" y="2916936"/>
+            <a:ext cx="68580" cy="914400"/>
+          </a:xfrm>
+          <a:prstGeom prst="rect">
+            <a:avLst/>
+          </a:prstGeom>
+          <a:solidFill>
+            <a:srgbClr val="6366F1"/>
+          </a:solidFill>
+          <a:ln/>
+        </p:spPr>
+      </p:sp>
+      <p:sp>
+        <p:nvSpPr>
+          <p:cNvPr id="23" name="Text 21"/>
+          <p:cNvSpPr/>
+          <p:nvPr/>
+        </p:nvSpPr>
+        <p:spPr>
+          <a:xfrm>
+            <a:off x="6443320" y="2971800"/>
+            <a:ext cx="411480" cy="329184"/>
+          </a:xfrm>
+          <a:prstGeom prst="rect">
+            <a:avLst/>
+          </a:prstGeom>
+          <a:noFill/>
+          <a:ln/>
+        </p:spPr>
+        <p:txBody>
+          <a:bodyPr wrap="square" rtlCol="0" anchor="ctr"/>
+          <a:lstStyle/>
+          <a:p>
+            <a:pPr algn="ctr" indent="0" marL="0">
+              <a:buNone/>
+            </a:pPr>
+            <a:r>
+              <a:rPr lang="en-US" sz="1500" dirty="0">
+                <a:solidFill>
+                  <a:srgbClr val="000000"/>
+                </a:solidFill>
+                <a:latin typeface="Microsoft JhengHei" pitchFamily="34" charset="0"/>
+                <a:ea typeface="Microsoft JhengHei" pitchFamily="34" charset="-122"/>
+                <a:cs typeface="Microsoft JhengHei" pitchFamily="34" charset="-120"/>
+              </a:rPr>
+              <a:t>💬</a:t>
+            </a:r>
+            <a:endParaRPr lang="en-US" sz="1500" dirty="0"/>
+          </a:p>
+        </p:txBody>
+      </p:sp>
+      <p:sp>
+        <p:nvSpPr>
+          <p:cNvPr id="24" name="Text 22"/>
+          <p:cNvSpPr/>
+          <p:nvPr/>
+        </p:nvSpPr>
+        <p:spPr>
+          <a:xfrm>
+            <a:off x="6882232" y="2962656"/>
+            <a:ext cx="4495648" cy="292608"/>
+          </a:xfrm>
+          <a:prstGeom prst="rect">
+            <a:avLst/>
+          </a:prstGeom>
+          <a:noFill/>
+          <a:ln/>
+        </p:spPr>
+        <p:txBody>
+          <a:bodyPr wrap="square" rtlCol="0" anchor="ctr"/>
+          <a:lstStyle/>
+          <a:p>
+            <a:pPr indent="0" marL="0">
+              <a:buNone/>
+            </a:pPr>
+            <a:r>
+              <a:rPr lang="en-US" sz="1250" b="1" dirty="0">
+                <a:solidFill>
+                  <a:srgbClr val="1E2235"/>
+                </a:solidFill>
+                <a:latin typeface="Microsoft JhengHei" pitchFamily="34" charset="0"/>
+                <a:ea typeface="Microsoft JhengHei" pitchFamily="34" charset="-122"/>
+                <a:cs typeface="Microsoft JhengHei" pitchFamily="34" charset="-120"/>
+              </a:rPr>
+              <a:t>Teams：先想好要貼到哪裡</a:t>
+            </a:r>
+            <a:endParaRPr lang="en-US" sz="1250" dirty="0"/>
+          </a:p>
+        </p:txBody>
+      </p:sp>
+      <p:sp>
+        <p:nvSpPr>
+          <p:cNvPr id="25" name="Text 23"/>
+          <p:cNvSpPr/>
+          <p:nvPr/>
+        </p:nvSpPr>
+        <p:spPr>
+          <a:xfrm>
+            <a:off x="6882232" y="3236976"/>
+            <a:ext cx="4495648" cy="548640"/>
+          </a:xfrm>
+          <a:prstGeom prst="rect">
+            <a:avLst/>
+          </a:prstGeom>
+          <a:noFill/>
+          <a:ln/>
+        </p:spPr>
+        <p:txBody>
+          <a:bodyPr wrap="square" rtlCol="0" anchor="ctr"/>
+          <a:lstStyle/>
+          <a:p>
+            <a:pPr indent="0" marL="0">
+              <a:lnSpc>
+                <a:spcPct val="112000"/>
+              </a:lnSpc>
+              <a:buNone/>
+            </a:pPr>
+            <a:r>
+              <a:rPr lang="en-US" sz="1050" dirty="0">
+                <a:solidFill>
+                  <a:srgbClr val="5B6079"/>
+                </a:solidFill>
+                <a:latin typeface="Microsoft JhengHei" pitchFamily="34" charset="0"/>
+                <a:ea typeface="Microsoft JhengHei" pitchFamily="34" charset="-122"/>
+                <a:cs typeface="Microsoft JhengHei" pitchFamily="34" charset="-120"/>
+              </a:rPr>
+              <a:t>有情境會請 Cowork 張貼 Teams 訊息。</a:t>
+            </a:r>
+            <a:endParaRPr lang="en-US" sz="1050" dirty="0"/>
+          </a:p>
+        </p:txBody>
+      </p:sp>
+      <p:sp>
+        <p:nvSpPr>
+          <p:cNvPr id="26" name="Shape 24"/>
+          <p:cNvSpPr/>
+          <p:nvPr/>
+        </p:nvSpPr>
+        <p:spPr>
+          <a:xfrm>
+            <a:off x="640080" y="3959352"/>
+            <a:ext cx="5272888" cy="914400"/>
+          </a:xfrm>
+          <a:prstGeom prst="rect">
+            <a:avLst/>
+          </a:prstGeom>
+          <a:solidFill>
+            <a:srgbClr val="FFFFFF"/>
+          </a:solidFill>
+          <a:ln w="12700">
+            <a:solidFill>
+              <a:srgbClr val="E4E7F2"/>
+            </a:solidFill>
+            <a:prstDash val="solid"/>
+          </a:ln>
+        </p:spPr>
+      </p:sp>
+      <p:sp>
+        <p:nvSpPr>
+          <p:cNvPr id="27" name="Shape 25"/>
+          <p:cNvSpPr/>
+          <p:nvPr/>
+        </p:nvSpPr>
+        <p:spPr>
+          <a:xfrm>
+            <a:off x="640080" y="3959352"/>
+            <a:ext cx="68580" cy="914400"/>
+          </a:xfrm>
+          <a:prstGeom prst="rect">
+            <a:avLst/>
+          </a:prstGeom>
+          <a:solidFill>
+            <a:srgbClr val="6366F1"/>
+          </a:solidFill>
+          <a:ln/>
+        </p:spPr>
+      </p:sp>
+      <p:sp>
+        <p:nvSpPr>
+          <p:cNvPr id="28" name="Text 26"/>
+          <p:cNvSpPr/>
+          <p:nvPr/>
+        </p:nvSpPr>
+        <p:spPr>
+          <a:xfrm>
+            <a:off x="804672" y="4014216"/>
+            <a:ext cx="411480" cy="329184"/>
+          </a:xfrm>
+          <a:prstGeom prst="rect">
+            <a:avLst/>
+          </a:prstGeom>
+          <a:noFill/>
+          <a:ln/>
+        </p:spPr>
+        <p:txBody>
+          <a:bodyPr wrap="square" rtlCol="0" anchor="ctr"/>
+          <a:lstStyle/>
+          <a:p>
+            <a:pPr algn="ctr" indent="0" marL="0">
+              <a:buNone/>
+            </a:pPr>
+            <a:r>
+              <a:rPr lang="en-US" sz="1500" dirty="0">
+                <a:solidFill>
+                  <a:srgbClr val="000000"/>
+                </a:solidFill>
+                <a:latin typeface="Microsoft JhengHei" pitchFamily="34" charset="0"/>
+                <a:ea typeface="Microsoft JhengHei" pitchFamily="34" charset="-122"/>
+                <a:cs typeface="Microsoft JhengHei" pitchFamily="34" charset="-120"/>
+              </a:rPr>
+              <a:t>📁</a:t>
+            </a:r>
+            <a:endParaRPr lang="en-US" sz="1500" dirty="0"/>
+          </a:p>
+        </p:txBody>
+      </p:sp>
+      <p:sp>
+        <p:nvSpPr>
+          <p:cNvPr id="29" name="Text 27"/>
+          <p:cNvSpPr/>
+          <p:nvPr/>
+        </p:nvSpPr>
+        <p:spPr>
+          <a:xfrm>
+            <a:off x="1243584" y="4005072"/>
+            <a:ext cx="4495648" cy="292608"/>
+          </a:xfrm>
+          <a:prstGeom prst="rect">
+            <a:avLst/>
+          </a:prstGeom>
+          <a:noFill/>
+          <a:ln/>
+        </p:spPr>
+        <p:txBody>
+          <a:bodyPr wrap="square" rtlCol="0" anchor="ctr"/>
+          <a:lstStyle/>
+          <a:p>
+            <a:pPr indent="0" marL="0">
+              <a:buNone/>
+            </a:pPr>
+            <a:r>
+              <a:rPr lang="en-US" sz="1250" b="1" dirty="0">
+                <a:solidFill>
+                  <a:srgbClr val="1E2235"/>
+                </a:solidFill>
+                <a:latin typeface="Microsoft JhengHei" pitchFamily="34" charset="0"/>
+                <a:ea typeface="Microsoft JhengHei" pitchFamily="34" charset="-122"/>
+                <a:cs typeface="Microsoft JhengHei" pitchFamily="34" charset="-120"/>
+              </a:rPr>
+              <a:t>產出會存到你的 OneDrive</a:t>
+            </a:r>
+            <a:endParaRPr lang="en-US" sz="1250" dirty="0"/>
+          </a:p>
+        </p:txBody>
+      </p:sp>
+      <p:sp>
+        <p:nvSpPr>
+          <p:cNvPr id="30" name="Text 28"/>
+          <p:cNvSpPr/>
+          <p:nvPr/>
+        </p:nvSpPr>
+        <p:spPr>
+          <a:xfrm>
+            <a:off x="1243584" y="4279392"/>
+            <a:ext cx="4495648" cy="548640"/>
+          </a:xfrm>
+          <a:prstGeom prst="rect">
+            <a:avLst/>
+          </a:prstGeom>
+          <a:noFill/>
+          <a:ln/>
+        </p:spPr>
+        <p:txBody>
+          <a:bodyPr wrap="square" rtlCol="0" anchor="ctr"/>
+          <a:lstStyle/>
+          <a:p>
+            <a:pPr indent="0" marL="0">
+              <a:lnSpc>
+                <a:spcPct val="112000"/>
+              </a:lnSpc>
+              <a:buNone/>
+            </a:pPr>
+            <a:r>
+              <a:rPr lang="en-US" sz="1050" dirty="0">
+                <a:solidFill>
+                  <a:srgbClr val="5B6079"/>
+                </a:solidFill>
+                <a:latin typeface="Microsoft JhengHei" pitchFamily="34" charset="0"/>
+                <a:ea typeface="Microsoft JhengHei" pitchFamily="34" charset="-122"/>
+                <a:cs typeface="Microsoft JhengHei" pitchFamily="34" charset="-120"/>
+              </a:rPr>
+              <a:t>Cowork 產生的檔案會存進你自己的 OneDrive，也可以在對話右側的側邊欄直接預覽或下載。</a:t>
+            </a:r>
+            <a:endParaRPr lang="en-US" sz="1050" dirty="0"/>
+          </a:p>
+        </p:txBody>
+      </p:sp>
+      <p:sp>
+        <p:nvSpPr>
+          <p:cNvPr id="31" name="Shape 29"/>
+          <p:cNvSpPr/>
+          <p:nvPr/>
+        </p:nvSpPr>
+        <p:spPr>
+          <a:xfrm>
+            <a:off x="6278728" y="3959352"/>
+            <a:ext cx="5272888" cy="914400"/>
+          </a:xfrm>
+          <a:prstGeom prst="rect">
+            <a:avLst/>
+          </a:prstGeom>
+          <a:solidFill>
+            <a:srgbClr val="FFFFFF"/>
+          </a:solidFill>
+          <a:ln w="12700">
+            <a:solidFill>
+              <a:srgbClr val="E4E7F2"/>
+            </a:solidFill>
+            <a:prstDash val="solid"/>
+          </a:ln>
+        </p:spPr>
+      </p:sp>
+      <p:sp>
+        <p:nvSpPr>
+          <p:cNvPr id="32" name="Shape 30"/>
+          <p:cNvSpPr/>
+          <p:nvPr/>
+        </p:nvSpPr>
+        <p:spPr>
+          <a:xfrm>
+            <a:off x="6278728" y="3959352"/>
+            <a:ext cx="68580" cy="914400"/>
+          </a:xfrm>
+          <a:prstGeom prst="rect">
+            <a:avLst/>
+          </a:prstGeom>
+          <a:solidFill>
+            <a:srgbClr val="6366F1"/>
+          </a:solidFill>
+          <a:ln/>
+        </p:spPr>
+      </p:sp>
+      <p:sp>
+        <p:nvSpPr>
+          <p:cNvPr id="33" name="Text 31"/>
+          <p:cNvSpPr/>
+          <p:nvPr/>
+        </p:nvSpPr>
+        <p:spPr>
+          <a:xfrm>
+            <a:off x="6443320" y="4014216"/>
+            <a:ext cx="411480" cy="329184"/>
+          </a:xfrm>
+          <a:prstGeom prst="rect">
+            <a:avLst/>
+          </a:prstGeom>
+          <a:noFill/>
+          <a:ln/>
+        </p:spPr>
+        <p:txBody>
+          <a:bodyPr wrap="square" rtlCol="0" anchor="ctr"/>
+          <a:lstStyle/>
+          <a:p>
+            <a:pPr algn="ctr" indent="0" marL="0">
+              <a:buNone/>
+            </a:pPr>
+            <a:r>
+              <a:rPr lang="en-US" sz="1500" dirty="0">
+                <a:solidFill>
+                  <a:srgbClr val="000000"/>
+                </a:solidFill>
+                <a:latin typeface="Microsoft JhengHei" pitchFamily="34" charset="0"/>
+                <a:ea typeface="Microsoft JhengHei" pitchFamily="34" charset="-122"/>
+                <a:cs typeface="Microsoft JhengHei" pitchFamily="34" charset="-120"/>
+              </a:rPr>
+              <a:t>🧩</a:t>
+            </a:r>
+            <a:endParaRPr lang="en-US" sz="1500" dirty="0"/>
+          </a:p>
+        </p:txBody>
+      </p:sp>
+      <p:sp>
+        <p:nvSpPr>
+          <p:cNvPr id="34" name="Text 32"/>
+          <p:cNvSpPr/>
+          <p:nvPr/>
+        </p:nvSpPr>
+        <p:spPr>
+          <a:xfrm>
+            <a:off x="6882232" y="4005072"/>
+            <a:ext cx="4495648" cy="292608"/>
+          </a:xfrm>
+          <a:prstGeom prst="rect">
+            <a:avLst/>
+          </a:prstGeom>
+          <a:noFill/>
+          <a:ln/>
+        </p:spPr>
+        <p:txBody>
+          <a:bodyPr wrap="square" rtlCol="0" anchor="ctr"/>
+          <a:lstStyle/>
+          <a:p>
+            <a:pPr indent="0" marL="0">
+              <a:buNone/>
+            </a:pPr>
+            <a:r>
+              <a:rPr lang="en-US" sz="1250" b="1" dirty="0">
+                <a:solidFill>
+                  <a:srgbClr val="1E2235"/>
+                </a:solidFill>
+                <a:latin typeface="Microsoft JhengHei" pitchFamily="34" charset="0"/>
+                <a:ea typeface="Microsoft JhengHei" pitchFamily="34" charset="-122"/>
+                <a:cs typeface="Microsoft JhengHei" pitchFamily="34" charset="-120"/>
+              </a:rPr>
+              <a:t>技能資料夾：現場建立，不要先放進去</a:t>
+            </a:r>
+            <a:endParaRPr lang="en-US" sz="1250" dirty="0"/>
+          </a:p>
+        </p:txBody>
+      </p:sp>
+      <p:sp>
+        <p:nvSpPr>
+          <p:cNvPr id="35" name="Text 33"/>
+          <p:cNvSpPr/>
+          <p:nvPr/>
+        </p:nvSpPr>
+        <p:spPr>
+          <a:xfrm>
+            <a:off x="6882232" y="4279392"/>
+            <a:ext cx="4495648" cy="548640"/>
+          </a:xfrm>
+          <a:prstGeom prst="rect">
+            <a:avLst/>
+          </a:prstGeom>
+          <a:noFill/>
+          <a:ln/>
+        </p:spPr>
+        <p:txBody>
+          <a:bodyPr wrap="square" rtlCol="0" anchor="ctr"/>
+          <a:lstStyle/>
+          <a:p>
+            <a:pPr indent="0" marL="0">
+              <a:lnSpc>
+                <a:spcPct val="112000"/>
+              </a:lnSpc>
+              <a:buNone/>
+            </a:pPr>
+            <a:r>
+              <a:rPr lang="en-US" sz="1050" dirty="0">
+                <a:solidFill>
+                  <a:srgbClr val="5B6079"/>
+                </a:solidFill>
+                <a:latin typeface="Microsoft JhengHei" pitchFamily="34" charset="0"/>
+                <a:ea typeface="Microsoft JhengHei" pitchFamily="34" charset="-122"/>
+                <a:cs typeface="Microsoft JhengHei" pitchFamily="34" charset="-120"/>
+              </a:rPr>
+              <a:t>有情境會示範現場建立自訂技能。</a:t>
+            </a:r>
+            <a:endParaRPr lang="en-US" sz="1050" dirty="0"/>
+          </a:p>
+        </p:txBody>
+      </p:sp>
+      <p:sp>
+        <p:nvSpPr>
+          <p:cNvPr id="36" name="Shape 34"/>
+          <p:cNvSpPr/>
+          <p:nvPr/>
+        </p:nvSpPr>
+        <p:spPr>
+          <a:xfrm>
+            <a:off x="640080" y="5532120"/>
+            <a:ext cx="10911535" cy="749808"/>
+          </a:xfrm>
+          <a:prstGeom prst="rect">
+            <a:avLst/>
+          </a:prstGeom>
+          <a:solidFill>
+            <a:srgbClr val="FFFFFF"/>
+          </a:solidFill>
+          <a:ln w="12700">
+            <a:solidFill>
+              <a:srgbClr val="E4E7F2"/>
+            </a:solidFill>
+            <a:prstDash val="solid"/>
+          </a:ln>
+        </p:spPr>
+      </p:sp>
+      <p:sp>
+        <p:nvSpPr>
+          <p:cNvPr id="37" name="Shape 35"/>
+          <p:cNvSpPr/>
+          <p:nvPr/>
+        </p:nvSpPr>
+        <p:spPr>
+          <a:xfrm>
+            <a:off x="640080" y="5532120"/>
+            <a:ext cx="91440" cy="749808"/>
+          </a:xfrm>
+          <a:prstGeom prst="rect">
+            <a:avLst/>
+          </a:prstGeom>
+          <a:solidFill>
+            <a:srgbClr val="6366F1"/>
+          </a:solidFill>
+          <a:ln/>
+        </p:spPr>
+      </p:sp>
+      <p:sp>
+        <p:nvSpPr>
+          <p:cNvPr id="38" name="Text 36"/>
+          <p:cNvSpPr/>
+          <p:nvPr/>
+        </p:nvSpPr>
+        <p:spPr>
+          <a:xfrm>
+            <a:off x="914400" y="5614416"/>
+            <a:ext cx="1828800" cy="274320"/>
+          </a:xfrm>
+          <a:prstGeom prst="rect">
+            <a:avLst/>
+          </a:prstGeom>
+          <a:noFill/>
+          <a:ln/>
+        </p:spPr>
+        <p:txBody>
+          <a:bodyPr wrap="square" rtlCol="0" anchor="ctr"/>
+          <a:lstStyle/>
+          <a:p>
+            <a:pPr indent="0" marL="0">
+              <a:buNone/>
+            </a:pPr>
+            <a:r>
+              <a:rPr lang="en-US" sz="1200" b="1" dirty="0">
+                <a:solidFill>
+                  <a:srgbClr val="1E2235"/>
+                </a:solidFill>
+                <a:latin typeface="Microsoft JhengHei" pitchFamily="34" charset="0"/>
+                <a:ea typeface="Microsoft JhengHei" pitchFamily="34" charset="-122"/>
+                <a:cs typeface="Microsoft JhengHei" pitchFamily="34" charset="-120"/>
+              </a:rPr>
+              <a:t>開課前最後檢查</a:t>
+            </a:r>
+            <a:endParaRPr lang="en-US" sz="1200" dirty="0"/>
+          </a:p>
+        </p:txBody>
+      </p:sp>
+      <p:pic>
+        <p:nvPicPr>
+          <p:cNvPr id="39" name="Image 0" descr="preencoded.png">    </p:cNvPr>
+          <p:cNvPicPr>
+            <a:picLocks noChangeAspect="1"/>
+          </p:cNvPicPr>
+          <p:nvPr/>
+        </p:nvPicPr>
+        <p:blipFill>
+          <a:blip r:embed="rId1"/>
+          <a:stretch>
+            <a:fillRect/>
+          </a:stretch>
+        </p:blipFill>
+        <p:spPr>
+          <a:xfrm>
+            <a:off x="2743200" y="5641848"/>
+            <a:ext cx="155448" cy="155448"/>
+          </a:xfrm>
+          <a:prstGeom prst="rect">
+            <a:avLst/>
+          </a:prstGeom>
+        </p:spPr>
+      </p:pic>
+      <p:sp>
+        <p:nvSpPr>
+          <p:cNvPr id="40" name="Text 37"/>
+          <p:cNvSpPr/>
+          <p:nvPr/>
+        </p:nvSpPr>
+        <p:spPr>
+          <a:xfrm>
+            <a:off x="2999232" y="5586984"/>
+            <a:ext cx="8259775" cy="237744"/>
+          </a:xfrm>
+          <a:prstGeom prst="rect">
+            <a:avLst/>
+          </a:prstGeom>
+          <a:noFill/>
+          <a:ln/>
+        </p:spPr>
+        <p:txBody>
+          <a:bodyPr wrap="square" rtlCol="0" anchor="ctr"/>
+          <a:lstStyle/>
+          <a:p>
+            <a:pPr indent="0" marL="0">
+              <a:buNone/>
+            </a:pPr>
+            <a:r>
+              <a:rPr lang="en-US" sz="1050" dirty="0">
+                <a:solidFill>
+                  <a:srgbClr val="1E2235"/>
+                </a:solidFill>
+                <a:latin typeface="Microsoft JhengHei" pitchFamily="34" charset="0"/>
+                <a:ea typeface="Microsoft JhengHei" pitchFamily="34" charset="-122"/>
+                <a:cs typeface="Microsoft JhengHei" pitchFamily="34" charset="-120"/>
+              </a:rPr>
+              <a:t>要練的情境，它的參考檔案都已下載到你的電腦</a:t>
+            </a:r>
+            <a:endParaRPr lang="en-US" sz="1050" dirty="0"/>
+          </a:p>
+        </p:txBody>
+      </p:sp>
+      <p:pic>
+        <p:nvPicPr>
+          <p:cNvPr id="41" name="Image 1" descr="preencoded.png">    </p:cNvPr>
+          <p:cNvPicPr>
+            <a:picLocks noChangeAspect="1"/>
+          </p:cNvPicPr>
+          <p:nvPr/>
+        </p:nvPicPr>
+        <p:blipFill>
+          <a:blip r:embed="rId2"/>
+          <a:stretch>
+            <a:fillRect/>
+          </a:stretch>
+        </p:blipFill>
+        <p:spPr>
+          <a:xfrm>
+            <a:off x="2743200" y="5852160"/>
+            <a:ext cx="155448" cy="155448"/>
+          </a:xfrm>
+          <a:prstGeom prst="rect">
+            <a:avLst/>
+          </a:prstGeom>
+        </p:spPr>
+      </p:pic>
+      <p:sp>
+        <p:nvSpPr>
+          <p:cNvPr id="42" name="Text 38"/>
+          <p:cNvSpPr/>
+          <p:nvPr/>
+        </p:nvSpPr>
+        <p:spPr>
+          <a:xfrm>
+            <a:off x="2999232" y="5797296"/>
+            <a:ext cx="8259775" cy="237744"/>
+          </a:xfrm>
+          <a:prstGeom prst="rect">
+            <a:avLst/>
+          </a:prstGeom>
+          <a:noFill/>
+          <a:ln/>
+        </p:spPr>
+        <p:txBody>
+          <a:bodyPr wrap="square" rtlCol="0" anchor="ctr"/>
+          <a:lstStyle/>
+          <a:p>
+            <a:pPr indent="0" marL="0">
+              <a:buNone/>
+            </a:pPr>
+            <a:r>
+              <a:rPr lang="en-US" sz="1050" dirty="0">
+                <a:solidFill>
+                  <a:srgbClr val="1E2235"/>
+                </a:solidFill>
+                <a:latin typeface="Microsoft JhengHei" pitchFamily="34" charset="0"/>
+                <a:ea typeface="Microsoft JhengHei" pitchFamily="34" charset="-122"/>
+                <a:cs typeface="Microsoft JhengHei" pitchFamily="34" charset="-120"/>
+              </a:rPr>
+              <a:t>清楚核准卡出現時要逐格檢查收件者，練習信不會寄給真實對象</a:t>
+            </a:r>
+            <a:endParaRPr lang="en-US" sz="1050" dirty="0"/>
+          </a:p>
+        </p:txBody>
+      </p:sp>
+      <p:pic>
+        <p:nvPicPr>
+          <p:cNvPr id="43" name="Image 2" descr="preencoded.png">    </p:cNvPr>
+          <p:cNvPicPr>
+            <a:picLocks noChangeAspect="1"/>
+          </p:cNvPicPr>
+          <p:nvPr/>
+        </p:nvPicPr>
+        <p:blipFill>
+          <a:blip r:embed="rId3"/>
+          <a:stretch>
+            <a:fillRect/>
+          </a:stretch>
+        </p:blipFill>
+        <p:spPr>
+          <a:xfrm>
+            <a:off x="2743200" y="6062472"/>
+            <a:ext cx="155448" cy="155448"/>
+          </a:xfrm>
+          <a:prstGeom prst="rect">
+            <a:avLst/>
+          </a:prstGeom>
+        </p:spPr>
+      </p:pic>
+      <p:sp>
+        <p:nvSpPr>
+          <p:cNvPr id="44" name="Text 39"/>
+          <p:cNvSpPr/>
+          <p:nvPr/>
+        </p:nvSpPr>
+        <p:spPr>
+          <a:xfrm>
+            <a:off x="2999232" y="6007608"/>
+            <a:ext cx="8259775" cy="237744"/>
+          </a:xfrm>
+          <a:prstGeom prst="rect">
+            <a:avLst/>
+          </a:prstGeom>
+          <a:noFill/>
+          <a:ln/>
+        </p:spPr>
+        <p:txBody>
+          <a:bodyPr wrap="square" rtlCol="0" anchor="ctr"/>
+          <a:lstStyle/>
+          <a:p>
+            <a:pPr indent="0" marL="0">
+              <a:buNone/>
+            </a:pPr>
+            <a:r>
+              <a:rPr lang="en-US" sz="1050" dirty="0">
+                <a:solidFill>
+                  <a:srgbClr val="1E2235"/>
+                </a:solidFill>
+                <a:latin typeface="Microsoft JhengHei" pitchFamily="34" charset="0"/>
+                <a:ea typeface="Microsoft JhengHei" pitchFamily="34" charset="-122"/>
+                <a:cs typeface="Microsoft JhengHei" pitchFamily="34" charset="-120"/>
+              </a:rPr>
+              <a:t>行事曆本週有空檔，可以讓它排入測試會議</a:t>
+            </a:r>
+            <a:endParaRPr lang="en-US" sz="1050" dirty="0"/>
+          </a:p>
+        </p:txBody>
+      </p:sp>
+      <p:sp>
+        <p:nvSpPr>
+          <p:cNvPr id="45" name="Text 40"/>
+          <p:cNvSpPr/>
+          <p:nvPr/>
+        </p:nvSpPr>
+        <p:spPr>
+          <a:xfrm>
+            <a:off x="640080" y="6473952"/>
+            <a:ext cx="5486400" cy="274320"/>
+          </a:xfrm>
+          <a:prstGeom prst="rect">
+            <a:avLst/>
+          </a:prstGeom>
+          <a:noFill/>
+          <a:ln/>
+        </p:spPr>
+        <p:txBody>
+          <a:bodyPr wrap="square" rtlCol="0" anchor="ctr"/>
+          <a:lstStyle/>
+          <a:p>
+            <a:pPr algn="l" indent="0" marL="0">
+              <a:buNone/>
+            </a:pPr>
+            <a:r>
+              <a:rPr lang="en-US" sz="900" dirty="0">
+                <a:solidFill>
+                  <a:srgbClr val="5B6079"/>
+                </a:solidFill>
+                <a:latin typeface="Microsoft JhengHei" pitchFamily="34" charset="0"/>
+                <a:ea typeface="Microsoft JhengHei" pitchFamily="34" charset="-122"/>
+                <a:cs typeface="Microsoft JhengHei" pitchFamily="34" charset="-120"/>
+              </a:rPr>
+              <a:t>Microsoft 365 Copilot Cowork</a:t>
+            </a:r>
+            <a:endParaRPr lang="en-US" sz="900" dirty="0"/>
+          </a:p>
+        </p:txBody>
+      </p:sp>
+      <p:sp>
+        <p:nvSpPr>
+          <p:cNvPr id="46" name="Text 41"/>
+          <p:cNvSpPr/>
+          <p:nvPr/>
+        </p:nvSpPr>
+        <p:spPr>
+          <a:xfrm>
+            <a:off x="11002975" y="6473952"/>
+            <a:ext cx="548640" cy="274320"/>
+          </a:xfrm>
+          <a:prstGeom prst="rect">
+            <a:avLst/>
+          </a:prstGeom>
+          <a:noFill/>
+          <a:ln/>
+        </p:spPr>
+        <p:txBody>
+          <a:bodyPr wrap="square" rtlCol="0" anchor="ctr"/>
+          <a:lstStyle/>
+          <a:p>
+            <a:pPr algn="r" indent="0" marL="0">
+              <a:buNone/>
+            </a:pPr>
+            <a:r>
+              <a:rPr lang="en-US" sz="900" dirty="0">
+                <a:solidFill>
+                  <a:srgbClr val="5B6079"/>
+                </a:solidFill>
+                <a:latin typeface="Microsoft JhengHei" pitchFamily="34" charset="0"/>
+                <a:ea typeface="Microsoft JhengHei" pitchFamily="34" charset="-122"/>
+                <a:cs typeface="Microsoft JhengHei" pitchFamily="34" charset="-120"/>
+              </a:rPr>
+              <a:t>6</a:t>
+            </a:r>
+            <a:endParaRPr lang="en-US" sz="900" dirty="0"/>
+          </a:p>
+        </p:txBody>
+      </p:sp>
+    </p:spTree>
+  </p:cSld>
+  <p:clrMapOvr>
+    <a:masterClrMapping/>
+  </p:clrMapOvr>
+</p:sld>
+</file>
+
+<file path=ppt/slides/slide8.xml><?xml version="1.0" encoding="utf-8"?>
+<p:sld xmlns:a="http://schemas.openxmlformats.org/drawingml/2006/main" xmlns:r="http://schemas.openxmlformats.org/officeDocument/2006/relationships" xmlns:p="http://schemas.openxmlformats.org/presentationml/2006/main">
+  <p:cSld name="Slide 8">
+    <p:bg>
+      <p:bgPr>
+        <a:solidFill>
+          <a:srgbClr val="F7F8FC"/>
+        </a:solidFill>
+      </p:bgPr>
+    </p:bg>
+    <p:spTree>
+      <p:nvGrpSpPr>
+        <p:cNvPr id="1" name=""/>
+        <p:cNvGrpSpPr/>
+        <p:nvPr/>
+      </p:nvGrpSpPr>
+      <p:grpSpPr>
+        <a:xfrm>
+          <a:off x="0" y="0"/>
+          <a:ext cx="0" cy="0"/>
+          <a:chOff x="0" y="0"/>
+          <a:chExt cx="0" cy="0"/>
+        </a:xfrm>
+      </p:grpSpPr>
+      <p:sp>
+        <p:nvSpPr>
+          <p:cNvPr id="2" name="Shape 0"/>
+          <p:cNvSpPr/>
+          <p:nvPr/>
+        </p:nvSpPr>
+        <p:spPr>
+          <a:xfrm>
+            <a:off x="640080" y="566928"/>
+            <a:ext cx="384048" cy="128016"/>
+          </a:xfrm>
+          <a:prstGeom prst="rect">
+            <a:avLst/>
+          </a:prstGeom>
+          <a:solidFill>
+            <a:srgbClr val="6366F1"/>
+          </a:solidFill>
+          <a:ln/>
+        </p:spPr>
+      </p:sp>
+      <p:sp>
+        <p:nvSpPr>
+          <p:cNvPr id="3" name="Text 1"/>
+          <p:cNvSpPr/>
+          <p:nvPr/>
+        </p:nvSpPr>
+        <p:spPr>
+          <a:xfrm>
+            <a:off x="1143000" y="457200"/>
+            <a:ext cx="8229600" cy="310896"/>
+          </a:xfrm>
+          <a:prstGeom prst="rect">
+            <a:avLst/>
+          </a:prstGeom>
+          <a:noFill/>
+          <a:ln/>
+        </p:spPr>
+        <p:txBody>
+          <a:bodyPr wrap="square" rtlCol="0" anchor="ctr"/>
+          <a:lstStyle/>
+          <a:p>
+            <a:pPr indent="0" marL="0">
+              <a:buNone/>
+            </a:pPr>
+            <a:r>
+              <a:rPr lang="en-US" sz="1200" b="1" spc="200" kern="0" dirty="0">
+                <a:solidFill>
+                  <a:srgbClr val="6366F1"/>
+                </a:solidFill>
+                <a:latin typeface="Microsoft JhengHei" pitchFamily="34" charset="0"/>
+                <a:ea typeface="Microsoft JhengHei" pitchFamily="34" charset="-122"/>
+                <a:cs typeface="Microsoft JhengHei" pitchFamily="34" charset="-120"/>
+              </a:rPr>
               <a:t>5 SCENARIOS</a:t>
             </a:r>
             <a:endParaRPr lang="en-US" sz="1200" dirty="0"/>
@@ -19555,7 +21942,7 @@
                 <a:ea typeface="Microsoft JhengHei" pitchFamily="34" charset="-122"/>
                 <a:cs typeface="Microsoft JhengHei" pitchFamily="34" charset="-120"/>
               </a:rPr>
-              <a:t>6</a:t>
+              <a:t>7</a:t>
             </a:r>
             <a:endParaRPr lang="en-US" sz="900" dirty="0"/>
           </a:p>
@@ -19569,9 +21956,9 @@
 </p:sld>
 </file>
 
-<file path=ppt/slides/slide8.xml><?xml version="1.0" encoding="utf-8"?>
+<file path=ppt/slides/slide9.xml><?xml version="1.0" encoding="utf-8"?>
 <p:sld xmlns:a="http://schemas.openxmlformats.org/drawingml/2006/main" xmlns:r="http://schemas.openxmlformats.org/officeDocument/2006/relationships" xmlns:p="http://schemas.openxmlformats.org/presentationml/2006/main">
-  <p:cSld name="Slide 8">
+  <p:cSld name="Slide 9">
     <p:bg>
       <p:bgPr>
         <a:solidFill>
@@ -20238,7 +22625,7 @@
                 <a:ea typeface="Microsoft JhengHei" pitchFamily="34" charset="-122"/>
                 <a:cs typeface="Microsoft JhengHei" pitchFamily="34" charset="-120"/>
               </a:rPr>
-              <a:t>把夜班紀錄與你的判斷規則一起上傳，明確要求 Cowork 依規則裡的邏輯整理，而不是隨意摘要。</a:t>
+              <a:t>MFG1_夜班生產與巡檢紀錄.xlsx 與 MFG1_異常判斷規則與交接簡報格式.md 兩份檔案一起上傳到聊天框…</a:t>
             </a:r>
             <a:endParaRPr lang="en-US" sz="1300" dirty="0"/>
           </a:p>
@@ -20385,7 +22772,7 @@
                 <a:ea typeface="Microsoft JhengHei" pitchFamily="34" charset="-122"/>
                 <a:cs typeface="Microsoft JhengHei" pitchFamily="34" charset="-120"/>
               </a:rPr>
-              <a:t>重點檢查：A 產線的傳送帶異音在 24 小時內跳機了 3 次…</a:t>
+              <a:t>打開 Cowork 產出的交接晨報，找到 A 產線傳送帶的相關紀錄…</a:t>
             </a:r>
             <a:endParaRPr lang="en-US" sz="1300" dirty="0"/>
           </a:p>
@@ -20532,7 +22919,7 @@
                 <a:ea typeface="Microsoft JhengHei" pitchFamily="34" charset="-122"/>
                 <a:cs typeface="Microsoft JhengHei" pitchFamily="34" charset="-120"/>
               </a:rPr>
-              <a:t>晨報只是第一步；接著在同一個對話裡，換一個技能——把緊急事項改寫成一封信，並要求直接發送。</a:t>
+              <a:t>在同一個對話裡，送出下面的提示詞，要求把緊急事項整理成信件直接發送給廠長。</a:t>
             </a:r>
             <a:endParaRPr lang="en-US" sz="1300" dirty="0"/>
           </a:p>
@@ -20664,7 +23051,7 @@
                 <a:ea typeface="Microsoft JhengHei" pitchFamily="34" charset="-122"/>
                 <a:cs typeface="Microsoft JhengHei" pitchFamily="34" charset="-120"/>
               </a:rPr>
-              <a:t>產出交接晨報本身是內部文件草稿，不會觸發審核卡；但只要你要求「寄給廠長」，就會停在行動前審核卡…</a:t>
+              <a:t>核准卡給你三個選擇：按下動作鍵（傳送）＝只放行這一次；按動作鍵旁邊的下拉箭頭＝這個工作階段內同類動作都不再問…</a:t>
             </a:r>
             <a:endParaRPr lang="en-US" sz="1250" dirty="0"/>
           </a:p>
@@ -20737,677 +23124,6 @@
               <a:rPr lang="en-US" sz="900" dirty="0">
                 <a:solidFill>
                   <a:srgbClr val="8A8FB5"/>
-                </a:solidFill>
-                <a:latin typeface="Microsoft JhengHei" pitchFamily="34" charset="0"/>
-                <a:ea typeface="Microsoft JhengHei" pitchFamily="34" charset="-122"/>
-                <a:cs typeface="Microsoft JhengHei" pitchFamily="34" charset="-120"/>
-              </a:rPr>
-              <a:t>7</a:t>
-            </a:r>
-            <a:endParaRPr lang="en-US" sz="900" dirty="0"/>
-          </a:p>
-        </p:txBody>
-      </p:sp>
-    </p:spTree>
-  </p:cSld>
-  <p:clrMapOvr>
-    <a:masterClrMapping/>
-  </p:clrMapOvr>
-</p:sld>
-</file>
-
-<file path=ppt/slides/slide9.xml><?xml version="1.0" encoding="utf-8"?>
-<p:sld xmlns:a="http://schemas.openxmlformats.org/drawingml/2006/main" xmlns:r="http://schemas.openxmlformats.org/officeDocument/2006/relationships" xmlns:p="http://schemas.openxmlformats.org/presentationml/2006/main">
-  <p:cSld name="Slide 9">
-    <p:bg>
-      <p:bgPr>
-        <a:solidFill>
-          <a:srgbClr val="F7F8FC"/>
-        </a:solidFill>
-      </p:bgPr>
-    </p:bg>
-    <p:spTree>
-      <p:nvGrpSpPr>
-        <p:cNvPr id="1" name=""/>
-        <p:cNvGrpSpPr/>
-        <p:nvPr/>
-      </p:nvGrpSpPr>
-      <p:grpSpPr>
-        <a:xfrm>
-          <a:off x="0" y="0"/>
-          <a:ext cx="0" cy="0"/>
-          <a:chOff x="0" y="0"/>
-          <a:chExt cx="0" cy="0"/>
-        </a:xfrm>
-      </p:grpSpPr>
-      <p:sp>
-        <p:nvSpPr>
-          <p:cNvPr id="2" name="Shape 0"/>
-          <p:cNvSpPr/>
-          <p:nvPr/>
-        </p:nvSpPr>
-        <p:spPr>
-          <a:xfrm>
-            <a:off x="640080" y="566928"/>
-            <a:ext cx="384048" cy="128016"/>
-          </a:xfrm>
-          <a:prstGeom prst="rect">
-            <a:avLst/>
-          </a:prstGeom>
-          <a:solidFill>
-            <a:srgbClr val="A4262C"/>
-          </a:solidFill>
-          <a:ln/>
-        </p:spPr>
-      </p:sp>
-      <p:sp>
-        <p:nvSpPr>
-          <p:cNvPr id="3" name="Text 1"/>
-          <p:cNvSpPr/>
-          <p:nvPr/>
-        </p:nvSpPr>
-        <p:spPr>
-          <a:xfrm>
-            <a:off x="1143000" y="457200"/>
-            <a:ext cx="8229600" cy="310896"/>
-          </a:xfrm>
-          <a:prstGeom prst="rect">
-            <a:avLst/>
-          </a:prstGeom>
-          <a:noFill/>
-          <a:ln/>
-        </p:spPr>
-        <p:txBody>
-          <a:bodyPr wrap="square" rtlCol="0" anchor="ctr"/>
-          <a:lstStyle/>
-          <a:p>
-            <a:pPr indent="0" marL="0">
-              <a:buNone/>
-            </a:pPr>
-            <a:r>
-              <a:rPr lang="en-US" sz="1200" b="1" spc="200" kern="0" dirty="0">
-                <a:solidFill>
-                  <a:srgbClr val="A4262C"/>
-                </a:solidFill>
-                <a:latin typeface="Microsoft JhengHei" pitchFamily="34" charset="0"/>
-                <a:ea typeface="Microsoft JhengHei" pitchFamily="34" charset="-122"/>
-                <a:cs typeface="Microsoft JhengHei" pitchFamily="34" charset="-120"/>
-              </a:rPr>
-              <a:t>情境 01 · 實機示範</a:t>
-            </a:r>
-            <a:endParaRPr lang="en-US" sz="1200" dirty="0"/>
-          </a:p>
-        </p:txBody>
-      </p:sp>
-      <p:sp>
-        <p:nvSpPr>
-          <p:cNvPr id="4" name="Text 2"/>
-          <p:cNvSpPr/>
-          <p:nvPr/>
-        </p:nvSpPr>
-        <p:spPr>
-          <a:xfrm>
-            <a:off x="640080" y="786384"/>
-            <a:ext cx="10972800" cy="640080"/>
-          </a:xfrm>
-          <a:prstGeom prst="rect">
-            <a:avLst/>
-          </a:prstGeom>
-          <a:noFill/>
-          <a:ln/>
-        </p:spPr>
-        <p:txBody>
-          <a:bodyPr wrap="square" rtlCol="0" anchor="ctr"/>
-          <a:lstStyle/>
-          <a:p>
-            <a:pPr indent="0" marL="0">
-              <a:buNone/>
-            </a:pPr>
-            <a:r>
-              <a:rPr lang="en-US" sz="3000" b="1" dirty="0">
-                <a:solidFill>
-                  <a:srgbClr val="1E2235"/>
-                </a:solidFill>
-                <a:latin typeface="Microsoft JhengHei" pitchFamily="34" charset="0"/>
-                <a:ea typeface="Microsoft JhengHei" pitchFamily="34" charset="-122"/>
-                <a:cs typeface="Microsoft JhengHei" pitchFamily="34" charset="-120"/>
-              </a:rPr>
-              <a:t>看 Cowork 怎麼做、產出什麼</a:t>
-            </a:r>
-            <a:endParaRPr lang="en-US" sz="3000" dirty="0"/>
-          </a:p>
-        </p:txBody>
-      </p:sp>
-      <p:sp>
-        <p:nvSpPr>
-          <p:cNvPr id="5" name="Shape 3"/>
-          <p:cNvSpPr/>
-          <p:nvPr/>
-        </p:nvSpPr>
-        <p:spPr>
-          <a:xfrm>
-            <a:off x="585216" y="1773936"/>
-            <a:ext cx="5184648" cy="3433186"/>
-          </a:xfrm>
-          <a:prstGeom prst="rect">
-            <a:avLst/>
-          </a:prstGeom>
-          <a:solidFill>
-            <a:srgbClr val="FFFFFF"/>
-          </a:solidFill>
-          <a:ln w="12700">
-            <a:solidFill>
-              <a:srgbClr val="E4E7F2"/>
-            </a:solidFill>
-            <a:prstDash val="solid"/>
-          </a:ln>
-          <a:effectLst>
-            <a:outerShdw sx="100000" sy="100000" kx="0" ky="0" algn="bl" rotWithShape="0" blurRad="114300" dist="38100" dir="5400000">
-              <a:srgbClr val="8A90B5">
-                <a:alpha val="22000"/>
-              </a:srgbClr>
-            </a:outerShdw>
-          </a:effectLst>
-        </p:spPr>
-      </p:sp>
-      <p:pic>
-        <p:nvPicPr>
-          <p:cNvPr id="6" name="Image 0" descr="C:\temp\CoworkLab\v2\_working\screenshots\mfg1_01_input.png">    </p:cNvPr>
-          <p:cNvPicPr>
-            <a:picLocks noChangeAspect="1"/>
-          </p:cNvPicPr>
-          <p:nvPr/>
-        </p:nvPicPr>
-        <p:blipFill>
-          <a:blip r:embed="rId1"/>
-          <a:stretch>
-            <a:fillRect/>
-          </a:stretch>
-        </p:blipFill>
-        <p:spPr>
-          <a:xfrm>
-            <a:off x="640080" y="1828800"/>
-            <a:ext cx="5074920" cy="3323458"/>
-          </a:xfrm>
-          <a:prstGeom prst="rect">
-            <a:avLst/>
-          </a:prstGeom>
-        </p:spPr>
-      </p:pic>
-      <p:sp>
-        <p:nvSpPr>
-          <p:cNvPr id="7" name="Text 4"/>
-          <p:cNvSpPr/>
-          <p:nvPr/>
-        </p:nvSpPr>
-        <p:spPr>
-          <a:xfrm>
-            <a:off x="640080" y="5261986"/>
-            <a:ext cx="5074920" cy="320040"/>
-          </a:xfrm>
-          <a:prstGeom prst="rect">
-            <a:avLst/>
-          </a:prstGeom>
-          <a:noFill/>
-          <a:ln/>
-        </p:spPr>
-        <p:txBody>
-          <a:bodyPr wrap="square" rtlCol="0" anchor="ctr"/>
-          <a:lstStyle/>
-          <a:p>
-            <a:pPr algn="ctr" indent="0" marL="0">
-              <a:buNone/>
-            </a:pPr>
-            <a:r>
-              <a:rPr lang="en-US" sz="1350" b="1" dirty="0">
-                <a:solidFill>
-                  <a:srgbClr val="A4262C"/>
-                </a:solidFill>
-                <a:latin typeface="Microsoft JhengHei" pitchFamily="34" charset="0"/>
-                <a:ea typeface="Microsoft JhengHei" pitchFamily="34" charset="-122"/>
-                <a:cs typeface="Microsoft JhengHei" pitchFamily="34" charset="-120"/>
-              </a:rPr>
-              <a:t>① 你的輸入與指令</a:t>
-            </a:r>
-            <a:endParaRPr lang="en-US" sz="1350" dirty="0"/>
-          </a:p>
-        </p:txBody>
-      </p:sp>
-      <p:sp>
-        <p:nvSpPr>
-          <p:cNvPr id="8" name="Shape 5"/>
-          <p:cNvSpPr/>
-          <p:nvPr/>
-        </p:nvSpPr>
-        <p:spPr>
-          <a:xfrm>
-            <a:off x="6163056" y="1773936"/>
-            <a:ext cx="5184648" cy="3433186"/>
-          </a:xfrm>
-          <a:prstGeom prst="rect">
-            <a:avLst/>
-          </a:prstGeom>
-          <a:solidFill>
-            <a:srgbClr val="FFFFFF"/>
-          </a:solidFill>
-          <a:ln w="12700">
-            <a:solidFill>
-              <a:srgbClr val="E4E7F2"/>
-            </a:solidFill>
-            <a:prstDash val="solid"/>
-          </a:ln>
-          <a:effectLst>
-            <a:outerShdw sx="100000" sy="100000" kx="0" ky="0" algn="bl" rotWithShape="0" blurRad="114300" dist="38100" dir="5400000">
-              <a:srgbClr val="8A90B5">
-                <a:alpha val="22000"/>
-              </a:srgbClr>
-            </a:outerShdw>
-          </a:effectLst>
-        </p:spPr>
-      </p:sp>
-      <p:pic>
-        <p:nvPicPr>
-          <p:cNvPr id="9" name="Image 1" descr="C:\temp\CoworkLab\v2\_working\screenshots\mfg1_03_approval.png">    </p:cNvPr>
-          <p:cNvPicPr>
-            <a:picLocks noChangeAspect="1"/>
-          </p:cNvPicPr>
-          <p:nvPr/>
-        </p:nvPicPr>
-        <p:blipFill>
-          <a:blip r:embed="rId2"/>
-          <a:stretch>
-            <a:fillRect/>
-          </a:stretch>
-        </p:blipFill>
-        <p:spPr>
-          <a:xfrm>
-            <a:off x="6217920" y="1828800"/>
-            <a:ext cx="5074920" cy="3323458"/>
-          </a:xfrm>
-          <a:prstGeom prst="rect">
-            <a:avLst/>
-          </a:prstGeom>
-        </p:spPr>
-      </p:pic>
-      <p:sp>
-        <p:nvSpPr>
-          <p:cNvPr id="10" name="Text 6"/>
-          <p:cNvSpPr/>
-          <p:nvPr/>
-        </p:nvSpPr>
-        <p:spPr>
-          <a:xfrm>
-            <a:off x="6217920" y="5261986"/>
-            <a:ext cx="5074920" cy="320040"/>
-          </a:xfrm>
-          <a:prstGeom prst="rect">
-            <a:avLst/>
-          </a:prstGeom>
-          <a:noFill/>
-          <a:ln/>
-        </p:spPr>
-        <p:txBody>
-          <a:bodyPr wrap="square" rtlCol="0" anchor="ctr"/>
-          <a:lstStyle/>
-          <a:p>
-            <a:pPr algn="ctr" indent="0" marL="0">
-              <a:buNone/>
-            </a:pPr>
-            <a:r>
-              <a:rPr lang="en-US" sz="1350" b="1" dirty="0">
-                <a:solidFill>
-                  <a:srgbClr val="A4262C"/>
-                </a:solidFill>
-                <a:latin typeface="Microsoft JhengHei" pitchFamily="34" charset="0"/>
-                <a:ea typeface="Microsoft JhengHei" pitchFamily="34" charset="-122"/>
-                <a:cs typeface="Microsoft JhengHei" pitchFamily="34" charset="-120"/>
-              </a:rPr>
-              <a:t>② 產出成果</a:t>
-            </a:r>
-            <a:endParaRPr lang="en-US" sz="1350" dirty="0"/>
-          </a:p>
-        </p:txBody>
-      </p:sp>
-      <p:sp>
-        <p:nvSpPr>
-          <p:cNvPr id="11" name="Shape 7"/>
-          <p:cNvSpPr/>
-          <p:nvPr/>
-        </p:nvSpPr>
-        <p:spPr>
-          <a:xfrm>
-            <a:off x="640080" y="5074920"/>
-            <a:ext cx="10911535" cy="1143000"/>
-          </a:xfrm>
-          <a:prstGeom prst="rect">
-            <a:avLst/>
-          </a:prstGeom>
-          <a:solidFill>
-            <a:srgbClr val="FFFFFF"/>
-          </a:solidFill>
-          <a:ln w="12700">
-            <a:solidFill>
-              <a:srgbClr val="E4E7F2"/>
-            </a:solidFill>
-            <a:prstDash val="solid"/>
-          </a:ln>
-        </p:spPr>
-      </p:sp>
-      <p:sp>
-        <p:nvSpPr>
-          <p:cNvPr id="12" name="Shape 8"/>
-          <p:cNvSpPr/>
-          <p:nvPr/>
-        </p:nvSpPr>
-        <p:spPr>
-          <a:xfrm>
-            <a:off x="640080" y="5074920"/>
-            <a:ext cx="91440" cy="1143000"/>
-          </a:xfrm>
-          <a:prstGeom prst="rect">
-            <a:avLst/>
-          </a:prstGeom>
-          <a:solidFill>
-            <a:srgbClr val="A4262C"/>
-          </a:solidFill>
-          <a:ln/>
-        </p:spPr>
-      </p:sp>
-      <p:sp>
-        <p:nvSpPr>
-          <p:cNvPr id="13" name="Text 9"/>
-          <p:cNvSpPr/>
-          <p:nvPr/>
-        </p:nvSpPr>
-        <p:spPr>
-          <a:xfrm>
-            <a:off x="914400" y="5184648"/>
-            <a:ext cx="1828800" cy="320040"/>
-          </a:xfrm>
-          <a:prstGeom prst="rect">
-            <a:avLst/>
-          </a:prstGeom>
-          <a:noFill/>
-          <a:ln/>
-        </p:spPr>
-        <p:txBody>
-          <a:bodyPr wrap="square" rtlCol="0" anchor="ctr"/>
-          <a:lstStyle/>
-          <a:p>
-            <a:pPr indent="0" marL="0">
-              <a:buNone/>
-            </a:pPr>
-            <a:r>
-              <a:rPr lang="en-US" sz="1400" b="1" dirty="0">
-                <a:solidFill>
-                  <a:srgbClr val="1E2235"/>
-                </a:solidFill>
-                <a:latin typeface="Microsoft JhengHei" pitchFamily="34" charset="0"/>
-                <a:ea typeface="Microsoft JhengHei" pitchFamily="34" charset="-122"/>
-                <a:cs typeface="Microsoft JhengHei" pitchFamily="34" charset="-120"/>
-              </a:rPr>
-              <a:t>產出驗收</a:t>
-            </a:r>
-            <a:endParaRPr lang="en-US" sz="1400" dirty="0"/>
-          </a:p>
-        </p:txBody>
-      </p:sp>
-      <p:pic>
-        <p:nvPicPr>
-          <p:cNvPr id="14" name="Image 2" descr="preencoded.png">    </p:cNvPr>
-          <p:cNvPicPr>
-            <a:picLocks noChangeAspect="1"/>
-          </p:cNvPicPr>
-          <p:nvPr/>
-        </p:nvPicPr>
-        <p:blipFill>
-          <a:blip r:embed="rId3"/>
-          <a:stretch>
-            <a:fillRect/>
-          </a:stretch>
-        </p:blipFill>
-        <p:spPr>
-          <a:xfrm>
-            <a:off x="2834640" y="5221224"/>
-            <a:ext cx="182880" cy="182880"/>
-          </a:xfrm>
-          <a:prstGeom prst="rect">
-            <a:avLst/>
-          </a:prstGeom>
-        </p:spPr>
-      </p:pic>
-      <p:sp>
-        <p:nvSpPr>
-          <p:cNvPr id="15" name="Text 10"/>
-          <p:cNvSpPr/>
-          <p:nvPr/>
-        </p:nvSpPr>
-        <p:spPr>
-          <a:xfrm>
-            <a:off x="3108960" y="5166360"/>
-            <a:ext cx="8168335" cy="310896"/>
-          </a:xfrm>
-          <a:prstGeom prst="rect">
-            <a:avLst/>
-          </a:prstGeom>
-          <a:noFill/>
-          <a:ln/>
-        </p:spPr>
-        <p:txBody>
-          <a:bodyPr wrap="square" rtlCol="0" anchor="ctr"/>
-          <a:lstStyle/>
-          <a:p>
-            <a:pPr indent="0" marL="0">
-              <a:buNone/>
-            </a:pPr>
-            <a:r>
-              <a:rPr lang="en-US" sz="1300" dirty="0">
-                <a:solidFill>
-                  <a:srgbClr val="1E2235"/>
-                </a:solidFill>
-                <a:latin typeface="Microsoft JhengHei" pitchFamily="34" charset="0"/>
-                <a:ea typeface="Microsoft JhengHei" pitchFamily="34" charset="-122"/>
-                <a:cs typeface="Microsoft JhengHei" pitchFamily="34" charset="-120"/>
-              </a:rPr>
-              <a:t>晨報包含四個固定段落（今日概況／緊急 Top 3／追蹤清單／下一班提醒）</a:t>
-            </a:r>
-            <a:endParaRPr lang="en-US" sz="1300" dirty="0"/>
-          </a:p>
-        </p:txBody>
-      </p:sp>
-      <p:pic>
-        <p:nvPicPr>
-          <p:cNvPr id="16" name="Image 3" descr="preencoded.png">    </p:cNvPr>
-          <p:cNvPicPr>
-            <a:picLocks noChangeAspect="1"/>
-          </p:cNvPicPr>
-          <p:nvPr/>
-        </p:nvPicPr>
-        <p:blipFill>
-          <a:blip r:embed="rId4"/>
-          <a:stretch>
-            <a:fillRect/>
-          </a:stretch>
-        </p:blipFill>
-        <p:spPr>
-          <a:xfrm>
-            <a:off x="2834640" y="5559552"/>
-            <a:ext cx="182880" cy="182880"/>
-          </a:xfrm>
-          <a:prstGeom prst="rect">
-            <a:avLst/>
-          </a:prstGeom>
-        </p:spPr>
-      </p:pic>
-      <p:sp>
-        <p:nvSpPr>
-          <p:cNvPr id="17" name="Text 11"/>
-          <p:cNvSpPr/>
-          <p:nvPr/>
-        </p:nvSpPr>
-        <p:spPr>
-          <a:xfrm>
-            <a:off x="3108960" y="5504688"/>
-            <a:ext cx="8168335" cy="310896"/>
-          </a:xfrm>
-          <a:prstGeom prst="rect">
-            <a:avLst/>
-          </a:prstGeom>
-          <a:noFill/>
-          <a:ln/>
-        </p:spPr>
-        <p:txBody>
-          <a:bodyPr wrap="square" rtlCol="0" anchor="ctr"/>
-          <a:lstStyle/>
-          <a:p>
-            <a:pPr indent="0" marL="0">
-              <a:buNone/>
-            </a:pPr>
-            <a:r>
-              <a:rPr lang="en-US" sz="1300" dirty="0">
-                <a:solidFill>
-                  <a:srgbClr val="1E2235"/>
-                </a:solidFill>
-                <a:latin typeface="Microsoft JhengHei" pitchFamily="34" charset="0"/>
-                <a:ea typeface="Microsoft JhengHei" pitchFamily="34" charset="-122"/>
-                <a:cs typeface="Microsoft JhengHei" pitchFamily="34" charset="-120"/>
-              </a:rPr>
-              <a:t>同一設備 24 小時內多次停機有被正確累計並列為緊急，而非分開輕描淡寫</a:t>
-            </a:r>
-            <a:endParaRPr lang="en-US" sz="1300" dirty="0"/>
-          </a:p>
-        </p:txBody>
-      </p:sp>
-      <p:pic>
-        <p:nvPicPr>
-          <p:cNvPr id="18" name="Image 4" descr="preencoded.png">    </p:cNvPr>
-          <p:cNvPicPr>
-            <a:picLocks noChangeAspect="1"/>
-          </p:cNvPicPr>
-          <p:nvPr/>
-        </p:nvPicPr>
-        <p:blipFill>
-          <a:blip r:embed="rId5"/>
-          <a:stretch>
-            <a:fillRect/>
-          </a:stretch>
-        </p:blipFill>
-        <p:spPr>
-          <a:xfrm>
-            <a:off x="2834640" y="5897880"/>
-            <a:ext cx="182880" cy="182880"/>
-          </a:xfrm>
-          <a:prstGeom prst="rect">
-            <a:avLst/>
-          </a:prstGeom>
-        </p:spPr>
-      </p:pic>
-      <p:sp>
-        <p:nvSpPr>
-          <p:cNvPr id="19" name="Text 12"/>
-          <p:cNvSpPr/>
-          <p:nvPr/>
-        </p:nvSpPr>
-        <p:spPr>
-          <a:xfrm>
-            <a:off x="3108960" y="5843016"/>
-            <a:ext cx="8168335" cy="310896"/>
-          </a:xfrm>
-          <a:prstGeom prst="rect">
-            <a:avLst/>
-          </a:prstGeom>
-          <a:noFill/>
-          <a:ln/>
-        </p:spPr>
-        <p:txBody>
-          <a:bodyPr wrap="square" rtlCol="0" anchor="ctr"/>
-          <a:lstStyle/>
-          <a:p>
-            <a:pPr indent="0" marL="0">
-              <a:buNone/>
-            </a:pPr>
-            <a:r>
-              <a:rPr lang="en-US" sz="1300" dirty="0">
-                <a:solidFill>
-                  <a:srgbClr val="1E2235"/>
-                </a:solidFill>
-                <a:latin typeface="Microsoft JhengHei" pitchFamily="34" charset="0"/>
-                <a:ea typeface="Microsoft JhengHei" pitchFamily="34" charset="-122"/>
-                <a:cs typeface="Microsoft JhengHei" pitchFamily="34" charset="-120"/>
-              </a:rPr>
-              <a:t>安全近失事件無論當下判斷多輕微，都有被列入緊急事項</a:t>
-            </a:r>
-            <a:endParaRPr lang="en-US" sz="1300" dirty="0"/>
-          </a:p>
-        </p:txBody>
-      </p:sp>
-      <p:sp>
-        <p:nvSpPr>
-          <p:cNvPr id="20" name="Text 13"/>
-          <p:cNvSpPr/>
-          <p:nvPr/>
-        </p:nvSpPr>
-        <p:spPr>
-          <a:xfrm>
-            <a:off x="640080" y="6473952"/>
-            <a:ext cx="5486400" cy="274320"/>
-          </a:xfrm>
-          <a:prstGeom prst="rect">
-            <a:avLst/>
-          </a:prstGeom>
-          <a:noFill/>
-          <a:ln/>
-        </p:spPr>
-        <p:txBody>
-          <a:bodyPr wrap="square" rtlCol="0" anchor="ctr"/>
-          <a:lstStyle/>
-          <a:p>
-            <a:pPr algn="l" indent="0" marL="0">
-              <a:buNone/>
-            </a:pPr>
-            <a:r>
-              <a:rPr lang="en-US" sz="900" dirty="0">
-                <a:solidFill>
-                  <a:srgbClr val="5B6079"/>
-                </a:solidFill>
-                <a:latin typeface="Microsoft JhengHei" pitchFamily="34" charset="0"/>
-                <a:ea typeface="Microsoft JhengHei" pitchFamily="34" charset="-122"/>
-                <a:cs typeface="Microsoft JhengHei" pitchFamily="34" charset="-120"/>
-              </a:rPr>
-              <a:t>Microsoft 365 Copilot Cowork</a:t>
-            </a:r>
-            <a:endParaRPr lang="en-US" sz="900" dirty="0"/>
-          </a:p>
-        </p:txBody>
-      </p:sp>
-      <p:sp>
-        <p:nvSpPr>
-          <p:cNvPr id="21" name="Text 14"/>
-          <p:cNvSpPr/>
-          <p:nvPr/>
-        </p:nvSpPr>
-        <p:spPr>
-          <a:xfrm>
-            <a:off x="11002975" y="6473952"/>
-            <a:ext cx="548640" cy="274320"/>
-          </a:xfrm>
-          <a:prstGeom prst="rect">
-            <a:avLst/>
-          </a:prstGeom>
-          <a:noFill/>
-          <a:ln/>
-        </p:spPr>
-        <p:txBody>
-          <a:bodyPr wrap="square" rtlCol="0" anchor="ctr"/>
-          <a:lstStyle/>
-          <a:p>
-            <a:pPr algn="r" indent="0" marL="0">
-              <a:buNone/>
-            </a:pPr>
-            <a:r>
-              <a:rPr lang="en-US" sz="900" dirty="0">
-                <a:solidFill>
-                  <a:srgbClr val="5B6079"/>
                 </a:solidFill>
                 <a:latin typeface="Microsoft JhengHei" pitchFamily="34" charset="0"/>
                 <a:ea typeface="Microsoft JhengHei" pitchFamily="34" charset="-122"/>
